--- a/Session_3_Fachtransfer_Projektwoche/S3_Folien.pptx
+++ b/Session_3_Fachtransfer_Projektwoche/S3_Folien.pptx
@@ -1219,7 +1219,7 @@
           <a:p>
             <a:r>
               <a:rPr lang="en-US" dirty="0"/>
-              <a:t>Erfahrung aus der Erprobung: Ohne gemeinsame Klassenstufe planten die Gruppen für unterschiedliche Jahrgänge, Anspruch und Übergaben passten nicht zusammen. Deshalb verbindlich Klasse 7. Eine offene Gruppe für weitere Fächer (Deutsch, Ethik, Biologie …) ist möglich.</a:t>
+              <a:t>Erfahrung aus der Erprobung: Ohne gemeinsame Klassenstufe planten die Gruppen für unterschiedliche Jahrgänge, Anspruch und Übergaben passten nicht zusammen. Deshalb legt die Gruppe jetzt eine gemeinsame Jahrgangsstufe fest – Ergebnis der Abfrage aus Selbstlernmodul 2 zeigen, per Handzeichen entscheiden, ohne klare Mehrheit Klasse 7. Für andere Jahrgänge die Variantentabelle aus 07_Anpassung_Jahrgangsstufen.md austeilen. Eine offene Gruppe für weitere Fächer (Deutsch, Ethik, Biologie …) ist möglich.</a:t>
             </a:r>
             <a:endParaRPr lang="en-US" dirty="0"/>
           </a:p>
@@ -1782,11 +1782,11 @@
             <a:r>
               <a:rPr lang="en-US" sz="1000" dirty="0">
                 <a:solidFill>
-                  <a:srgbClr val="5B6B73"/>
-                </a:solidFill>
-                <a:latin typeface="Calibri" pitchFamily="34" charset="0"/>
-                <a:ea typeface="Calibri" pitchFamily="34" charset="-122"/>
-                <a:cs typeface="Calibri" pitchFamily="34" charset="-120"/>
+                  <a:srgbClr val="706F6F"/>
+                </a:solidFill>
+                <a:latin typeface="Lucida Sans" pitchFamily="34" charset="0"/>
+                <a:ea typeface="Lucida Sans" pitchFamily="34" charset="-122"/>
+                <a:cs typeface="Lucida Sans" pitchFamily="34" charset="-120"/>
               </a:rPr>
               <a:t>Der mBot2 im Fachunterricht · Sitzung 3 · CC BY 4.0</a:t>
             </a:r>
@@ -1794,18 +1794,42 @@
           </a:p>
         </p:txBody>
       </p:sp>
-      <p:sp>
-        <p:nvSpPr>
-          <p:cNvPr id="3" name="Text 1"/>
+      <p:pic>
+        <p:nvPicPr>
+          <p:cNvPr id="3" name="Image 0" descr="/Users/h_tegelbeckers/Library/CloudStorage/Nextcloud-cloud.ovgu.de-HannesTegelbeckers/PROF_INGPED_TECHED/Admin/Personal/Lehre/Tegelbeckers Hannes/06_Lehrinhalte/Didaktikwerkstatt/DW-T 2026/Agent_Improved/assets/ovgu_fhw_logo.png">    </p:cNvPr>
+          <p:cNvPicPr>
+            <a:picLocks noChangeAspect="1"/>
+          </p:cNvPicPr>
+          <p:nvPr/>
+        </p:nvPicPr>
+        <p:blipFill>
+          <a:blip r:embed="rId1"/>
+          <a:stretch>
+            <a:fillRect/>
+          </a:stretch>
+        </p:blipFill>
+        <p:spPr>
+          <a:xfrm>
+            <a:off x="9174175" y="274320"/>
+            <a:ext cx="2468880" cy="564756"/>
+          </a:xfrm>
+          <a:prstGeom prst="rect">
+            <a:avLst/>
+          </a:prstGeom>
+        </p:spPr>
+      </p:pic>
+      <p:sp>
+        <p:nvSpPr>
+          <p:cNvPr id="4" name="Text 1"/>
           <p:cNvSpPr/>
           <p:nvPr>
-            <p:ph idx="101" type="title" hasCustomPrompt="1"/>
+            <p:ph idx="102" type="title" hasCustomPrompt="1"/>
           </p:nvPr>
         </p:nvSpPr>
         <p:spPr>
           <a:xfrm>
-            <a:off x="548640" y="320040"/>
-            <a:ext cx="11094415" cy="777240"/>
+            <a:off x="548640" y="274320"/>
+            <a:ext cx="8351215" cy="896112"/>
           </a:xfrm>
           <a:prstGeom prst="rect">
             <a:avLst/>
@@ -1816,23 +1840,23 @@
         <p:txBody>
           <a:bodyPr wrap="square" rtlCol="0"/>
           <a:lstStyle>
-            <a:lvl1pPr indent="0" marL="0">
+            <a:lvl1pPr algn="l" indent="0" marL="0">
               <a:buNone/>
-              <a:defRPr lang="en-US" sz="3200" b="1" dirty="0">
-                <a:solidFill>
-                  <a:srgbClr val="0B3C49"/>
-                </a:solidFill>
-                <a:latin typeface="Cambria" pitchFamily="34" charset="0"/>
-                <a:ea typeface="Cambria" pitchFamily="34" charset="-122"/>
-                <a:cs typeface="Cambria" pitchFamily="34" charset="-120"/>
+              <a:defRPr lang="en-US" sz="2600" b="1" dirty="0">
+                <a:solidFill>
+                  <a:srgbClr val="7A003F"/>
+                </a:solidFill>
+                <a:latin typeface="Lucida Sans" pitchFamily="34" charset="0"/>
+                <a:ea typeface="Lucida Sans" pitchFamily="34" charset="-122"/>
+                <a:cs typeface="Lucida Sans" pitchFamily="34" charset="-120"/>
               </a:defRPr>
             </a:lvl1pPr>
           </a:lstStyle>
           <a:p>
-            <a:pPr indent="0" marL="0">
+            <a:pPr algn="l" indent="0" marL="0">
               <a:buNone/>
             </a:pPr>
-            <a:endParaRPr lang="en-US" sz="3200" dirty="0"/>
+            <a:endParaRPr lang="en-US" sz="2600" dirty="0"/>
           </a:p>
         </p:txBody>
       </p:sp>
@@ -1866,11 +1890,11 @@
             <a:lvl1pPr>
               <a:defRPr sz="1000">
                 <a:solidFill>
-                  <a:srgbClr val="5B6B73"/>
-                </a:solidFill>
-                <a:latin typeface="Calibri"/>
-                <a:ea typeface="Calibri"/>
-                <a:cs typeface="Calibri"/>
+                  <a:srgbClr val="706F6F"/>
+                </a:solidFill>
+                <a:latin typeface="Lucida Sans"/>
+                <a:ea typeface="Lucida Sans"/>
+                <a:cs typeface="Lucida Sans"/>
               </a:defRPr>
             </a:lvl1pPr>
           </a:lstStyle>
@@ -1894,11 +1918,11 @@
 
 <file path=ppt/slideLayouts/slideLayout3.xml><?xml version="1.0" encoding="utf-8"?>
 <p:sldLayout xmlns:a="http://schemas.openxmlformats.org/drawingml/2006/main" xmlns:r="http://schemas.openxmlformats.org/officeDocument/2006/relationships" xmlns:p="http://schemas.openxmlformats.org/presentationml/2006/main" preserve="1">
-  <p:cSld name="DUNKEL">
+  <p:cSld name="TITEL">
     <p:bg>
       <p:bgPr>
         <a:solidFill>
-          <a:srgbClr val="0B3C49"/>
+          <a:srgbClr val="FFFFFF"/>
         </a:solidFill>
       </p:bgPr>
     </p:bg>
@@ -1916,9 +1940,33 @@
           <a:chExt cx="0" cy="0"/>
         </a:xfrm>
       </p:grpSpPr>
-      <p:sp>
-        <p:nvSpPr>
-          <p:cNvPr id="2" name="Text 0"/>
+      <p:pic>
+        <p:nvPicPr>
+          <p:cNvPr id="2" name="Image 0" descr="/Users/h_tegelbeckers/Library/CloudStorage/Nextcloud-cloud.ovgu.de-HannesTegelbeckers/PROF_INGPED_TECHED/Admin/Personal/Lehre/Tegelbeckers Hannes/06_Lehrinhalte/Didaktikwerkstatt/DW-T 2026/Agent_Improved/assets/ovgu_fhw_logo.png">    </p:cNvPr>
+          <p:cNvPicPr>
+            <a:picLocks noChangeAspect="1"/>
+          </p:cNvPicPr>
+          <p:nvPr/>
+        </p:nvPicPr>
+        <p:blipFill>
+          <a:blip r:embed="rId1"/>
+          <a:stretch>
+            <a:fillRect/>
+          </a:stretch>
+        </p:blipFill>
+        <p:spPr>
+          <a:xfrm>
+            <a:off x="548640" y="457200"/>
+            <a:ext cx="5486400" cy="1255014"/>
+          </a:xfrm>
+          <a:prstGeom prst="rect">
+            <a:avLst/>
+          </a:prstGeom>
+        </p:spPr>
+      </p:pic>
+      <p:sp>
+        <p:nvSpPr>
+          <p:cNvPr id="3" name="Text 0"/>
           <p:cNvSpPr txBox="1"/>
           <p:nvPr/>
         </p:nvSpPr>
@@ -1943,11 +1991,11 @@
             <a:r>
               <a:rPr lang="en-US" sz="1000" dirty="0">
                 <a:solidFill>
-                  <a:srgbClr val="9FC3C0"/>
-                </a:solidFill>
-                <a:latin typeface="Calibri" pitchFamily="34" charset="0"/>
-                <a:ea typeface="Calibri" pitchFamily="34" charset="-122"/>
-                <a:cs typeface="Calibri" pitchFamily="34" charset="-120"/>
+                  <a:srgbClr val="706F6F"/>
+                </a:solidFill>
+                <a:latin typeface="Lucida Sans" pitchFamily="34" charset="0"/>
+                <a:ea typeface="Lucida Sans" pitchFamily="34" charset="-122"/>
+                <a:cs typeface="Lucida Sans" pitchFamily="34" charset="-120"/>
               </a:rPr>
               <a:t>Der mBot2 im Fachunterricht · Sitzung 3 · CC BY 4.0</a:t>
             </a:r>
@@ -2010,11 +2058,11 @@
             <a:lvl1pPr>
               <a:defRPr sz="1000">
                 <a:solidFill>
-                  <a:srgbClr val="5B6B73"/>
-                </a:solidFill>
-                <a:latin typeface="Calibri"/>
-                <a:ea typeface="Calibri"/>
-                <a:cs typeface="Calibri"/>
+                  <a:srgbClr val="706F6F"/>
+                </a:solidFill>
+                <a:latin typeface="Lucida Sans"/>
+                <a:ea typeface="Lucida Sans"/>
+                <a:cs typeface="Lucida Sans"/>
               </a:defRPr>
             </a:lvl1pPr>
           </a:lstStyle>
@@ -2315,8 +2363,8 @@
         </p:nvSpPr>
         <p:spPr>
           <a:xfrm>
-            <a:off x="548640" y="1188720"/>
-            <a:ext cx="9144000" cy="457200"/>
+            <a:off x="548640" y="2148840"/>
+            <a:ext cx="9144000" cy="411480"/>
           </a:xfrm>
           <a:prstGeom prst="rect">
             <a:avLst/>
@@ -2332,17 +2380,17 @@
               <a:buNone/>
             </a:pPr>
             <a:r>
-              <a:rPr lang="en-US" sz="1600" b="1" spc="200" kern="0" dirty="0">
-                <a:solidFill>
-                  <a:srgbClr val="F6B27A"/>
-                </a:solidFill>
-                <a:latin typeface="Calibri" pitchFamily="34" charset="0"/>
-                <a:ea typeface="Calibri" pitchFamily="34" charset="-122"/>
-                <a:cs typeface="Calibri" pitchFamily="34" charset="-120"/>
+              <a:rPr lang="en-US" sz="1400" b="1" spc="200" kern="0" dirty="0">
+                <a:solidFill>
+                  <a:srgbClr val="706F6F"/>
+                </a:solidFill>
+                <a:latin typeface="Lucida Sans" pitchFamily="34" charset="0"/>
+                <a:ea typeface="Lucida Sans" pitchFamily="34" charset="-122"/>
+                <a:cs typeface="Lucida Sans" pitchFamily="34" charset="-120"/>
               </a:rPr>
               <a:t>FORTBILDUNGSREIHE · DER mBOT2 IM FACHUNTERRICHT</a:t>
             </a:r>
-            <a:endParaRPr lang="en-US" sz="1600" dirty="0"/>
+            <a:endParaRPr lang="en-US" sz="1400" dirty="0"/>
           </a:p>
         </p:txBody>
       </p:sp>
@@ -2354,8 +2402,8 @@
         </p:nvSpPr>
         <p:spPr>
           <a:xfrm>
-            <a:off x="548640" y="1737360"/>
-            <a:ext cx="10515600" cy="1371600"/>
+            <a:off x="548640" y="2606040"/>
+            <a:ext cx="9509760" cy="1188720"/>
           </a:xfrm>
           <a:prstGeom prst="rect">
             <a:avLst/>
@@ -2371,17 +2419,17 @@
               <a:buNone/>
             </a:pPr>
             <a:r>
-              <a:rPr lang="en-US" sz="4400" b="1" dirty="0">
-                <a:solidFill>
-                  <a:srgbClr val="FFFFFF"/>
-                </a:solidFill>
-                <a:latin typeface="Cambria" pitchFamily="34" charset="0"/>
-                <a:ea typeface="Cambria" pitchFamily="34" charset="-122"/>
-                <a:cs typeface="Cambria" pitchFamily="34" charset="-120"/>
+              <a:rPr lang="en-US" sz="4000" b="1" dirty="0">
+                <a:solidFill>
+                  <a:srgbClr val="7A003F"/>
+                </a:solidFill>
+                <a:latin typeface="Lucida Sans" pitchFamily="34" charset="0"/>
+                <a:ea typeface="Lucida Sans" pitchFamily="34" charset="-122"/>
+                <a:cs typeface="Lucida Sans" pitchFamily="34" charset="-120"/>
               </a:rPr>
               <a:t>Vom Roboter zum Unterricht</a:t>
             </a:r>
-            <a:endParaRPr lang="en-US" sz="4400" dirty="0"/>
+            <a:endParaRPr lang="en-US" sz="4000" dirty="0"/>
           </a:p>
         </p:txBody>
       </p:sp>
@@ -2393,8 +2441,8 @@
         </p:nvSpPr>
         <p:spPr>
           <a:xfrm>
-            <a:off x="548640" y="3200400"/>
-            <a:ext cx="10515600" cy="731520"/>
+            <a:off x="548640" y="3840480"/>
+            <a:ext cx="9509760" cy="640080"/>
           </a:xfrm>
           <a:prstGeom prst="rect">
             <a:avLst/>
@@ -2410,17 +2458,17 @@
               <a:buNone/>
             </a:pPr>
             <a:r>
-              <a:rPr lang="en-US" sz="2200" dirty="0">
-                <a:solidFill>
-                  <a:srgbClr val="CFE5E3"/>
-                </a:solidFill>
-                <a:latin typeface="Calibri" pitchFamily="34" charset="0"/>
-                <a:ea typeface="Calibri" pitchFamily="34" charset="-122"/>
-                <a:cs typeface="Calibri" pitchFamily="34" charset="-120"/>
+              <a:rPr lang="en-US" sz="2000" dirty="0">
+                <a:solidFill>
+                  <a:srgbClr val="1D1D1B"/>
+                </a:solidFill>
+                <a:latin typeface="Lucida Sans" pitchFamily="34" charset="0"/>
+                <a:ea typeface="Lucida Sans" pitchFamily="34" charset="-122"/>
+                <a:cs typeface="Lucida Sans" pitchFamily="34" charset="-120"/>
               </a:rPr>
               <a:t>Fachbezogene Erprobung und Planung einer Projektwoche</a:t>
             </a:r>
-            <a:endParaRPr lang="en-US" sz="2200" dirty="0"/>
+            <a:endParaRPr lang="en-US" sz="2000" dirty="0"/>
           </a:p>
         </p:txBody>
       </p:sp>
@@ -2432,8 +2480,8 @@
         </p:nvSpPr>
         <p:spPr>
           <a:xfrm>
-            <a:off x="548640" y="4389120"/>
-            <a:ext cx="2514600" cy="548640"/>
+            <a:off x="548640" y="4800600"/>
+            <a:ext cx="2697480" cy="548640"/>
           </a:xfrm>
           <a:prstGeom prst="roundRect">
             <a:avLst>
@@ -2441,11 +2489,11 @@
             </a:avLst>
           </a:prstGeom>
           <a:solidFill>
-            <a:srgbClr val="174F5E"/>
+            <a:srgbClr val="FDF0E3"/>
           </a:solidFill>
           <a:ln w="12700">
             <a:solidFill>
-              <a:srgbClr val="2C6E7C"/>
+              <a:srgbClr val="EF7D00"/>
             </a:solidFill>
             <a:prstDash val="solid"/>
           </a:ln>
@@ -2459,8 +2507,8 @@
         </p:nvSpPr>
         <p:spPr>
           <a:xfrm>
-            <a:off x="548640" y="4389120"/>
-            <a:ext cx="2514600" cy="548640"/>
+            <a:off x="548640" y="4800600"/>
+            <a:ext cx="2697480" cy="548640"/>
           </a:xfrm>
           <a:prstGeom prst="rect">
             <a:avLst/>
@@ -2478,11 +2526,11 @@
             <a:r>
               <a:rPr lang="en-US" sz="1400" dirty="0">
                 <a:solidFill>
-                  <a:srgbClr val="FFFFFF"/>
-                </a:solidFill>
-                <a:latin typeface="Calibri" pitchFamily="34" charset="0"/>
-                <a:ea typeface="Calibri" pitchFamily="34" charset="-122"/>
-                <a:cs typeface="Calibri" pitchFamily="34" charset="-120"/>
+                  <a:srgbClr val="1D1D1B"/>
+                </a:solidFill>
+                <a:latin typeface="Lucida Sans" pitchFamily="34" charset="0"/>
+                <a:ea typeface="Lucida Sans" pitchFamily="34" charset="-122"/>
+                <a:cs typeface="Lucida Sans" pitchFamily="34" charset="-120"/>
               </a:rPr>
               <a:t>Sitzung 3 von 3</a:t>
             </a:r>
@@ -2498,8 +2546,8 @@
         </p:nvSpPr>
         <p:spPr>
           <a:xfrm>
-            <a:off x="3246120" y="4389120"/>
-            <a:ext cx="2514600" cy="548640"/>
+            <a:off x="3429000" y="4800600"/>
+            <a:ext cx="2697480" cy="548640"/>
           </a:xfrm>
           <a:prstGeom prst="roundRect">
             <a:avLst>
@@ -2507,11 +2555,11 @@
             </a:avLst>
           </a:prstGeom>
           <a:solidFill>
-            <a:srgbClr val="174F5E"/>
+            <a:srgbClr val="FDF0E3"/>
           </a:solidFill>
           <a:ln w="12700">
             <a:solidFill>
-              <a:srgbClr val="2C6E7C"/>
+              <a:srgbClr val="EF7D00"/>
             </a:solidFill>
             <a:prstDash val="solid"/>
           </a:ln>
@@ -2525,8 +2573,8 @@
         </p:nvSpPr>
         <p:spPr>
           <a:xfrm>
-            <a:off x="3246120" y="4389120"/>
-            <a:ext cx="2514600" cy="548640"/>
+            <a:off x="3429000" y="4800600"/>
+            <a:ext cx="2697480" cy="548640"/>
           </a:xfrm>
           <a:prstGeom prst="rect">
             <a:avLst/>
@@ -2544,11 +2592,11 @@
             <a:r>
               <a:rPr lang="en-US" sz="1400" dirty="0">
                 <a:solidFill>
-                  <a:srgbClr val="FFFFFF"/>
-                </a:solidFill>
-                <a:latin typeface="Calibri" pitchFamily="34" charset="0"/>
-                <a:ea typeface="Calibri" pitchFamily="34" charset="-122"/>
-                <a:cs typeface="Calibri" pitchFamily="34" charset="-120"/>
+                  <a:srgbClr val="1D1D1B"/>
+                </a:solidFill>
+                <a:latin typeface="Lucida Sans" pitchFamily="34" charset="0"/>
+                <a:ea typeface="Lucida Sans" pitchFamily="34" charset="-122"/>
+                <a:cs typeface="Lucida Sans" pitchFamily="34" charset="-120"/>
               </a:rPr>
               <a:t>90 Minuten</a:t>
             </a:r>
@@ -2564,8 +2612,8 @@
         </p:nvSpPr>
         <p:spPr>
           <a:xfrm>
-            <a:off x="5943600" y="4389120"/>
-            <a:ext cx="2514600" cy="548640"/>
+            <a:off x="6309360" y="4800600"/>
+            <a:ext cx="2697480" cy="548640"/>
           </a:xfrm>
           <a:prstGeom prst="roundRect">
             <a:avLst>
@@ -2573,11 +2621,11 @@
             </a:avLst>
           </a:prstGeom>
           <a:solidFill>
-            <a:srgbClr val="174F5E"/>
+            <a:srgbClr val="FDF0E3"/>
           </a:solidFill>
           <a:ln w="12700">
             <a:solidFill>
-              <a:srgbClr val="2C6E7C"/>
+              <a:srgbClr val="EF7D00"/>
             </a:solidFill>
             <a:prstDash val="solid"/>
           </a:ln>
@@ -2591,8 +2639,8 @@
         </p:nvSpPr>
         <p:spPr>
           <a:xfrm>
-            <a:off x="5943600" y="4389120"/>
-            <a:ext cx="2514600" cy="548640"/>
+            <a:off x="6309360" y="4800600"/>
+            <a:ext cx="2697480" cy="548640"/>
           </a:xfrm>
           <a:prstGeom prst="rect">
             <a:avLst/>
@@ -2610,13 +2658,13 @@
             <a:r>
               <a:rPr lang="en-US" sz="1400" dirty="0">
                 <a:solidFill>
-                  <a:srgbClr val="FFFFFF"/>
-                </a:solidFill>
-                <a:latin typeface="Calibri" pitchFamily="34" charset="0"/>
-                <a:ea typeface="Calibri" pitchFamily="34" charset="-122"/>
-                <a:cs typeface="Calibri" pitchFamily="34" charset="-120"/>
-              </a:rPr>
-              <a:t>Klasse 7</a:t>
+                  <a:srgbClr val="1D1D1B"/>
+                </a:solidFill>
+                <a:latin typeface="Lucida Sans" pitchFamily="34" charset="0"/>
+                <a:ea typeface="Lucida Sans" pitchFamily="34" charset="-122"/>
+                <a:cs typeface="Lucida Sans" pitchFamily="34" charset="-120"/>
+              </a:rPr>
+              <a:t>Klasse 5–13</a:t>
             </a:r>
             <a:endParaRPr lang="en-US" sz="1400" dirty="0"/>
           </a:p>
@@ -2630,18 +2678,18 @@
         </p:nvSpPr>
         <p:spPr>
           <a:xfrm>
-            <a:off x="10180015" y="1188720"/>
-            <a:ext cx="1463040" cy="1463040"/>
+            <a:off x="10088575" y="2286000"/>
+            <a:ext cx="1554480" cy="1554480"/>
           </a:xfrm>
           <a:prstGeom prst="ellipse">
             <a:avLst/>
           </a:prstGeom>
           <a:solidFill>
-            <a:srgbClr val="E8772E"/>
+            <a:srgbClr val="EF7D00"/>
           </a:solidFill>
           <a:ln w="12700">
             <a:solidFill>
-              <a:srgbClr val="E8772E"/>
+              <a:srgbClr val="EF7D00"/>
             </a:solidFill>
             <a:prstDash val="solid"/>
           </a:ln>
@@ -2655,8 +2703,8 @@
         </p:nvSpPr>
         <p:spPr>
           <a:xfrm>
-            <a:off x="10180015" y="1188720"/>
-            <a:ext cx="1463040" cy="1463040"/>
+            <a:off x="10088575" y="2286000"/>
+            <a:ext cx="1554480" cy="1554480"/>
           </a:xfrm>
           <a:prstGeom prst="rect">
             <a:avLst/>
@@ -2674,11 +2722,11 @@
             <a:r>
               <a:rPr lang="en-US" sz="5400" b="1" dirty="0">
                 <a:solidFill>
-                  <a:srgbClr val="FFFFFF"/>
-                </a:solidFill>
-                <a:latin typeface="Calibri" pitchFamily="34" charset="0"/>
-                <a:ea typeface="Calibri" pitchFamily="34" charset="-122"/>
-                <a:cs typeface="Calibri" pitchFamily="34" charset="-120"/>
+                  <a:srgbClr val="1D1D1B"/>
+                </a:solidFill>
+                <a:latin typeface="Lucida Sans" pitchFamily="34" charset="0"/>
+                <a:ea typeface="Lucida Sans" pitchFamily="34" charset="-122"/>
+                <a:cs typeface="Lucida Sans" pitchFamily="34" charset="-120"/>
               </a:rPr>
               <a:t>3</a:t>
             </a:r>
@@ -2716,13 +2764,13 @@
           <p:cNvPr id="2" name="Text 1"/>
           <p:cNvSpPr/>
           <p:nvPr>
-            <p:ph idx="101" type="title" hasCustomPrompt="1"/>
+            <p:ph idx="102" type="title" hasCustomPrompt="1"/>
           </p:nvPr>
         </p:nvSpPr>
         <p:spPr>
           <a:xfrm>
-            <a:off x="548640" y="320040"/>
-            <a:ext cx="11094415" cy="777240"/>
+            <a:off x="548640" y="274320"/>
+            <a:ext cx="8351215" cy="896112"/>
           </a:xfrm>
           <a:prstGeom prst="rect">
             <a:avLst/>
@@ -2734,21 +2782,21 @@
           <a:bodyPr wrap="square" lIns="0" tIns="0" rIns="0" bIns="0" rtlCol="0" anchor="ctr"/>
           <a:lstStyle/>
           <a:p>
-            <a:pPr indent="0" marL="0">
+            <a:pPr algn="l" indent="0" marL="0">
               <a:buNone/>
             </a:pPr>
             <a:r>
-              <a:rPr lang="en-US" sz="3200" b="1" dirty="0">
-                <a:solidFill>
-                  <a:srgbClr val="0B3C49"/>
-                </a:solidFill>
-                <a:latin typeface="Cambria" pitchFamily="34" charset="0"/>
-                <a:ea typeface="Cambria" pitchFamily="34" charset="-122"/>
-                <a:cs typeface="Cambria" pitchFamily="34" charset="-120"/>
+              <a:rPr lang="en-US" sz="2600" b="1" dirty="0">
+                <a:solidFill>
+                  <a:srgbClr val="7A003F"/>
+                </a:solidFill>
+                <a:latin typeface="Lucida Sans" pitchFamily="34" charset="0"/>
+                <a:ea typeface="Lucida Sans" pitchFamily="34" charset="-122"/>
+                <a:cs typeface="Lucida Sans" pitchFamily="34" charset="-120"/>
               </a:rPr>
               <a:t>Ein gutes Lernziel</a:t>
             </a:r>
-            <a:endParaRPr lang="en-US" sz="3200" dirty="0"/>
+            <a:endParaRPr lang="en-US" sz="2600" dirty="0"/>
           </a:p>
         </p:txBody>
       </p:sp>
@@ -2769,11 +2817,11 @@
             </a:avLst>
           </a:prstGeom>
           <a:solidFill>
-            <a:srgbClr val="EEF1F2"/>
+            <a:srgbClr val="F2F2F2"/>
           </a:solidFill>
           <a:ln w="12700">
             <a:solidFill>
-              <a:srgbClr val="EEF1F2"/>
+              <a:srgbClr val="F2F2F2"/>
             </a:solidFill>
             <a:prstDash val="solid"/>
           </a:ln>
@@ -2794,11 +2842,11 @@
             <a:avLst/>
           </a:prstGeom>
           <a:solidFill>
-            <a:srgbClr val="7A8B91"/>
+            <a:srgbClr val="9D9D9C"/>
           </a:solidFill>
           <a:ln w="12700">
             <a:solidFill>
-              <a:srgbClr val="7A8B91"/>
+              <a:srgbClr val="9D9D9C"/>
             </a:solidFill>
             <a:prstDash val="solid"/>
           </a:ln>
@@ -2833,9 +2881,9 @@
                 <a:solidFill>
                   <a:srgbClr val="FFFFFF"/>
                 </a:solidFill>
-                <a:latin typeface="Calibri" pitchFamily="34" charset="0"/>
-                <a:ea typeface="Calibri" pitchFamily="34" charset="-122"/>
-                <a:cs typeface="Calibri" pitchFamily="34" charset="-120"/>
+                <a:latin typeface="Lucida Sans" pitchFamily="34" charset="0"/>
+                <a:ea typeface="Lucida Sans" pitchFamily="34" charset="-122"/>
+                <a:cs typeface="Lucida Sans" pitchFamily="34" charset="-120"/>
               </a:rPr>
               <a:t>–</a:t>
             </a:r>
@@ -2870,11 +2918,11 @@
             <a:r>
               <a:rPr lang="en-US" sz="1800" b="1" dirty="0">
                 <a:solidFill>
-                  <a:srgbClr val="0B3C49"/>
-                </a:solidFill>
-                <a:latin typeface="Calibri" pitchFamily="34" charset="0"/>
-                <a:ea typeface="Calibri" pitchFamily="34" charset="-122"/>
-                <a:cs typeface="Calibri" pitchFamily="34" charset="-120"/>
+                  <a:srgbClr val="7A003F"/>
+                </a:solidFill>
+                <a:latin typeface="Lucida Sans" pitchFamily="34" charset="0"/>
+                <a:ea typeface="Lucida Sans" pitchFamily="34" charset="-122"/>
+                <a:cs typeface="Lucida Sans" pitchFamily="34" charset="-120"/>
               </a:rPr>
               <a:t>So eher nicht</a:t>
             </a:r>
@@ -2913,11 +2961,11 @@
             <a:r>
               <a:rPr lang="en-US" sz="1600" dirty="0">
                 <a:solidFill>
-                  <a:srgbClr val="1F2A30"/>
-                </a:solidFill>
-                <a:latin typeface="Calibri" pitchFamily="34" charset="0"/>
-                <a:ea typeface="Calibri" pitchFamily="34" charset="-122"/>
-                <a:cs typeface="Calibri" pitchFamily="34" charset="-120"/>
+                  <a:srgbClr val="1D1D1B"/>
+                </a:solidFill>
+                <a:latin typeface="Lucida Sans" pitchFamily="34" charset="0"/>
+                <a:ea typeface="Lucida Sans" pitchFamily="34" charset="-122"/>
+                <a:cs typeface="Lucida Sans" pitchFamily="34" charset="-120"/>
               </a:rPr>
               <a:t>Die SuS programmieren den mBot2.</a:t>
             </a:r>
@@ -2934,11 +2982,11 @@
             <a:r>
               <a:rPr lang="en-US" sz="1600" dirty="0">
                 <a:solidFill>
-                  <a:srgbClr val="1F2A30"/>
-                </a:solidFill>
-                <a:latin typeface="Calibri" pitchFamily="34" charset="0"/>
-                <a:ea typeface="Calibri" pitchFamily="34" charset="-122"/>
-                <a:cs typeface="Calibri" pitchFamily="34" charset="-120"/>
+                  <a:srgbClr val="1D1D1B"/>
+                </a:solidFill>
+                <a:latin typeface="Lucida Sans" pitchFamily="34" charset="0"/>
+                <a:ea typeface="Lucida Sans" pitchFamily="34" charset="-122"/>
+                <a:cs typeface="Lucida Sans" pitchFamily="34" charset="-120"/>
               </a:rPr>
               <a:t>Die SuS haben Spaß an Technik.</a:t>
             </a:r>
@@ -2955,11 +3003,11 @@
             <a:r>
               <a:rPr lang="en-US" sz="1600" dirty="0">
                 <a:solidFill>
-                  <a:srgbClr val="1F2A30"/>
-                </a:solidFill>
-                <a:latin typeface="Calibri" pitchFamily="34" charset="0"/>
-                <a:ea typeface="Calibri" pitchFamily="34" charset="-122"/>
-                <a:cs typeface="Calibri" pitchFamily="34" charset="-120"/>
+                  <a:srgbClr val="1D1D1B"/>
+                </a:solidFill>
+                <a:latin typeface="Lucida Sans" pitchFamily="34" charset="0"/>
+                <a:ea typeface="Lucida Sans" pitchFamily="34" charset="-122"/>
+                <a:cs typeface="Lucida Sans" pitchFamily="34" charset="-120"/>
               </a:rPr>
               <a:t>Die SuS lernen Sensoren kennen.</a:t>
             </a:r>
@@ -2984,11 +3032,11 @@
             </a:avLst>
           </a:prstGeom>
           <a:solidFill>
-            <a:srgbClr val="E6F2F1"/>
+            <a:srgbClr val="F2F2F2"/>
           </a:solidFill>
           <a:ln w="12700">
             <a:solidFill>
-              <a:srgbClr val="E6F2F1"/>
+              <a:srgbClr val="F2F2F2"/>
             </a:solidFill>
             <a:prstDash val="solid"/>
           </a:ln>
@@ -3009,11 +3057,11 @@
             <a:avLst/>
           </a:prstGeom>
           <a:solidFill>
-            <a:srgbClr val="0B6E69"/>
+            <a:srgbClr val="7A003F"/>
           </a:solidFill>
           <a:ln w="12700">
             <a:solidFill>
-              <a:srgbClr val="0B6E69"/>
+              <a:srgbClr val="7A003F"/>
             </a:solidFill>
             <a:prstDash val="solid"/>
           </a:ln>
@@ -3048,9 +3096,9 @@
                 <a:solidFill>
                   <a:srgbClr val="FFFFFF"/>
                 </a:solidFill>
-                <a:latin typeface="Calibri" pitchFamily="34" charset="0"/>
-                <a:ea typeface="Calibri" pitchFamily="34" charset="-122"/>
-                <a:cs typeface="Calibri" pitchFamily="34" charset="-120"/>
+                <a:latin typeface="Lucida Sans" pitchFamily="34" charset="0"/>
+                <a:ea typeface="Lucida Sans" pitchFamily="34" charset="-122"/>
+                <a:cs typeface="Lucida Sans" pitchFamily="34" charset="-120"/>
               </a:rPr>
               <a:t>+</a:t>
             </a:r>
@@ -3085,11 +3133,11 @@
             <a:r>
               <a:rPr lang="en-US" sz="1800" b="1" dirty="0">
                 <a:solidFill>
-                  <a:srgbClr val="0B3C49"/>
-                </a:solidFill>
-                <a:latin typeface="Calibri" pitchFamily="34" charset="0"/>
-                <a:ea typeface="Calibri" pitchFamily="34" charset="-122"/>
-                <a:cs typeface="Calibri" pitchFamily="34" charset="-120"/>
+                  <a:srgbClr val="7A003F"/>
+                </a:solidFill>
+                <a:latin typeface="Lucida Sans" pitchFamily="34" charset="0"/>
+                <a:ea typeface="Lucida Sans" pitchFamily="34" charset="-122"/>
+                <a:cs typeface="Lucida Sans" pitchFamily="34" charset="-120"/>
               </a:rPr>
               <a:t>So ist es überprüfbar</a:t>
             </a:r>
@@ -3128,11 +3176,11 @@
             <a:r>
               <a:rPr lang="en-US" sz="1600" dirty="0">
                 <a:solidFill>
-                  <a:srgbClr val="1F2A30"/>
-                </a:solidFill>
-                <a:latin typeface="Calibri" pitchFamily="34" charset="0"/>
-                <a:ea typeface="Calibri" pitchFamily="34" charset="-122"/>
-                <a:cs typeface="Calibri" pitchFamily="34" charset="-120"/>
+                  <a:srgbClr val="1D1D1B"/>
+                </a:solidFill>
+                <a:latin typeface="Lucida Sans" pitchFamily="34" charset="0"/>
+                <a:ea typeface="Lucida Sans" pitchFamily="34" charset="-122"/>
+                <a:cs typeface="Lucida Sans" pitchFamily="34" charset="-120"/>
               </a:rPr>
               <a:t>Die SuS berechnen Längen von Fahrwegen im Raster und begründen den kürzesten Weg.</a:t>
             </a:r>
@@ -3149,11 +3197,11 @@
             <a:r>
               <a:rPr lang="en-US" sz="1600" dirty="0">
                 <a:solidFill>
-                  <a:srgbClr val="1F2A30"/>
-                </a:solidFill>
-                <a:latin typeface="Calibri" pitchFamily="34" charset="0"/>
-                <a:ea typeface="Calibri" pitchFamily="34" charset="-122"/>
-                <a:cs typeface="Calibri" pitchFamily="34" charset="-120"/>
+                  <a:srgbClr val="1D1D1B"/>
+                </a:solidFill>
+                <a:latin typeface="Lucida Sans" pitchFamily="34" charset="0"/>
+                <a:ea typeface="Lucida Sans" pitchFamily="34" charset="-122"/>
+                <a:cs typeface="Lucida Sans" pitchFamily="34" charset="-120"/>
               </a:rPr>
               <a:t>Die SuS stellen Messwerte im s-t-Diagramm dar und deuten die Steigung als Geschwindigkeit.</a:t>
             </a:r>
@@ -3178,11 +3226,11 @@
             </a:avLst>
           </a:prstGeom>
           <a:solidFill>
-            <a:srgbClr val="FCEBDD"/>
+            <a:srgbClr val="FDF0E3"/>
           </a:solidFill>
           <a:ln w="12700">
             <a:solidFill>
-              <a:srgbClr val="FCEBDD"/>
+              <a:srgbClr val="FDF0E3"/>
             </a:solidFill>
             <a:prstDash val="solid"/>
           </a:ln>
@@ -3203,11 +3251,11 @@
             <a:avLst/>
           </a:prstGeom>
           <a:solidFill>
-            <a:srgbClr val="E8772E"/>
+            <a:srgbClr val="EF7D00"/>
           </a:solidFill>
           <a:ln w="12700">
             <a:solidFill>
-              <a:srgbClr val="E8772E"/>
+              <a:srgbClr val="EF7D00"/>
             </a:solidFill>
             <a:prstDash val="solid"/>
           </a:ln>
@@ -3240,11 +3288,11 @@
             <a:r>
               <a:rPr lang="en-US" sz="2000" b="1" dirty="0">
                 <a:solidFill>
-                  <a:srgbClr val="FFFFFF"/>
-                </a:solidFill>
-                <a:latin typeface="Calibri" pitchFamily="34" charset="0"/>
-                <a:ea typeface="Calibri" pitchFamily="34" charset="-122"/>
-                <a:cs typeface="Calibri" pitchFamily="34" charset="-120"/>
+                  <a:srgbClr val="1D1D1B"/>
+                </a:solidFill>
+                <a:latin typeface="Lucida Sans" pitchFamily="34" charset="0"/>
+                <a:ea typeface="Lucida Sans" pitchFamily="34" charset="-122"/>
+                <a:cs typeface="Lucida Sans" pitchFamily="34" charset="-120"/>
               </a:rPr>
               <a:t>!</a:t>
             </a:r>
@@ -3279,11 +3327,11 @@
             <a:r>
               <a:rPr lang="en-US" sz="1500" dirty="0">
                 <a:solidFill>
-                  <a:srgbClr val="0B3C49"/>
-                </a:solidFill>
-                <a:latin typeface="Calibri" pitchFamily="34" charset="0"/>
-                <a:ea typeface="Calibri" pitchFamily="34" charset="-122"/>
-                <a:cs typeface="Calibri" pitchFamily="34" charset="-120"/>
+                  <a:srgbClr val="7A003F"/>
+                </a:solidFill>
+                <a:latin typeface="Lucida Sans" pitchFamily="34" charset="0"/>
+                <a:ea typeface="Lucida Sans" pitchFamily="34" charset="-122"/>
+                <a:cs typeface="Lucida Sans" pitchFamily="34" charset="-120"/>
               </a:rPr>
               <a:t>Programmieren ist am Projekttag meist Mittel, nicht Ziel – außer am Informatiktag.</a:t>
             </a:r>
@@ -3321,11 +3369,11 @@
             <a:lvl1pPr>
               <a:defRPr sz="1000">
                 <a:solidFill>
-                  <a:srgbClr val="5B6B73"/>
-                </a:solidFill>
-                <a:latin typeface="Calibri"/>
-                <a:ea typeface="Calibri"/>
-                <a:cs typeface="Calibri"/>
+                  <a:srgbClr val="706F6F"/>
+                </a:solidFill>
+                <a:latin typeface="Lucida Sans"/>
+                <a:ea typeface="Lucida Sans"/>
+                <a:cs typeface="Lucida Sans"/>
               </a:defRPr>
             </a:lvl1pPr>
           </a:lstStyle>
@@ -3369,13 +3417,13 @@
           <p:cNvPr id="2" name="Text 1"/>
           <p:cNvSpPr/>
           <p:nvPr>
-            <p:ph idx="101" type="title" hasCustomPrompt="1"/>
+            <p:ph idx="102" type="title" hasCustomPrompt="1"/>
           </p:nvPr>
         </p:nvSpPr>
         <p:spPr>
           <a:xfrm>
-            <a:off x="548640" y="320040"/>
-            <a:ext cx="11094415" cy="777240"/>
+            <a:off x="548640" y="274320"/>
+            <a:ext cx="8351215" cy="896112"/>
           </a:xfrm>
           <a:prstGeom prst="rect">
             <a:avLst/>
@@ -3387,21 +3435,21 @@
           <a:bodyPr wrap="square" lIns="0" tIns="0" rIns="0" bIns="0" rtlCol="0" anchor="ctr"/>
           <a:lstStyle/>
           <a:p>
-            <a:pPr indent="0" marL="0">
+            <a:pPr algn="l" indent="0" marL="0">
               <a:buNone/>
             </a:pPr>
             <a:r>
-              <a:rPr lang="en-US" sz="3200" b="1" dirty="0">
-                <a:solidFill>
-                  <a:srgbClr val="0B3C49"/>
-                </a:solidFill>
-                <a:latin typeface="Cambria" pitchFamily="34" charset="0"/>
-                <a:ea typeface="Cambria" pitchFamily="34" charset="-122"/>
-                <a:cs typeface="Cambria" pitchFamily="34" charset="-120"/>
+              <a:rPr lang="en-US" sz="2600" b="1" dirty="0">
+                <a:solidFill>
+                  <a:srgbClr val="7A003F"/>
+                </a:solidFill>
+                <a:latin typeface="Lucida Sans" pitchFamily="34" charset="0"/>
+                <a:ea typeface="Lucida Sans" pitchFamily="34" charset="-122"/>
+                <a:cs typeface="Lucida Sans" pitchFamily="34" charset="-120"/>
               </a:rPr>
               <a:t>Ginge das auch ohne mBot2?</a:t>
             </a:r>
-            <a:endParaRPr lang="en-US" sz="3200" dirty="0"/>
+            <a:endParaRPr lang="en-US" sz="2600" dirty="0"/>
           </a:p>
         </p:txBody>
       </p:sp>
@@ -3422,11 +3470,11 @@
             </a:avLst>
           </a:prstGeom>
           <a:solidFill>
-            <a:srgbClr val="FCEBDD"/>
+            <a:srgbClr val="FDF0E3"/>
           </a:solidFill>
           <a:ln w="12700">
             <a:solidFill>
-              <a:srgbClr val="FCEBDD"/>
+              <a:srgbClr val="FDF0E3"/>
             </a:solidFill>
             <a:prstDash val="solid"/>
           </a:ln>
@@ -3459,11 +3507,11 @@
             <a:r>
               <a:rPr lang="en-US" sz="2800" b="1" dirty="0">
                 <a:solidFill>
-                  <a:srgbClr val="0B3C49"/>
-                </a:solidFill>
-                <a:latin typeface="Cambria" pitchFamily="34" charset="0"/>
-                <a:ea typeface="Cambria" pitchFamily="34" charset="-122"/>
-                <a:cs typeface="Cambria" pitchFamily="34" charset="-120"/>
+                  <a:srgbClr val="7A003F"/>
+                </a:solidFill>
+                <a:latin typeface="Lucida Sans" pitchFamily="34" charset="0"/>
+                <a:ea typeface="Lucida Sans" pitchFamily="34" charset="-122"/>
+                <a:cs typeface="Lucida Sans" pitchFamily="34" charset="-120"/>
               </a:rPr>
               <a:t>Ein Reflexionsimpuls – kein Verbot. Entscheidend ist der begründete Bezug zum fachlichen Lernziel.</a:t>
             </a:r>
@@ -3502,11 +3550,11 @@
             <a:r>
               <a:rPr lang="en-US" sz="1700" dirty="0">
                 <a:solidFill>
-                  <a:srgbClr val="1F2A30"/>
-                </a:solidFill>
-                <a:latin typeface="Calibri" pitchFamily="34" charset="0"/>
-                <a:ea typeface="Calibri" pitchFamily="34" charset="-122"/>
-                <a:cs typeface="Calibri" pitchFamily="34" charset="-120"/>
+                  <a:srgbClr val="1D1D1B"/>
+                </a:solidFill>
+                <a:latin typeface="Lucida Sans" pitchFamily="34" charset="0"/>
+                <a:ea typeface="Lucida Sans" pitchFamily="34" charset="-122"/>
+                <a:cs typeface="Lucida Sans" pitchFamily="34" charset="-120"/>
               </a:rPr>
               <a:t>Mehrwert z. B. durch: steuerbare, wiederholbare Bewegung; sofortige Rückmeldung; Vergleich von Modell und Messung; fächerverbindender Projektrahmen</a:t>
             </a:r>
@@ -3523,11 +3571,11 @@
             <a:r>
               <a:rPr lang="en-US" sz="1700" dirty="0">
                 <a:solidFill>
-                  <a:srgbClr val="1F2A30"/>
-                </a:solidFill>
-                <a:latin typeface="Calibri" pitchFamily="34" charset="0"/>
-                <a:ea typeface="Calibri" pitchFamily="34" charset="-122"/>
-                <a:cs typeface="Calibri" pitchFamily="34" charset="-120"/>
+                  <a:srgbClr val="1D1D1B"/>
+                </a:solidFill>
+                <a:latin typeface="Lucida Sans" pitchFamily="34" charset="0"/>
+                <a:ea typeface="Lucida Sans" pitchFamily="34" charset="-122"/>
+                <a:cs typeface="Lucida Sans" pitchFamily="34" charset="-120"/>
               </a:rPr>
               <a:t>Unzureichend: Einsatz ohne Bezug zum Lernziel („weil der Roboter da ist“)</a:t>
             </a:r>
@@ -3565,11 +3613,11 @@
             <a:lvl1pPr>
               <a:defRPr sz="1000">
                 <a:solidFill>
-                  <a:srgbClr val="5B6B73"/>
-                </a:solidFill>
-                <a:latin typeface="Calibri"/>
-                <a:ea typeface="Calibri"/>
-                <a:cs typeface="Calibri"/>
+                  <a:srgbClr val="706F6F"/>
+                </a:solidFill>
+                <a:latin typeface="Lucida Sans"/>
+                <a:ea typeface="Lucida Sans"/>
+                <a:cs typeface="Lucida Sans"/>
               </a:defRPr>
             </a:lvl1pPr>
           </a:lstStyle>
@@ -3613,13 +3661,52 @@
           <p:cNvPr id="2" name="Text 1"/>
           <p:cNvSpPr/>
           <p:nvPr>
-            <p:ph idx="101" type="title" hasCustomPrompt="1"/>
+            <p:ph idx="102" type="title" hasCustomPrompt="1"/>
           </p:nvPr>
         </p:nvSpPr>
         <p:spPr>
           <a:xfrm>
-            <a:off x="548640" y="320040"/>
-            <a:ext cx="11094415" cy="777240"/>
+            <a:off x="548640" y="274320"/>
+            <a:ext cx="8351215" cy="896112"/>
+          </a:xfrm>
+          <a:prstGeom prst="rect">
+            <a:avLst/>
+          </a:prstGeom>
+          <a:noFill/>
+          <a:ln/>
+        </p:spPr>
+        <p:txBody>
+          <a:bodyPr wrap="square" lIns="0" tIns="0" rIns="0" bIns="0" rtlCol="0" anchor="ctr"/>
+          <a:lstStyle/>
+          <a:p>
+            <a:pPr algn="l" indent="0" marL="0">
+              <a:buNone/>
+            </a:pPr>
+            <a:r>
+              <a:rPr lang="en-US" sz="2600" b="1" dirty="0">
+                <a:solidFill>
+                  <a:srgbClr val="7A003F"/>
+                </a:solidFill>
+                <a:latin typeface="Lucida Sans" pitchFamily="34" charset="0"/>
+                <a:ea typeface="Lucida Sans" pitchFamily="34" charset="-122"/>
+                <a:cs typeface="Lucida Sans" pitchFamily="34" charset="-120"/>
+              </a:rPr>
+              <a:t>Peer-Feedback mit der Kriterienkarte</a:t>
+            </a:r>
+            <a:endParaRPr lang="en-US" sz="2600" dirty="0"/>
+          </a:p>
+        </p:txBody>
+      </p:sp>
+      <p:sp>
+        <p:nvSpPr>
+          <p:cNvPr id="3" name="Text 1"/>
+          <p:cNvSpPr txBox="1"/>
+          <p:nvPr/>
+        </p:nvSpPr>
+        <p:spPr>
+          <a:xfrm>
+            <a:off x="548640" y="1234440"/>
+            <a:ext cx="11094415" cy="640080"/>
           </a:xfrm>
           <a:prstGeom prst="rect">
             <a:avLst/>
@@ -3635,52 +3722,13 @@
               <a:buNone/>
             </a:pPr>
             <a:r>
-              <a:rPr lang="en-US" sz="3200" b="1" dirty="0">
-                <a:solidFill>
-                  <a:srgbClr val="0B3C49"/>
-                </a:solidFill>
-                <a:latin typeface="Cambria" pitchFamily="34" charset="0"/>
-                <a:ea typeface="Cambria" pitchFamily="34" charset="-122"/>
-                <a:cs typeface="Cambria" pitchFamily="34" charset="-120"/>
-              </a:rPr>
-              <a:t>Peer-Feedback mit der Kriterienkarte</a:t>
-            </a:r>
-            <a:endParaRPr lang="en-US" sz="3200" dirty="0"/>
-          </a:p>
-        </p:txBody>
-      </p:sp>
-      <p:sp>
-        <p:nvSpPr>
-          <p:cNvPr id="3" name="Text 1"/>
-          <p:cNvSpPr txBox="1"/>
-          <p:nvPr/>
-        </p:nvSpPr>
-        <p:spPr>
-          <a:xfrm>
-            <a:off x="548640" y="1234440"/>
-            <a:ext cx="11094415" cy="640080"/>
-          </a:xfrm>
-          <a:prstGeom prst="rect">
-            <a:avLst/>
-          </a:prstGeom>
-          <a:noFill/>
-          <a:ln/>
-        </p:spPr>
-        <p:txBody>
-          <a:bodyPr wrap="square" lIns="0" tIns="0" rIns="0" bIns="0" rtlCol="0" anchor="ctr"/>
-          <a:lstStyle/>
-          <a:p>
-            <a:pPr indent="0" marL="0">
-              <a:buNone/>
-            </a:pPr>
-            <a:r>
               <a:rPr lang="en-US" sz="1700" dirty="0">
                 <a:solidFill>
-                  <a:srgbClr val="5B6B73"/>
-                </a:solidFill>
-                <a:latin typeface="Calibri" pitchFamily="34" charset="0"/>
-                <a:ea typeface="Calibri" pitchFamily="34" charset="-122"/>
-                <a:cs typeface="Calibri" pitchFamily="34" charset="-120"/>
+                  <a:srgbClr val="706F6F"/>
+                </a:solidFill>
+                <a:latin typeface="Lucida Sans" pitchFamily="34" charset="0"/>
+                <a:ea typeface="Lucida Sans" pitchFamily="34" charset="-122"/>
+                <a:cs typeface="Lucida Sans" pitchFamily="34" charset="-120"/>
               </a:rPr>
               <a:t>Je Gruppe: 1 Min. Live-Demo, 2–3 Min. Tagesplan. Alle anderen füllen eine Kriterienkarte aus.</a:t>
             </a:r>
@@ -3705,11 +3753,11 @@
             </a:avLst>
           </a:prstGeom>
           <a:solidFill>
-            <a:srgbClr val="E6F2F1"/>
+            <a:srgbClr val="F2F2F2"/>
           </a:solidFill>
           <a:ln w="12700">
             <a:solidFill>
-              <a:srgbClr val="E6F2F1"/>
+              <a:srgbClr val="F2F2F2"/>
             </a:solidFill>
             <a:prstDash val="solid"/>
           </a:ln>
@@ -3730,11 +3778,11 @@
             <a:avLst/>
           </a:prstGeom>
           <a:solidFill>
-            <a:srgbClr val="0B6E69"/>
+            <a:srgbClr val="7A003F"/>
           </a:solidFill>
           <a:ln w="12700">
             <a:solidFill>
-              <a:srgbClr val="0B6E69"/>
+              <a:srgbClr val="7A003F"/>
             </a:solidFill>
             <a:prstDash val="solid"/>
           </a:ln>
@@ -3769,9 +3817,9 @@
                 <a:solidFill>
                   <a:srgbClr val="FFFFFF"/>
                 </a:solidFill>
-                <a:latin typeface="Calibri" pitchFamily="34" charset="0"/>
-                <a:ea typeface="Calibri" pitchFamily="34" charset="-122"/>
-                <a:cs typeface="Calibri" pitchFamily="34" charset="-120"/>
+                <a:latin typeface="Lucida Sans" pitchFamily="34" charset="0"/>
+                <a:ea typeface="Lucida Sans" pitchFamily="34" charset="-122"/>
+                <a:cs typeface="Lucida Sans" pitchFamily="34" charset="-120"/>
               </a:rPr>
               <a:t>1</a:t>
             </a:r>
@@ -3806,11 +3854,11 @@
             <a:r>
               <a:rPr lang="en-US" sz="1800" b="1" dirty="0">
                 <a:solidFill>
-                  <a:srgbClr val="0B3C49"/>
-                </a:solidFill>
-                <a:latin typeface="Calibri" pitchFamily="34" charset="0"/>
-                <a:ea typeface="Calibri" pitchFamily="34" charset="-122"/>
-                <a:cs typeface="Calibri" pitchFamily="34" charset="-120"/>
+                  <a:srgbClr val="7A003F"/>
+                </a:solidFill>
+                <a:latin typeface="Lucida Sans" pitchFamily="34" charset="0"/>
+                <a:ea typeface="Lucida Sans" pitchFamily="34" charset="-122"/>
+                <a:cs typeface="Lucida Sans" pitchFamily="34" charset="-120"/>
               </a:rPr>
               <a:t>Kriterien</a:t>
             </a:r>
@@ -3849,11 +3897,11 @@
             <a:r>
               <a:rPr lang="en-US" sz="1600" dirty="0">
                 <a:solidFill>
-                  <a:srgbClr val="1F2A30"/>
-                </a:solidFill>
-                <a:latin typeface="Calibri" pitchFamily="34" charset="0"/>
-                <a:ea typeface="Calibri" pitchFamily="34" charset="-122"/>
-                <a:cs typeface="Calibri" pitchFamily="34" charset="-120"/>
+                  <a:srgbClr val="1D1D1B"/>
+                </a:solidFill>
+                <a:latin typeface="Lucida Sans" pitchFamily="34" charset="0"/>
+                <a:ea typeface="Lucida Sans" pitchFamily="34" charset="-122"/>
+                <a:cs typeface="Lucida Sans" pitchFamily="34" charset="-120"/>
               </a:rPr>
               <a:t>Lernziel klar und überprüfbar</a:t>
             </a:r>
@@ -3870,11 +3918,11 @@
             <a:r>
               <a:rPr lang="en-US" sz="1600" dirty="0">
                 <a:solidFill>
-                  <a:srgbClr val="1F2A30"/>
-                </a:solidFill>
-                <a:latin typeface="Calibri" pitchFamily="34" charset="0"/>
-                <a:ea typeface="Calibri" pitchFamily="34" charset="-122"/>
-                <a:cs typeface="Calibri" pitchFamily="34" charset="-120"/>
+                  <a:srgbClr val="1D1D1B"/>
+                </a:solidFill>
+                <a:latin typeface="Lucida Sans" pitchFamily="34" charset="0"/>
+                <a:ea typeface="Lucida Sans" pitchFamily="34" charset="-122"/>
+                <a:cs typeface="Lucida Sans" pitchFamily="34" charset="-120"/>
               </a:rPr>
               <a:t>Mehrwert begründet</a:t>
             </a:r>
@@ -3891,11 +3939,11 @@
             <a:r>
               <a:rPr lang="en-US" sz="1600" dirty="0">
                 <a:solidFill>
-                  <a:srgbClr val="1F2A30"/>
-                </a:solidFill>
-                <a:latin typeface="Calibri" pitchFamily="34" charset="0"/>
-                <a:ea typeface="Calibri" pitchFamily="34" charset="-122"/>
-                <a:cs typeface="Calibri" pitchFamily="34" charset="-120"/>
+                  <a:srgbClr val="1D1D1B"/>
+                </a:solidFill>
+                <a:latin typeface="Lucida Sans" pitchFamily="34" charset="0"/>
+                <a:ea typeface="Lucida Sans" pitchFamily="34" charset="-122"/>
+                <a:cs typeface="Lucida Sans" pitchFamily="34" charset="-120"/>
               </a:rPr>
               <a:t>Zeiten aus der Erprobung, Puffer</a:t>
             </a:r>
@@ -3912,11 +3960,11 @@
             <a:r>
               <a:rPr lang="en-US" sz="1600" dirty="0">
                 <a:solidFill>
-                  <a:srgbClr val="1F2A30"/>
-                </a:solidFill>
-                <a:latin typeface="Calibri" pitchFamily="34" charset="0"/>
-                <a:ea typeface="Calibri" pitchFamily="34" charset="-122"/>
-                <a:cs typeface="Calibri" pitchFamily="34" charset="-120"/>
+                  <a:srgbClr val="1D1D1B"/>
+                </a:solidFill>
+                <a:latin typeface="Lucida Sans" pitchFamily="34" charset="0"/>
+                <a:ea typeface="Lucida Sans" pitchFamily="34" charset="-122"/>
+                <a:cs typeface="Lucida Sans" pitchFamily="34" charset="-120"/>
               </a:rPr>
               <a:t>Hürde und Hilfe konkret</a:t>
             </a:r>
@@ -3933,11 +3981,11 @@
             <a:r>
               <a:rPr lang="en-US" sz="1600" dirty="0">
                 <a:solidFill>
-                  <a:srgbClr val="1F2A30"/>
-                </a:solidFill>
-                <a:latin typeface="Calibri" pitchFamily="34" charset="0"/>
-                <a:ea typeface="Calibri" pitchFamily="34" charset="-122"/>
-                <a:cs typeface="Calibri" pitchFamily="34" charset="-120"/>
+                  <a:srgbClr val="1D1D1B"/>
+                </a:solidFill>
+                <a:latin typeface="Lucida Sans" pitchFamily="34" charset="0"/>
+                <a:ea typeface="Lucida Sans" pitchFamily="34" charset="-122"/>
+                <a:cs typeface="Lucida Sans" pitchFamily="34" charset="-120"/>
               </a:rPr>
               <a:t>Lernnachweis, Übergabe</a:t>
             </a:r>
@@ -3962,11 +4010,11 @@
             </a:avLst>
           </a:prstGeom>
           <a:solidFill>
-            <a:srgbClr val="E6F2F1"/>
+            <a:srgbClr val="F2F2F2"/>
           </a:solidFill>
           <a:ln w="12700">
             <a:solidFill>
-              <a:srgbClr val="E6F2F1"/>
+              <a:srgbClr val="F2F2F2"/>
             </a:solidFill>
             <a:prstDash val="solid"/>
           </a:ln>
@@ -3987,11 +4035,11 @@
             <a:avLst/>
           </a:prstGeom>
           <a:solidFill>
-            <a:srgbClr val="E8772E"/>
+            <a:srgbClr val="EF7D00"/>
           </a:solidFill>
           <a:ln w="12700">
             <a:solidFill>
-              <a:srgbClr val="E8772E"/>
+              <a:srgbClr val="EF7D00"/>
             </a:solidFill>
             <a:prstDash val="solid"/>
           </a:ln>
@@ -4024,11 +4072,11 @@
             <a:r>
               <a:rPr lang="en-US" sz="1600" b="1" dirty="0">
                 <a:solidFill>
-                  <a:srgbClr val="FFFFFF"/>
-                </a:solidFill>
-                <a:latin typeface="Calibri" pitchFamily="34" charset="0"/>
-                <a:ea typeface="Calibri" pitchFamily="34" charset="-122"/>
-                <a:cs typeface="Calibri" pitchFamily="34" charset="-120"/>
+                  <a:srgbClr val="1D1D1B"/>
+                </a:solidFill>
+                <a:latin typeface="Lucida Sans" pitchFamily="34" charset="0"/>
+                <a:ea typeface="Lucida Sans" pitchFamily="34" charset="-122"/>
+                <a:cs typeface="Lucida Sans" pitchFamily="34" charset="-120"/>
               </a:rPr>
               <a:t>2</a:t>
             </a:r>
@@ -4063,11 +4111,11 @@
             <a:r>
               <a:rPr lang="en-US" sz="1800" b="1" dirty="0">
                 <a:solidFill>
-                  <a:srgbClr val="0B3C49"/>
-                </a:solidFill>
-                <a:latin typeface="Calibri" pitchFamily="34" charset="0"/>
-                <a:ea typeface="Calibri" pitchFamily="34" charset="-122"/>
-                <a:cs typeface="Calibri" pitchFamily="34" charset="-120"/>
+                  <a:srgbClr val="7A003F"/>
+                </a:solidFill>
+                <a:latin typeface="Lucida Sans" pitchFamily="34" charset="0"/>
+                <a:ea typeface="Lucida Sans" pitchFamily="34" charset="-122"/>
+                <a:cs typeface="Lucida Sans" pitchFamily="34" charset="-120"/>
               </a:rPr>
               <a:t>Rückmeldung</a:t>
             </a:r>
@@ -4106,11 +4154,11 @@
             <a:r>
               <a:rPr lang="en-US" sz="1600" dirty="0">
                 <a:solidFill>
-                  <a:srgbClr val="1F2A30"/>
-                </a:solidFill>
-                <a:latin typeface="Calibri" pitchFamily="34" charset="0"/>
-                <a:ea typeface="Calibri" pitchFamily="34" charset="-122"/>
-                <a:cs typeface="Calibri" pitchFamily="34" charset="-120"/>
+                  <a:srgbClr val="1D1D1B"/>
+                </a:solidFill>
+                <a:latin typeface="Lucida Sans" pitchFamily="34" charset="0"/>
+                <a:ea typeface="Lucida Sans" pitchFamily="34" charset="-122"/>
+                <a:cs typeface="Lucida Sans" pitchFamily="34" charset="-120"/>
               </a:rPr>
               <a:t>2 × Stärke</a:t>
             </a:r>
@@ -4127,11 +4175,11 @@
             <a:r>
               <a:rPr lang="en-US" sz="1600" dirty="0">
                 <a:solidFill>
-                  <a:srgbClr val="1F2A30"/>
-                </a:solidFill>
-                <a:latin typeface="Calibri" pitchFamily="34" charset="0"/>
-                <a:ea typeface="Calibri" pitchFamily="34" charset="-122"/>
-                <a:cs typeface="Calibri" pitchFamily="34" charset="-120"/>
+                  <a:srgbClr val="1D1D1B"/>
+                </a:solidFill>
+                <a:latin typeface="Lucida Sans" pitchFamily="34" charset="0"/>
+                <a:ea typeface="Lucida Sans" pitchFamily="34" charset="-122"/>
+                <a:cs typeface="Lucida Sans" pitchFamily="34" charset="-120"/>
               </a:rPr>
               <a:t>1 × Frage</a:t>
             </a:r>
@@ -4148,11 +4196,11 @@
             <a:r>
               <a:rPr lang="en-US" sz="1600" dirty="0">
                 <a:solidFill>
-                  <a:srgbClr val="1F2A30"/>
-                </a:solidFill>
-                <a:latin typeface="Calibri" pitchFamily="34" charset="0"/>
-                <a:ea typeface="Calibri" pitchFamily="34" charset="-122"/>
-                <a:cs typeface="Calibri" pitchFamily="34" charset="-120"/>
+                  <a:srgbClr val="1D1D1B"/>
+                </a:solidFill>
+                <a:latin typeface="Lucida Sans" pitchFamily="34" charset="0"/>
+                <a:ea typeface="Lucida Sans" pitchFamily="34" charset="-122"/>
+                <a:cs typeface="Lucida Sans" pitchFamily="34" charset="-120"/>
               </a:rPr>
               <a:t>1 × Tipp</a:t>
             </a:r>
@@ -4169,11 +4217,11 @@
             <a:r>
               <a:rPr lang="en-US" sz="1600" dirty="0">
                 <a:solidFill>
-                  <a:srgbClr val="1F2A30"/>
-                </a:solidFill>
-                <a:latin typeface="Calibri" pitchFamily="34" charset="0"/>
-                <a:ea typeface="Calibri" pitchFamily="34" charset="-122"/>
-                <a:cs typeface="Calibri" pitchFamily="34" charset="-120"/>
+                  <a:srgbClr val="1D1D1B"/>
+                </a:solidFill>
+                <a:latin typeface="Lucida Sans" pitchFamily="34" charset="0"/>
+                <a:ea typeface="Lucida Sans" pitchFamily="34" charset="-122"/>
+                <a:cs typeface="Lucida Sans" pitchFamily="34" charset="-120"/>
               </a:rPr>
               <a:t>konkret und auf ein Kriterium bezogen</a:t>
             </a:r>
@@ -4211,11 +4259,11 @@
             <a:lvl1pPr>
               <a:defRPr sz="1000">
                 <a:solidFill>
-                  <a:srgbClr val="5B6B73"/>
-                </a:solidFill>
-                <a:latin typeface="Calibri"/>
-                <a:ea typeface="Calibri"/>
-                <a:cs typeface="Calibri"/>
+                  <a:srgbClr val="706F6F"/>
+                </a:solidFill>
+                <a:latin typeface="Lucida Sans"/>
+                <a:ea typeface="Lucida Sans"/>
+                <a:cs typeface="Lucida Sans"/>
               </a:defRPr>
             </a:lvl1pPr>
           </a:lstStyle>
@@ -4259,13 +4307,13 @@
           <p:cNvPr id="2" name="Text 1"/>
           <p:cNvSpPr/>
           <p:nvPr>
-            <p:ph idx="101" type="title" hasCustomPrompt="1"/>
+            <p:ph idx="102" type="title" hasCustomPrompt="1"/>
           </p:nvPr>
         </p:nvSpPr>
         <p:spPr>
           <a:xfrm>
-            <a:off x="548640" y="320040"/>
-            <a:ext cx="11094415" cy="777240"/>
+            <a:off x="548640" y="274320"/>
+            <a:ext cx="8351215" cy="896112"/>
           </a:xfrm>
           <a:prstGeom prst="rect">
             <a:avLst/>
@@ -4277,21 +4325,21 @@
           <a:bodyPr wrap="square" lIns="0" tIns="0" rIns="0" bIns="0" rtlCol="0" anchor="ctr"/>
           <a:lstStyle/>
           <a:p>
-            <a:pPr indent="0" marL="0">
+            <a:pPr algn="l" indent="0" marL="0">
               <a:buNone/>
             </a:pPr>
             <a:r>
-              <a:rPr lang="en-US" sz="3200" b="1" dirty="0">
-                <a:solidFill>
-                  <a:srgbClr val="0B3C49"/>
-                </a:solidFill>
-                <a:latin typeface="Cambria" pitchFamily="34" charset="0"/>
-                <a:ea typeface="Cambria" pitchFamily="34" charset="-122"/>
-                <a:cs typeface="Cambria" pitchFamily="34" charset="-120"/>
+              <a:rPr lang="en-US" sz="2600" b="1" dirty="0">
+                <a:solidFill>
+                  <a:srgbClr val="7A003F"/>
+                </a:solidFill>
+                <a:latin typeface="Lucida Sans" pitchFamily="34" charset="0"/>
+                <a:ea typeface="Lucida Sans" pitchFamily="34" charset="-122"/>
+                <a:cs typeface="Lucida Sans" pitchFamily="34" charset="-120"/>
               </a:rPr>
               <a:t>Übergaben: Die Woche als roter Faden</a:t>
             </a:r>
-            <a:endParaRPr lang="en-US" sz="3200" dirty="0"/>
+            <a:endParaRPr lang="en-US" sz="2600" dirty="0"/>
           </a:p>
         </p:txBody>
       </p:sp>
@@ -4312,11 +4360,11 @@
             </a:avLst>
           </a:prstGeom>
           <a:solidFill>
-            <a:srgbClr val="E6F2F1"/>
+            <a:srgbClr val="F2F2F2"/>
           </a:solidFill>
           <a:ln w="12700">
             <a:solidFill>
-              <a:srgbClr val="E6F2F1"/>
+              <a:srgbClr val="F2F2F2"/>
             </a:solidFill>
             <a:prstDash val="solid"/>
           </a:ln>
@@ -4337,11 +4385,11 @@
             <a:avLst/>
           </a:prstGeom>
           <a:solidFill>
-            <a:srgbClr val="0B6E69"/>
+            <a:srgbClr val="7A003F"/>
           </a:solidFill>
           <a:ln w="12700">
             <a:solidFill>
-              <a:srgbClr val="0B6E69"/>
+              <a:srgbClr val="7A003F"/>
             </a:solidFill>
             <a:prstDash val="solid"/>
           </a:ln>
@@ -4376,9 +4424,9 @@
                 <a:solidFill>
                   <a:srgbClr val="FFFFFF"/>
                 </a:solidFill>
-                <a:latin typeface="Calibri" pitchFamily="34" charset="0"/>
-                <a:ea typeface="Calibri" pitchFamily="34" charset="-122"/>
-                <a:cs typeface="Calibri" pitchFamily="34" charset="-120"/>
+                <a:latin typeface="Lucida Sans" pitchFamily="34" charset="0"/>
+                <a:ea typeface="Lucida Sans" pitchFamily="34" charset="-122"/>
+                <a:cs typeface="Lucida Sans" pitchFamily="34" charset="-120"/>
               </a:rPr>
               <a:t>Mo</a:t>
             </a:r>
@@ -4413,11 +4461,11 @@
             <a:r>
               <a:rPr lang="en-US" sz="1500" b="1" dirty="0">
                 <a:solidFill>
-                  <a:srgbClr val="0B3C49"/>
-                </a:solidFill>
-                <a:latin typeface="Calibri" pitchFamily="34" charset="0"/>
-                <a:ea typeface="Calibri" pitchFamily="34" charset="-122"/>
-                <a:cs typeface="Calibri" pitchFamily="34" charset="-120"/>
+                  <a:srgbClr val="7A003F"/>
+                </a:solidFill>
+                <a:latin typeface="Lucida Sans" pitchFamily="34" charset="0"/>
+                <a:ea typeface="Lucida Sans" pitchFamily="34" charset="-122"/>
+                <a:cs typeface="Lucida Sans" pitchFamily="34" charset="-120"/>
               </a:rPr>
               <a:t>→ Dienstag</a:t>
             </a:r>
@@ -4452,11 +4500,11 @@
             <a:r>
               <a:rPr lang="en-US" sz="1500" dirty="0">
                 <a:solidFill>
-                  <a:srgbClr val="1F2A30"/>
-                </a:solidFill>
-                <a:latin typeface="Calibri" pitchFamily="34" charset="0"/>
-                <a:ea typeface="Calibri" pitchFamily="34" charset="-122"/>
-                <a:cs typeface="Calibri" pitchFamily="34" charset="-120"/>
+                  <a:srgbClr val="1D1D1B"/>
+                </a:solidFill>
+                <a:latin typeface="Lucida Sans" pitchFamily="34" charset="0"/>
+                <a:ea typeface="Lucida Sans" pitchFamily="34" charset="-122"/>
+                <a:cs typeface="Lucida Sans" pitchFamily="34" charset="-120"/>
               </a:rPr>
               <a:t>geprüfte mBot2, Testprogramm, Prüfliste, Fehlerprotokoll</a:t>
             </a:r>
@@ -4481,11 +4529,11 @@
             </a:avLst>
           </a:prstGeom>
           <a:solidFill>
-            <a:srgbClr val="E6F2F1"/>
+            <a:srgbClr val="F2F2F2"/>
           </a:solidFill>
           <a:ln w="12700">
             <a:solidFill>
-              <a:srgbClr val="E6F2F1"/>
+              <a:srgbClr val="F2F2F2"/>
             </a:solidFill>
             <a:prstDash val="solid"/>
           </a:ln>
@@ -4506,11 +4554,11 @@
             <a:avLst/>
           </a:prstGeom>
           <a:solidFill>
-            <a:srgbClr val="0B6E69"/>
+            <a:srgbClr val="7A003F"/>
           </a:solidFill>
           <a:ln w="12700">
             <a:solidFill>
-              <a:srgbClr val="0B6E69"/>
+              <a:srgbClr val="7A003F"/>
             </a:solidFill>
             <a:prstDash val="solid"/>
           </a:ln>
@@ -4545,9 +4593,9 @@
                 <a:solidFill>
                   <a:srgbClr val="FFFFFF"/>
                 </a:solidFill>
-                <a:latin typeface="Calibri" pitchFamily="34" charset="0"/>
-                <a:ea typeface="Calibri" pitchFamily="34" charset="-122"/>
-                <a:cs typeface="Calibri" pitchFamily="34" charset="-120"/>
+                <a:latin typeface="Lucida Sans" pitchFamily="34" charset="0"/>
+                <a:ea typeface="Lucida Sans" pitchFamily="34" charset="-122"/>
+                <a:cs typeface="Lucida Sans" pitchFamily="34" charset="-120"/>
               </a:rPr>
               <a:t>Di</a:t>
             </a:r>
@@ -4582,11 +4630,11 @@
             <a:r>
               <a:rPr lang="en-US" sz="1500" b="1" dirty="0">
                 <a:solidFill>
-                  <a:srgbClr val="0B3C49"/>
-                </a:solidFill>
-                <a:latin typeface="Calibri" pitchFamily="34" charset="0"/>
-                <a:ea typeface="Calibri" pitchFamily="34" charset="-122"/>
-                <a:cs typeface="Calibri" pitchFamily="34" charset="-120"/>
+                  <a:srgbClr val="7A003F"/>
+                </a:solidFill>
+                <a:latin typeface="Lucida Sans" pitchFamily="34" charset="0"/>
+                <a:ea typeface="Lucida Sans" pitchFamily="34" charset="-122"/>
+                <a:cs typeface="Lucida Sans" pitchFamily="34" charset="-120"/>
               </a:rPr>
               <a:t>→ Mittwoch</a:t>
             </a:r>
@@ -4621,11 +4669,11 @@
             <a:r>
               <a:rPr lang="en-US" sz="1500" dirty="0">
                 <a:solidFill>
-                  <a:srgbClr val="1F2A30"/>
-                </a:solidFill>
-                <a:latin typeface="Calibri" pitchFamily="34" charset="0"/>
-                <a:ea typeface="Calibri" pitchFamily="34" charset="-122"/>
-                <a:cs typeface="Calibri" pitchFamily="34" charset="-120"/>
+                  <a:srgbClr val="1D1D1B"/>
+                </a:solidFill>
+                <a:latin typeface="Lucida Sans" pitchFamily="34" charset="0"/>
+                <a:ea typeface="Lucida Sans" pitchFamily="34" charset="-122"/>
+                <a:cs typeface="Lucida Sans" pitchFamily="34" charset="-120"/>
               </a:rPr>
               <a:t>Rasterplan, Rechnungen, gemessene Fahrabweichungen</a:t>
             </a:r>
@@ -4650,11 +4698,11 @@
             </a:avLst>
           </a:prstGeom>
           <a:solidFill>
-            <a:srgbClr val="E6F2F1"/>
+            <a:srgbClr val="F2F2F2"/>
           </a:solidFill>
           <a:ln w="12700">
             <a:solidFill>
-              <a:srgbClr val="E6F2F1"/>
+              <a:srgbClr val="F2F2F2"/>
             </a:solidFill>
             <a:prstDash val="solid"/>
           </a:ln>
@@ -4675,11 +4723,11 @@
             <a:avLst/>
           </a:prstGeom>
           <a:solidFill>
-            <a:srgbClr val="0B6E69"/>
+            <a:srgbClr val="7A003F"/>
           </a:solidFill>
           <a:ln w="12700">
             <a:solidFill>
-              <a:srgbClr val="0B6E69"/>
+              <a:srgbClr val="7A003F"/>
             </a:solidFill>
             <a:prstDash val="solid"/>
           </a:ln>
@@ -4714,9 +4762,9 @@
                 <a:solidFill>
                   <a:srgbClr val="FFFFFF"/>
                 </a:solidFill>
-                <a:latin typeface="Calibri" pitchFamily="34" charset="0"/>
-                <a:ea typeface="Calibri" pitchFamily="34" charset="-122"/>
-                <a:cs typeface="Calibri" pitchFamily="34" charset="-120"/>
+                <a:latin typeface="Lucida Sans" pitchFamily="34" charset="0"/>
+                <a:ea typeface="Lucida Sans" pitchFamily="34" charset="-122"/>
+                <a:cs typeface="Lucida Sans" pitchFamily="34" charset="-120"/>
               </a:rPr>
               <a:t>Mi</a:t>
             </a:r>
@@ -4751,11 +4799,11 @@
             <a:r>
               <a:rPr lang="en-US" sz="1500" b="1" dirty="0">
                 <a:solidFill>
-                  <a:srgbClr val="0B3C49"/>
-                </a:solidFill>
-                <a:latin typeface="Calibri" pitchFamily="34" charset="0"/>
-                <a:ea typeface="Calibri" pitchFamily="34" charset="-122"/>
-                <a:cs typeface="Calibri" pitchFamily="34" charset="-120"/>
+                  <a:srgbClr val="7A003F"/>
+                </a:solidFill>
+                <a:latin typeface="Lucida Sans" pitchFamily="34" charset="0"/>
+                <a:ea typeface="Lucida Sans" pitchFamily="34" charset="-122"/>
+                <a:cs typeface="Lucida Sans" pitchFamily="34" charset="-120"/>
               </a:rPr>
               <a:t>→ Donnerstag</a:t>
             </a:r>
@@ -4790,11 +4838,11 @@
             <a:r>
               <a:rPr lang="en-US" sz="1500" dirty="0">
                 <a:solidFill>
-                  <a:srgbClr val="1F2A30"/>
-                </a:solidFill>
-                <a:latin typeface="Calibri" pitchFamily="34" charset="0"/>
-                <a:ea typeface="Calibri" pitchFamily="34" charset="-122"/>
-                <a:cs typeface="Calibri" pitchFamily="34" charset="-120"/>
+                  <a:srgbClr val="1D1D1B"/>
+                </a:solidFill>
+                <a:latin typeface="Lucida Sans" pitchFamily="34" charset="0"/>
+                <a:ea typeface="Lucida Sans" pitchFamily="34" charset="-122"/>
+                <a:cs typeface="Lucida Sans" pitchFamily="34" charset="-120"/>
               </a:rPr>
               <a:t>Sensorwerte und begründete Schwellenwerte</a:t>
             </a:r>
@@ -4819,11 +4867,11 @@
             </a:avLst>
           </a:prstGeom>
           <a:solidFill>
-            <a:srgbClr val="FCEBDD"/>
+            <a:srgbClr val="FDF0E3"/>
           </a:solidFill>
           <a:ln w="12700">
             <a:solidFill>
-              <a:srgbClr val="FCEBDD"/>
+              <a:srgbClr val="FDF0E3"/>
             </a:solidFill>
             <a:prstDash val="solid"/>
           </a:ln>
@@ -4844,11 +4892,11 @@
             <a:avLst/>
           </a:prstGeom>
           <a:solidFill>
-            <a:srgbClr val="E8772E"/>
+            <a:srgbClr val="EF7D00"/>
           </a:solidFill>
           <a:ln w="12700">
             <a:solidFill>
-              <a:srgbClr val="E8772E"/>
+              <a:srgbClr val="EF7D00"/>
             </a:solidFill>
             <a:prstDash val="solid"/>
           </a:ln>
@@ -4881,11 +4929,11 @@
             <a:r>
               <a:rPr lang="en-US" sz="1300" b="1" dirty="0">
                 <a:solidFill>
-                  <a:srgbClr val="FFFFFF"/>
-                </a:solidFill>
-                <a:latin typeface="Calibri" pitchFamily="34" charset="0"/>
-                <a:ea typeface="Calibri" pitchFamily="34" charset="-122"/>
-                <a:cs typeface="Calibri" pitchFamily="34" charset="-120"/>
+                  <a:srgbClr val="1D1D1B"/>
+                </a:solidFill>
+                <a:latin typeface="Lucida Sans" pitchFamily="34" charset="0"/>
+                <a:ea typeface="Lucida Sans" pitchFamily="34" charset="-122"/>
+                <a:cs typeface="Lucida Sans" pitchFamily="34" charset="-120"/>
               </a:rPr>
               <a:t>Do</a:t>
             </a:r>
@@ -4920,11 +4968,11 @@
             <a:r>
               <a:rPr lang="en-US" sz="1500" b="1" dirty="0">
                 <a:solidFill>
-                  <a:srgbClr val="0B3C49"/>
-                </a:solidFill>
-                <a:latin typeface="Calibri" pitchFamily="34" charset="0"/>
-                <a:ea typeface="Calibri" pitchFamily="34" charset="-122"/>
-                <a:cs typeface="Calibri" pitchFamily="34" charset="-120"/>
+                  <a:srgbClr val="7A003F"/>
+                </a:solidFill>
+                <a:latin typeface="Lucida Sans" pitchFamily="34" charset="0"/>
+                <a:ea typeface="Lucida Sans" pitchFamily="34" charset="-122"/>
+                <a:cs typeface="Lucida Sans" pitchFamily="34" charset="-120"/>
               </a:rPr>
               <a:t>→ Freitag</a:t>
             </a:r>
@@ -4959,11 +5007,11 @@
             <a:r>
               <a:rPr lang="en-US" sz="1500" dirty="0">
                 <a:solidFill>
-                  <a:srgbClr val="1F2A30"/>
-                </a:solidFill>
-                <a:latin typeface="Calibri" pitchFamily="34" charset="0"/>
-                <a:ea typeface="Calibri" pitchFamily="34" charset="-122"/>
-                <a:cs typeface="Calibri" pitchFamily="34" charset="-120"/>
+                  <a:srgbClr val="1D1D1B"/>
+                </a:solidFill>
+                <a:latin typeface="Lucida Sans" pitchFamily="34" charset="0"/>
+                <a:ea typeface="Lucida Sans" pitchFamily="34" charset="-122"/>
+                <a:cs typeface="Lucida Sans" pitchFamily="34" charset="-120"/>
               </a:rPr>
               <a:t>getestetes Steuerprogramm, Ablaufdiagramm</a:t>
             </a:r>
@@ -4988,11 +5036,11 @@
             </a:avLst>
           </a:prstGeom>
           <a:solidFill>
-            <a:srgbClr val="FCEBDD"/>
+            <a:srgbClr val="FDF0E3"/>
           </a:solidFill>
           <a:ln w="12700">
             <a:solidFill>
-              <a:srgbClr val="FCEBDD"/>
+              <a:srgbClr val="FDF0E3"/>
             </a:solidFill>
             <a:prstDash val="solid"/>
           </a:ln>
@@ -5013,11 +5061,11 @@
             <a:avLst/>
           </a:prstGeom>
           <a:solidFill>
-            <a:srgbClr val="E8772E"/>
+            <a:srgbClr val="EF7D00"/>
           </a:solidFill>
           <a:ln w="12700">
             <a:solidFill>
-              <a:srgbClr val="E8772E"/>
+              <a:srgbClr val="EF7D00"/>
             </a:solidFill>
             <a:prstDash val="solid"/>
           </a:ln>
@@ -5050,11 +5098,11 @@
             <a:r>
               <a:rPr lang="en-US" sz="2000" b="1" dirty="0">
                 <a:solidFill>
-                  <a:srgbClr val="FFFFFF"/>
-                </a:solidFill>
-                <a:latin typeface="Calibri" pitchFamily="34" charset="0"/>
-                <a:ea typeface="Calibri" pitchFamily="34" charset="-122"/>
-                <a:cs typeface="Calibri" pitchFamily="34" charset="-120"/>
+                  <a:srgbClr val="1D1D1B"/>
+                </a:solidFill>
+                <a:latin typeface="Lucida Sans" pitchFamily="34" charset="0"/>
+                <a:ea typeface="Lucida Sans" pitchFamily="34" charset="-122"/>
+                <a:cs typeface="Lucida Sans" pitchFamily="34" charset="-120"/>
               </a:rPr>
               <a:t>!</a:t>
             </a:r>
@@ -5089,11 +5137,11 @@
             <a:r>
               <a:rPr lang="en-US" sz="1500" dirty="0">
                 <a:solidFill>
-                  <a:srgbClr val="0B3C49"/>
-                </a:solidFill>
-                <a:latin typeface="Calibri" pitchFamily="34" charset="0"/>
-                <a:ea typeface="Calibri" pitchFamily="34" charset="-122"/>
-                <a:cs typeface="Calibri" pitchFamily="34" charset="-120"/>
+                  <a:srgbClr val="7A003F"/>
+                </a:solidFill>
+                <a:latin typeface="Lucida Sans" pitchFamily="34" charset="0"/>
+                <a:ea typeface="Lucida Sans" pitchFamily="34" charset="-122"/>
+                <a:cs typeface="Lucida Sans" pitchFamily="34" charset="-120"/>
               </a:rPr>
               <a:t>Verbindende Strukturen: Tages-Check-in (10 Min.), Projekttagebuch (10 Min.), Expert:innen-System. Freitag gestaltet jede Schule selbst.</a:t>
             </a:r>
@@ -5131,11 +5179,11 @@
             <a:lvl1pPr>
               <a:defRPr sz="1000">
                 <a:solidFill>
-                  <a:srgbClr val="5B6B73"/>
-                </a:solidFill>
-                <a:latin typeface="Calibri"/>
-                <a:ea typeface="Calibri"/>
-                <a:cs typeface="Calibri"/>
+                  <a:srgbClr val="706F6F"/>
+                </a:solidFill>
+                <a:latin typeface="Lucida Sans"/>
+                <a:ea typeface="Lucida Sans"/>
+                <a:cs typeface="Lucida Sans"/>
               </a:defRPr>
             </a:lvl1pPr>
           </a:lstStyle>
@@ -5176,14 +5224,16 @@
       </p:grpSpPr>
       <p:sp>
         <p:nvSpPr>
-          <p:cNvPr id="2" name="Text 0"/>
-          <p:cNvSpPr txBox="1"/>
-          <p:nvPr/>
-        </p:nvSpPr>
-        <p:spPr>
-          <a:xfrm>
-            <a:off x="548640" y="548640"/>
-            <a:ext cx="11094415" cy="822960"/>
+          <p:cNvPr id="2" name="Text 1"/>
+          <p:cNvSpPr/>
+          <p:nvPr>
+            <p:ph idx="102" type="title" hasCustomPrompt="1"/>
+          </p:nvPr>
+        </p:nvSpPr>
+        <p:spPr>
+          <a:xfrm>
+            <a:off x="548640" y="274320"/>
+            <a:ext cx="8351215" cy="896112"/>
           </a:xfrm>
           <a:prstGeom prst="rect">
             <a:avLst/>
@@ -5195,21 +5245,21 @@
           <a:bodyPr wrap="square" lIns="0" tIns="0" rIns="0" bIns="0" rtlCol="0" anchor="ctr"/>
           <a:lstStyle/>
           <a:p>
-            <a:pPr indent="0" marL="0">
+            <a:pPr algn="l" indent="0" marL="0">
               <a:buNone/>
             </a:pPr>
             <a:r>
-              <a:rPr lang="en-US" sz="3600" b="1" dirty="0">
-                <a:solidFill>
-                  <a:srgbClr val="FFFFFF"/>
-                </a:solidFill>
-                <a:latin typeface="Cambria" pitchFamily="34" charset="0"/>
-                <a:ea typeface="Cambria" pitchFamily="34" charset="-122"/>
-                <a:cs typeface="Cambria" pitchFamily="34" charset="-120"/>
+              <a:rPr lang="en-US" sz="2600" b="1" dirty="0">
+                <a:solidFill>
+                  <a:srgbClr val="7A003F"/>
+                </a:solidFill>
+                <a:latin typeface="Lucida Sans" pitchFamily="34" charset="0"/>
+                <a:ea typeface="Lucida Sans" pitchFamily="34" charset="-122"/>
+                <a:cs typeface="Lucida Sans" pitchFamily="34" charset="-120"/>
               </a:rPr>
               <a:t>Abschluss</a:t>
             </a:r>
-            <a:endParaRPr lang="en-US" sz="3600" dirty="0"/>
+            <a:endParaRPr lang="en-US" sz="2600" dirty="0"/>
           </a:p>
         </p:txBody>
       </p:sp>
@@ -5221,20 +5271,20 @@
         </p:nvSpPr>
         <p:spPr>
           <a:xfrm>
-            <a:off x="548640" y="1737360"/>
-            <a:ext cx="3454298" cy="3291840"/>
+            <a:off x="548640" y="1463040"/>
+            <a:ext cx="3454298" cy="3566160"/>
           </a:xfrm>
           <a:prstGeom prst="roundRect">
             <a:avLst>
-              <a:gd name="adj" fmla="val 3333"/>
+              <a:gd name="adj" fmla="val 3177"/>
             </a:avLst>
           </a:prstGeom>
           <a:solidFill>
-            <a:srgbClr val="174F5E"/>
+            <a:srgbClr val="FDF0E3"/>
           </a:solidFill>
           <a:ln w="12700">
             <a:solidFill>
-              <a:srgbClr val="2C6E7C"/>
+              <a:srgbClr val="FDF0E3"/>
             </a:solidFill>
             <a:prstDash val="solid"/>
           </a:ln>
@@ -5248,18 +5298,18 @@
         </p:nvSpPr>
         <p:spPr>
           <a:xfrm>
-            <a:off x="822960" y="1965960"/>
+            <a:off x="822960" y="1691640"/>
             <a:ext cx="548640" cy="548640"/>
           </a:xfrm>
           <a:prstGeom prst="ellipse">
             <a:avLst/>
           </a:prstGeom>
           <a:solidFill>
-            <a:srgbClr val="E8772E"/>
+            <a:srgbClr val="EF7D00"/>
           </a:solidFill>
           <a:ln w="12700">
             <a:solidFill>
-              <a:srgbClr val="E8772E"/>
+              <a:srgbClr val="EF7D00"/>
             </a:solidFill>
             <a:prstDash val="solid"/>
           </a:ln>
@@ -5273,7 +5323,7 @@
         </p:nvSpPr>
         <p:spPr>
           <a:xfrm>
-            <a:off x="822960" y="1965960"/>
+            <a:off x="822960" y="1691640"/>
             <a:ext cx="548640" cy="548640"/>
           </a:xfrm>
           <a:prstGeom prst="rect">
@@ -5292,11 +5342,11 @@
             <a:r>
               <a:rPr lang="en-US" sz="1600" b="1" dirty="0">
                 <a:solidFill>
-                  <a:srgbClr val="FFFFFF"/>
-                </a:solidFill>
-                <a:latin typeface="Calibri" pitchFamily="34" charset="0"/>
-                <a:ea typeface="Calibri" pitchFamily="34" charset="-122"/>
-                <a:cs typeface="Calibri" pitchFamily="34" charset="-120"/>
+                  <a:srgbClr val="1D1D1B"/>
+                </a:solidFill>
+                <a:latin typeface="Lucida Sans" pitchFamily="34" charset="0"/>
+                <a:ea typeface="Lucida Sans" pitchFamily="34" charset="-122"/>
+                <a:cs typeface="Lucida Sans" pitchFamily="34" charset="-120"/>
               </a:rPr>
               <a:t>1</a:t>
             </a:r>
@@ -5312,7 +5362,7 @@
         </p:nvSpPr>
         <p:spPr>
           <a:xfrm>
-            <a:off x="1508760" y="1965960"/>
+            <a:off x="1508760" y="1691640"/>
             <a:ext cx="2265578" cy="548640"/>
           </a:xfrm>
           <a:prstGeom prst="rect">
@@ -5329,17 +5379,17 @@
               <a:buNone/>
             </a:pPr>
             <a:r>
-              <a:rPr lang="en-US" sz="1900" b="1" dirty="0">
-                <a:solidFill>
-                  <a:srgbClr val="FFFFFF"/>
-                </a:solidFill>
-                <a:latin typeface="Calibri" pitchFamily="34" charset="0"/>
-                <a:ea typeface="Calibri" pitchFamily="34" charset="-122"/>
-                <a:cs typeface="Calibri" pitchFamily="34" charset="-120"/>
+              <a:rPr lang="en-US" sz="1800" b="1" dirty="0">
+                <a:solidFill>
+                  <a:srgbClr val="7A003F"/>
+                </a:solidFill>
+                <a:latin typeface="Lucida Sans" pitchFamily="34" charset="0"/>
+                <a:ea typeface="Lucida Sans" pitchFamily="34" charset="-122"/>
+                <a:cs typeface="Lucida Sans" pitchFamily="34" charset="-120"/>
               </a:rPr>
               <a:t>Wo stehe ich?</a:t>
             </a:r>
-            <a:endParaRPr lang="en-US" sz="1900" dirty="0"/>
+            <a:endParaRPr lang="en-US" sz="1800" dirty="0"/>
           </a:p>
         </p:txBody>
       </p:sp>
@@ -5351,8 +5401,8 @@
         </p:nvSpPr>
         <p:spPr>
           <a:xfrm>
-            <a:off x="822960" y="2743200"/>
-            <a:ext cx="2905658" cy="2148840"/>
+            <a:off x="822960" y="2468880"/>
+            <a:ext cx="2905658" cy="2377440"/>
           </a:xfrm>
           <a:prstGeom prst="rect">
             <a:avLst/>
@@ -5372,17 +5422,17 @@
               <a:buChar char="•"/>
             </a:pPr>
             <a:r>
-              <a:rPr lang="en-US" sz="1700" dirty="0">
-                <a:solidFill>
-                  <a:srgbClr val="E6F2F1"/>
-                </a:solidFill>
-                <a:latin typeface="Calibri" pitchFamily="34" charset="0"/>
-                <a:ea typeface="Calibri" pitchFamily="34" charset="-122"/>
-                <a:cs typeface="Calibri" pitchFamily="34" charset="-120"/>
+              <a:rPr lang="en-US" sz="1600" dirty="0">
+                <a:solidFill>
+                  <a:srgbClr val="1D1D1B"/>
+                </a:solidFill>
+                <a:latin typeface="Lucida Sans" pitchFamily="34" charset="0"/>
+                <a:ea typeface="Lucida Sans" pitchFamily="34" charset="-122"/>
+                <a:cs typeface="Lucida Sans" pitchFamily="34" charset="-120"/>
               </a:rPr>
               <a:t>Selbsteinschätzung wiederholen</a:t>
             </a:r>
-            <a:endParaRPr lang="en-US" sz="1700" dirty="0"/>
+            <a:endParaRPr lang="en-US" sz="1600" dirty="0"/>
           </a:p>
           <a:p>
             <a:pPr marL="177800" indent="-177800">
@@ -5393,17 +5443,17 @@
               <a:buChar char="•"/>
             </a:pPr>
             <a:r>
-              <a:rPr lang="en-US" sz="1700" dirty="0">
-                <a:solidFill>
-                  <a:srgbClr val="E6F2F1"/>
-                </a:solidFill>
-                <a:latin typeface="Calibri" pitchFamily="34" charset="0"/>
-                <a:ea typeface="Calibri" pitchFamily="34" charset="-122"/>
-                <a:cs typeface="Calibri" pitchFamily="34" charset="-120"/>
+              <a:rPr lang="en-US" sz="1600" dirty="0">
+                <a:solidFill>
+                  <a:srgbClr val="1D1D1B"/>
+                </a:solidFill>
+                <a:latin typeface="Lucida Sans" pitchFamily="34" charset="0"/>
+                <a:ea typeface="Lucida Sans" pitchFamily="34" charset="-122"/>
+                <a:cs typeface="Lucida Sans" pitchFamily="34" charset="-120"/>
               </a:rPr>
               <a:t>mit Sitzung 1 vergleichen</a:t>
             </a:r>
-            <a:endParaRPr lang="en-US" sz="1700" dirty="0"/>
+            <a:endParaRPr lang="en-US" sz="1600" dirty="0"/>
           </a:p>
         </p:txBody>
       </p:sp>
@@ -5415,20 +5465,20 @@
         </p:nvSpPr>
         <p:spPr>
           <a:xfrm>
-            <a:off x="4368698" y="1737360"/>
-            <a:ext cx="3454298" cy="3291840"/>
+            <a:off x="4368698" y="1463040"/>
+            <a:ext cx="3454298" cy="3566160"/>
           </a:xfrm>
           <a:prstGeom prst="roundRect">
             <a:avLst>
-              <a:gd name="adj" fmla="val 3333"/>
+              <a:gd name="adj" fmla="val 3177"/>
             </a:avLst>
           </a:prstGeom>
           <a:solidFill>
-            <a:srgbClr val="174F5E"/>
+            <a:srgbClr val="FDF0E3"/>
           </a:solidFill>
           <a:ln w="12700">
             <a:solidFill>
-              <a:srgbClr val="2C6E7C"/>
+              <a:srgbClr val="FDF0E3"/>
             </a:solidFill>
             <a:prstDash val="solid"/>
           </a:ln>
@@ -5442,18 +5492,18 @@
         </p:nvSpPr>
         <p:spPr>
           <a:xfrm>
-            <a:off x="4643018" y="1965960"/>
+            <a:off x="4643018" y="1691640"/>
             <a:ext cx="548640" cy="548640"/>
           </a:xfrm>
           <a:prstGeom prst="ellipse">
             <a:avLst/>
           </a:prstGeom>
           <a:solidFill>
-            <a:srgbClr val="E8772E"/>
+            <a:srgbClr val="EF7D00"/>
           </a:solidFill>
           <a:ln w="12700">
             <a:solidFill>
-              <a:srgbClr val="E8772E"/>
+              <a:srgbClr val="EF7D00"/>
             </a:solidFill>
             <a:prstDash val="solid"/>
           </a:ln>
@@ -5467,7 +5517,7 @@
         </p:nvSpPr>
         <p:spPr>
           <a:xfrm>
-            <a:off x="4643018" y="1965960"/>
+            <a:off x="4643018" y="1691640"/>
             <a:ext cx="548640" cy="548640"/>
           </a:xfrm>
           <a:prstGeom prst="rect">
@@ -5486,11 +5536,11 @@
             <a:r>
               <a:rPr lang="en-US" sz="1600" b="1" dirty="0">
                 <a:solidFill>
-                  <a:srgbClr val="FFFFFF"/>
-                </a:solidFill>
-                <a:latin typeface="Calibri" pitchFamily="34" charset="0"/>
-                <a:ea typeface="Calibri" pitchFamily="34" charset="-122"/>
-                <a:cs typeface="Calibri" pitchFamily="34" charset="-120"/>
+                  <a:srgbClr val="1D1D1B"/>
+                </a:solidFill>
+                <a:latin typeface="Lucida Sans" pitchFamily="34" charset="0"/>
+                <a:ea typeface="Lucida Sans" pitchFamily="34" charset="-122"/>
+                <a:cs typeface="Lucida Sans" pitchFamily="34" charset="-120"/>
               </a:rPr>
               <a:t>2</a:t>
             </a:r>
@@ -5506,7 +5556,7 @@
         </p:nvSpPr>
         <p:spPr>
           <a:xfrm>
-            <a:off x="5328818" y="1965960"/>
+            <a:off x="5328818" y="1691640"/>
             <a:ext cx="2265578" cy="548640"/>
           </a:xfrm>
           <a:prstGeom prst="rect">
@@ -5523,17 +5573,17 @@
               <a:buNone/>
             </a:pPr>
             <a:r>
-              <a:rPr lang="en-US" sz="1900" b="1" dirty="0">
-                <a:solidFill>
-                  <a:srgbClr val="FFFFFF"/>
-                </a:solidFill>
-                <a:latin typeface="Calibri" pitchFamily="34" charset="0"/>
-                <a:ea typeface="Calibri" pitchFamily="34" charset="-122"/>
-                <a:cs typeface="Calibri" pitchFamily="34" charset="-120"/>
+              <a:rPr lang="en-US" sz="1800" b="1" dirty="0">
+                <a:solidFill>
+                  <a:srgbClr val="7A003F"/>
+                </a:solidFill>
+                <a:latin typeface="Lucida Sans" pitchFamily="34" charset="0"/>
+                <a:ea typeface="Lucida Sans" pitchFamily="34" charset="-122"/>
+                <a:cs typeface="Lucida Sans" pitchFamily="34" charset="-120"/>
               </a:rPr>
               <a:t>Praxisauftrag</a:t>
             </a:r>
-            <a:endParaRPr lang="en-US" sz="1900" dirty="0"/>
+            <a:endParaRPr lang="en-US" sz="1800" dirty="0"/>
           </a:p>
         </p:txBody>
       </p:sp>
@@ -5545,8 +5595,8 @@
         </p:nvSpPr>
         <p:spPr>
           <a:xfrm>
-            <a:off x="4643018" y="2743200"/>
-            <a:ext cx="2905658" cy="2148840"/>
+            <a:off x="4643018" y="2468880"/>
+            <a:ext cx="2905658" cy="2377440"/>
           </a:xfrm>
           <a:prstGeom prst="rect">
             <a:avLst/>
@@ -5566,17 +5616,17 @@
               <a:buChar char="•"/>
             </a:pPr>
             <a:r>
-              <a:rPr lang="en-US" sz="1700" dirty="0">
-                <a:solidFill>
-                  <a:srgbClr val="E6F2F1"/>
-                </a:solidFill>
-                <a:latin typeface="Calibri" pitchFamily="34" charset="0"/>
-                <a:ea typeface="Calibri" pitchFamily="34" charset="-122"/>
-                <a:cs typeface="Calibri" pitchFamily="34" charset="-120"/>
+              <a:rPr lang="en-US" sz="1600" dirty="0">
+                <a:solidFill>
+                  <a:srgbClr val="1D1D1B"/>
+                </a:solidFill>
+                <a:latin typeface="Lucida Sans" pitchFamily="34" charset="0"/>
+                <a:ea typeface="Lucida Sans" pitchFamily="34" charset="-122"/>
+                <a:cs typeface="Lucida Sans" pitchFamily="34" charset="-120"/>
               </a:rPr>
               <a:t>Tagesplan auf eigene Lerngruppe übertragen</a:t>
             </a:r>
-            <a:endParaRPr lang="en-US" sz="1700" dirty="0"/>
+            <a:endParaRPr lang="en-US" sz="1600" dirty="0"/>
           </a:p>
           <a:p>
             <a:pPr marL="177800" indent="-177800">
@@ -5587,17 +5637,17 @@
               <a:buChar char="•"/>
             </a:pPr>
             <a:r>
-              <a:rPr lang="en-US" sz="1700" dirty="0">
-                <a:solidFill>
-                  <a:srgbClr val="E6F2F1"/>
-                </a:solidFill>
-                <a:latin typeface="Calibri" pitchFamily="34" charset="0"/>
-                <a:ea typeface="Calibri" pitchFamily="34" charset="-122"/>
-                <a:cs typeface="Calibri" pitchFamily="34" charset="-120"/>
+              <a:rPr lang="en-US" sz="1600" dirty="0">
+                <a:solidFill>
+                  <a:srgbClr val="1D1D1B"/>
+                </a:solidFill>
+                <a:latin typeface="Lucida Sans" pitchFamily="34" charset="0"/>
+                <a:ea typeface="Lucida Sans" pitchFamily="34" charset="-122"/>
+                <a:cs typeface="Lucida Sans" pitchFamily="34" charset="-120"/>
               </a:rPr>
               <a:t>erproben und reflektieren</a:t>
             </a:r>
-            <a:endParaRPr lang="en-US" sz="1700" dirty="0"/>
+            <a:endParaRPr lang="en-US" sz="1600" dirty="0"/>
           </a:p>
           <a:p>
             <a:pPr marL="177800" indent="-177800">
@@ -5608,17 +5658,17 @@
               <a:buChar char="•"/>
             </a:pPr>
             <a:r>
-              <a:rPr lang="en-US" sz="1700" dirty="0">
-                <a:solidFill>
-                  <a:srgbClr val="E6F2F1"/>
-                </a:solidFill>
-                <a:latin typeface="Calibri" pitchFamily="34" charset="0"/>
-                <a:ea typeface="Calibri" pitchFamily="34" charset="-122"/>
-                <a:cs typeface="Calibri" pitchFamily="34" charset="-120"/>
+              <a:rPr lang="en-US" sz="1600" dirty="0">
+                <a:solidFill>
+                  <a:srgbClr val="1D1D1B"/>
+                </a:solidFill>
+                <a:latin typeface="Lucida Sans" pitchFamily="34" charset="0"/>
+                <a:ea typeface="Lucida Sans" pitchFamily="34" charset="-122"/>
+                <a:cs typeface="Lucida Sans" pitchFamily="34" charset="-120"/>
               </a:rPr>
               <a:t>ca. 1 Seite im Moodle-Kurs</a:t>
             </a:r>
-            <a:endParaRPr lang="en-US" sz="1700" dirty="0"/>
+            <a:endParaRPr lang="en-US" sz="1600" dirty="0"/>
           </a:p>
         </p:txBody>
       </p:sp>
@@ -5630,20 +5680,20 @@
         </p:nvSpPr>
         <p:spPr>
           <a:xfrm>
-            <a:off x="8188757" y="1737360"/>
-            <a:ext cx="3454298" cy="3291840"/>
+            <a:off x="8188757" y="1463040"/>
+            <a:ext cx="3454298" cy="3566160"/>
           </a:xfrm>
           <a:prstGeom prst="roundRect">
             <a:avLst>
-              <a:gd name="adj" fmla="val 3333"/>
+              <a:gd name="adj" fmla="val 3177"/>
             </a:avLst>
           </a:prstGeom>
           <a:solidFill>
-            <a:srgbClr val="174F5E"/>
+            <a:srgbClr val="FDF0E3"/>
           </a:solidFill>
           <a:ln w="12700">
             <a:solidFill>
-              <a:srgbClr val="2C6E7C"/>
+              <a:srgbClr val="FDF0E3"/>
             </a:solidFill>
             <a:prstDash val="solid"/>
           </a:ln>
@@ -5657,18 +5707,18 @@
         </p:nvSpPr>
         <p:spPr>
           <a:xfrm>
-            <a:off x="8463077" y="1965960"/>
+            <a:off x="8463077" y="1691640"/>
             <a:ext cx="548640" cy="548640"/>
           </a:xfrm>
           <a:prstGeom prst="ellipse">
             <a:avLst/>
           </a:prstGeom>
           <a:solidFill>
-            <a:srgbClr val="E8772E"/>
+            <a:srgbClr val="EF7D00"/>
           </a:solidFill>
           <a:ln w="12700">
             <a:solidFill>
-              <a:srgbClr val="E8772E"/>
+              <a:srgbClr val="EF7D00"/>
             </a:solidFill>
             <a:prstDash val="solid"/>
           </a:ln>
@@ -5682,7 +5732,7 @@
         </p:nvSpPr>
         <p:spPr>
           <a:xfrm>
-            <a:off x="8463077" y="1965960"/>
+            <a:off x="8463077" y="1691640"/>
             <a:ext cx="548640" cy="548640"/>
           </a:xfrm>
           <a:prstGeom prst="rect">
@@ -5701,11 +5751,11 @@
             <a:r>
               <a:rPr lang="en-US" sz="1600" b="1" dirty="0">
                 <a:solidFill>
-                  <a:srgbClr val="FFFFFF"/>
-                </a:solidFill>
-                <a:latin typeface="Calibri" pitchFamily="34" charset="0"/>
-                <a:ea typeface="Calibri" pitchFamily="34" charset="-122"/>
-                <a:cs typeface="Calibri" pitchFamily="34" charset="-120"/>
+                  <a:srgbClr val="1D1D1B"/>
+                </a:solidFill>
+                <a:latin typeface="Lucida Sans" pitchFamily="34" charset="0"/>
+                <a:ea typeface="Lucida Sans" pitchFamily="34" charset="-122"/>
+                <a:cs typeface="Lucida Sans" pitchFamily="34" charset="-120"/>
               </a:rPr>
               <a:t>3</a:t>
             </a:r>
@@ -5721,7 +5771,7 @@
         </p:nvSpPr>
         <p:spPr>
           <a:xfrm>
-            <a:off x="9148877" y="1965960"/>
+            <a:off x="9148877" y="1691640"/>
             <a:ext cx="2265578" cy="548640"/>
           </a:xfrm>
           <a:prstGeom prst="rect">
@@ -5738,17 +5788,17 @@
               <a:buNone/>
             </a:pPr>
             <a:r>
-              <a:rPr lang="en-US" sz="1900" b="1" dirty="0">
-                <a:solidFill>
-                  <a:srgbClr val="FFFFFF"/>
-                </a:solidFill>
-                <a:latin typeface="Calibri" pitchFamily="34" charset="0"/>
-                <a:ea typeface="Calibri" pitchFamily="34" charset="-122"/>
-                <a:cs typeface="Calibri" pitchFamily="34" charset="-120"/>
+              <a:rPr lang="en-US" sz="1800" b="1" dirty="0">
+                <a:solidFill>
+                  <a:srgbClr val="7A003F"/>
+                </a:solidFill>
+                <a:latin typeface="Lucida Sans" pitchFamily="34" charset="0"/>
+                <a:ea typeface="Lucida Sans" pitchFamily="34" charset="-122"/>
+                <a:cs typeface="Lucida Sans" pitchFamily="34" charset="-120"/>
               </a:rPr>
               <a:t>Evaluation</a:t>
             </a:r>
-            <a:endParaRPr lang="en-US" sz="1900" dirty="0"/>
+            <a:endParaRPr lang="en-US" sz="1800" dirty="0"/>
           </a:p>
         </p:txBody>
       </p:sp>
@@ -5760,8 +5810,8 @@
         </p:nvSpPr>
         <p:spPr>
           <a:xfrm>
-            <a:off x="8463077" y="2743200"/>
-            <a:ext cx="2905658" cy="2148840"/>
+            <a:off x="8463077" y="2468880"/>
+            <a:ext cx="2905658" cy="2377440"/>
           </a:xfrm>
           <a:prstGeom prst="rect">
             <a:avLst/>
@@ -5781,17 +5831,17 @@
               <a:buChar char="•"/>
             </a:pPr>
             <a:r>
-              <a:rPr lang="en-US" sz="1700" dirty="0">
-                <a:solidFill>
-                  <a:srgbClr val="E6F2F1"/>
-                </a:solidFill>
-                <a:latin typeface="Calibri" pitchFamily="34" charset="0"/>
-                <a:ea typeface="Calibri" pitchFamily="34" charset="-122"/>
-                <a:cs typeface="Calibri" pitchFamily="34" charset="-120"/>
+              <a:rPr lang="en-US" sz="1600" dirty="0">
+                <a:solidFill>
+                  <a:srgbClr val="1D1D1B"/>
+                </a:solidFill>
+                <a:latin typeface="Lucida Sans" pitchFamily="34" charset="0"/>
+                <a:ea typeface="Lucida Sans" pitchFamily="34" charset="-122"/>
+                <a:cs typeface="Lucida Sans" pitchFamily="34" charset="-120"/>
               </a:rPr>
               <a:t>5 Minuten im Selbstlernmodul 3</a:t>
             </a:r>
-            <a:endParaRPr lang="en-US" sz="1700" dirty="0"/>
+            <a:endParaRPr lang="en-US" sz="1600" dirty="0"/>
           </a:p>
           <a:p>
             <a:pPr marL="177800" indent="-177800">
@@ -5802,17 +5852,65 @@
               <a:buChar char="•"/>
             </a:pPr>
             <a:r>
-              <a:rPr lang="en-US" sz="1700" dirty="0">
-                <a:solidFill>
-                  <a:srgbClr val="E6F2F1"/>
-                </a:solidFill>
-                <a:latin typeface="Calibri" pitchFamily="34" charset="0"/>
-                <a:ea typeface="Calibri" pitchFamily="34" charset="-122"/>
-                <a:cs typeface="Calibri" pitchFamily="34" charset="-120"/>
+              <a:rPr lang="en-US" sz="1600" dirty="0">
+                <a:solidFill>
+                  <a:srgbClr val="1D1D1B"/>
+                </a:solidFill>
+                <a:latin typeface="Lucida Sans" pitchFamily="34" charset="0"/>
+                <a:ea typeface="Lucida Sans" pitchFamily="34" charset="-122"/>
+                <a:cs typeface="Lucida Sans" pitchFamily="34" charset="-120"/>
               </a:rPr>
               <a:t>Ihre Rückmeldung verbessert die Reihe</a:t>
             </a:r>
-            <a:endParaRPr lang="en-US" sz="1700" dirty="0"/>
+            <a:endParaRPr lang="en-US" sz="1600" dirty="0"/>
+          </a:p>
+        </p:txBody>
+      </p:sp>
+      <p:sp>
+        <p:nvSpPr>
+          <p:cNvPr id="25" name="Slide Number Placeholder 0"/>
+          <p:cNvSpPr>
+            <a:spLocks noGrp="1"/>
+          </p:cNvSpPr>
+          <p:nvPr>
+            <p:ph type="sldNum" sz="quarter" idx="4294967295"/>
+          </p:nvPr>
+        </p:nvSpPr>
+        <p:spPr>
+          <a:xfrm>
+            <a:off x="11094415" y="6473952"/>
+            <a:ext cx="548640" cy="274320"/>
+          </a:xfrm>
+          <a:prstGeom prst="rect">
+            <a:avLst/>
+          </a:prstGeom>
+          <a:extLst>
+            <a:ext uri="{C572A759-6A51-4108-AA02-DFA0A04FC94B}">
+              <ma14:wrappingTextBoxFlag xmlns:ma14="http://schemas.microsoft.com/office/mac/drawingml/2011/main" val="0"/>
+            </a:ext>
+          </a:extLst>
+        </p:spPr>
+        <p:txBody>
+          <a:bodyPr/>
+          <a:lstStyle>
+            <a:lvl1pPr>
+              <a:defRPr sz="1000">
+                <a:solidFill>
+                  <a:srgbClr val="706F6F"/>
+                </a:solidFill>
+                <a:latin typeface="Lucida Sans"/>
+                <a:ea typeface="Lucida Sans"/>
+                <a:cs typeface="Lucida Sans"/>
+              </a:defRPr>
+            </a:lvl1pPr>
+          </a:lstStyle>
+          <a:p>
+            <a:pPr algn="r"/>
+            <a:fld id="{F7021451-1387-4CA6-816F-3879F97B5CBC}" type="slidenum">
+              <a:rPr b="0" lang="en-US"/>
+              <a:t>14</a:t>
+            </a:fld>
+            <a:endParaRPr lang="en-US"/>
           </a:p>
         </p:txBody>
       </p:sp>
@@ -5846,13 +5944,52 @@
           <p:cNvPr id="2" name="Text 1"/>
           <p:cNvSpPr/>
           <p:nvPr>
-            <p:ph idx="101" type="title" hasCustomPrompt="1"/>
+            <p:ph idx="102" type="title" hasCustomPrompt="1"/>
           </p:nvPr>
         </p:nvSpPr>
         <p:spPr>
           <a:xfrm>
-            <a:off x="548640" y="320040"/>
-            <a:ext cx="11094415" cy="777240"/>
+            <a:off x="548640" y="274320"/>
+            <a:ext cx="8351215" cy="896112"/>
+          </a:xfrm>
+          <a:prstGeom prst="rect">
+            <a:avLst/>
+          </a:prstGeom>
+          <a:noFill/>
+          <a:ln/>
+        </p:spPr>
+        <p:txBody>
+          <a:bodyPr wrap="square" lIns="0" tIns="0" rIns="0" bIns="0" rtlCol="0" anchor="ctr"/>
+          <a:lstStyle/>
+          <a:p>
+            <a:pPr algn="l" indent="0" marL="0">
+              <a:buNone/>
+            </a:pPr>
+            <a:r>
+              <a:rPr lang="en-US" sz="2600" b="1" dirty="0">
+                <a:solidFill>
+                  <a:srgbClr val="7A003F"/>
+                </a:solidFill>
+                <a:latin typeface="Lucida Sans" pitchFamily="34" charset="0"/>
+                <a:ea typeface="Lucida Sans" pitchFamily="34" charset="-122"/>
+                <a:cs typeface="Lucida Sans" pitchFamily="34" charset="-120"/>
+              </a:rPr>
+              <a:t>Was Sie schon können</a:t>
+            </a:r>
+            <a:endParaRPr lang="en-US" sz="2600" dirty="0"/>
+          </a:p>
+        </p:txBody>
+      </p:sp>
+      <p:sp>
+        <p:nvSpPr>
+          <p:cNvPr id="3" name="Text 1"/>
+          <p:cNvSpPr txBox="1"/>
+          <p:nvPr/>
+        </p:nvSpPr>
+        <p:spPr>
+          <a:xfrm>
+            <a:off x="548640" y="1234440"/>
+            <a:ext cx="11094415" cy="640080"/>
           </a:xfrm>
           <a:prstGeom prst="rect">
             <a:avLst/>
@@ -5868,52 +6005,13 @@
               <a:buNone/>
             </a:pPr>
             <a:r>
-              <a:rPr lang="en-US" sz="3200" b="1" dirty="0">
-                <a:solidFill>
-                  <a:srgbClr val="0B3C49"/>
-                </a:solidFill>
-                <a:latin typeface="Cambria" pitchFamily="34" charset="0"/>
-                <a:ea typeface="Cambria" pitchFamily="34" charset="-122"/>
-                <a:cs typeface="Cambria" pitchFamily="34" charset="-120"/>
-              </a:rPr>
-              <a:t>Was Sie schon können</a:t>
-            </a:r>
-            <a:endParaRPr lang="en-US" sz="3200" dirty="0"/>
-          </a:p>
-        </p:txBody>
-      </p:sp>
-      <p:sp>
-        <p:nvSpPr>
-          <p:cNvPr id="3" name="Text 1"/>
-          <p:cNvSpPr txBox="1"/>
-          <p:nvPr/>
-        </p:nvSpPr>
-        <p:spPr>
-          <a:xfrm>
-            <a:off x="548640" y="1234440"/>
-            <a:ext cx="11094415" cy="640080"/>
-          </a:xfrm>
-          <a:prstGeom prst="rect">
-            <a:avLst/>
-          </a:prstGeom>
-          <a:noFill/>
-          <a:ln/>
-        </p:spPr>
-        <p:txBody>
-          <a:bodyPr wrap="square" lIns="0" tIns="0" rIns="0" bIns="0" rtlCol="0" anchor="ctr"/>
-          <a:lstStyle/>
-          <a:p>
-            <a:pPr indent="0" marL="0">
-              <a:buNone/>
-            </a:pPr>
-            <a:r>
               <a:rPr lang="en-US" sz="1700" dirty="0">
                 <a:solidFill>
-                  <a:srgbClr val="5B6B73"/>
-                </a:solidFill>
-                <a:latin typeface="Calibri" pitchFamily="34" charset="0"/>
-                <a:ea typeface="Calibri" pitchFamily="34" charset="-122"/>
-                <a:cs typeface="Calibri" pitchFamily="34" charset="-120"/>
+                  <a:srgbClr val="706F6F"/>
+                </a:solidFill>
+                <a:latin typeface="Lucida Sans" pitchFamily="34" charset="0"/>
+                <a:ea typeface="Lucida Sans" pitchFamily="34" charset="-122"/>
+                <a:cs typeface="Lucida Sans" pitchFamily="34" charset="-120"/>
               </a:rPr>
               <a:t>Rückblick in einem Satz: Was können Sie jetzt, was Sie vor Sitzung 1 nicht konnten?</a:t>
             </a:r>
@@ -5938,11 +6036,11 @@
             </a:avLst>
           </a:prstGeom>
           <a:solidFill>
-            <a:srgbClr val="E6F2F1"/>
+            <a:srgbClr val="F2F2F2"/>
           </a:solidFill>
           <a:ln w="12700">
             <a:solidFill>
-              <a:srgbClr val="E6F2F1"/>
+              <a:srgbClr val="F2F2F2"/>
             </a:solidFill>
             <a:prstDash val="solid"/>
           </a:ln>
@@ -5963,11 +6061,11 @@
             <a:avLst/>
           </a:prstGeom>
           <a:solidFill>
-            <a:srgbClr val="0B6E69"/>
+            <a:srgbClr val="7A003F"/>
           </a:solidFill>
           <a:ln w="12700">
             <a:solidFill>
-              <a:srgbClr val="0B6E69"/>
+              <a:srgbClr val="7A003F"/>
             </a:solidFill>
             <a:prstDash val="solid"/>
           </a:ln>
@@ -6002,9 +6100,9 @@
                 <a:solidFill>
                   <a:srgbClr val="FFFFFF"/>
                 </a:solidFill>
-                <a:latin typeface="Calibri" pitchFamily="34" charset="0"/>
-                <a:ea typeface="Calibri" pitchFamily="34" charset="-122"/>
-                <a:cs typeface="Calibri" pitchFamily="34" charset="-120"/>
+                <a:latin typeface="Lucida Sans" pitchFamily="34" charset="0"/>
+                <a:ea typeface="Lucida Sans" pitchFamily="34" charset="-122"/>
+                <a:cs typeface="Lucida Sans" pitchFamily="34" charset="-120"/>
               </a:rPr>
               <a:t>1</a:t>
             </a:r>
@@ -6039,11 +6137,11 @@
             <a:r>
               <a:rPr lang="en-US" sz="1800" b="1" dirty="0">
                 <a:solidFill>
-                  <a:srgbClr val="0B3C49"/>
-                </a:solidFill>
-                <a:latin typeface="Calibri" pitchFamily="34" charset="0"/>
-                <a:ea typeface="Calibri" pitchFamily="34" charset="-122"/>
-                <a:cs typeface="Calibri" pitchFamily="34" charset="-120"/>
+                  <a:srgbClr val="7A003F"/>
+                </a:solidFill>
+                <a:latin typeface="Lucida Sans" pitchFamily="34" charset="0"/>
+                <a:ea typeface="Lucida Sans" pitchFamily="34" charset="-122"/>
+                <a:cs typeface="Lucida Sans" pitchFamily="34" charset="-120"/>
               </a:rPr>
               <a:t>Sitzung 1</a:t>
             </a:r>
@@ -6082,11 +6180,11 @@
             <a:r>
               <a:rPr lang="en-US" sz="1700" dirty="0">
                 <a:solidFill>
-                  <a:srgbClr val="1F2A30"/>
-                </a:solidFill>
-                <a:latin typeface="Calibri" pitchFamily="34" charset="0"/>
-                <a:ea typeface="Calibri" pitchFamily="34" charset="-122"/>
-                <a:cs typeface="Calibri" pitchFamily="34" charset="-120"/>
+                  <a:srgbClr val="1D1D1B"/>
+                </a:solidFill>
+                <a:latin typeface="Lucida Sans" pitchFamily="34" charset="0"/>
+                <a:ea typeface="Lucida Sans" pitchFamily="34" charset="-122"/>
+                <a:cs typeface="Lucida Sans" pitchFamily="34" charset="-120"/>
               </a:rPr>
               <a:t>mBot2 aufgebaut</a:t>
             </a:r>
@@ -6103,11 +6201,11 @@
             <a:r>
               <a:rPr lang="en-US" sz="1700" dirty="0">
                 <a:solidFill>
-                  <a:srgbClr val="1F2A30"/>
-                </a:solidFill>
-                <a:latin typeface="Calibri" pitchFamily="34" charset="0"/>
-                <a:ea typeface="Calibri" pitchFamily="34" charset="-122"/>
-                <a:cs typeface="Calibri" pitchFamily="34" charset="-120"/>
+                  <a:srgbClr val="1D1D1B"/>
+                </a:solidFill>
+                <a:latin typeface="Lucida Sans" pitchFamily="34" charset="0"/>
+                <a:ea typeface="Lucida Sans" pitchFamily="34" charset="-122"/>
+                <a:cs typeface="Lucida Sans" pitchFamily="34" charset="-120"/>
               </a:rPr>
               <a:t>EVA-Prinzip erklärt</a:t>
             </a:r>
@@ -6124,11 +6222,11 @@
             <a:r>
               <a:rPr lang="en-US" sz="1700" dirty="0">
                 <a:solidFill>
-                  <a:srgbClr val="1F2A30"/>
-                </a:solidFill>
-                <a:latin typeface="Calibri" pitchFamily="34" charset="0"/>
-                <a:ea typeface="Calibri" pitchFamily="34" charset="-122"/>
-                <a:cs typeface="Calibri" pitchFamily="34" charset="-120"/>
+                  <a:srgbClr val="1D1D1B"/>
+                </a:solidFill>
+                <a:latin typeface="Lucida Sans" pitchFamily="34" charset="0"/>
+                <a:ea typeface="Lucida Sans" pitchFamily="34" charset="-122"/>
+                <a:cs typeface="Lucida Sans" pitchFamily="34" charset="-120"/>
               </a:rPr>
               <a:t>mit Open Roberta verbunden</a:t>
             </a:r>
@@ -6153,11 +6251,11 @@
             </a:avLst>
           </a:prstGeom>
           <a:solidFill>
-            <a:srgbClr val="E6F2F1"/>
+            <a:srgbClr val="F2F2F2"/>
           </a:solidFill>
           <a:ln w="12700">
             <a:solidFill>
-              <a:srgbClr val="E6F2F1"/>
+              <a:srgbClr val="F2F2F2"/>
             </a:solidFill>
             <a:prstDash val="solid"/>
           </a:ln>
@@ -6178,11 +6276,11 @@
             <a:avLst/>
           </a:prstGeom>
           <a:solidFill>
-            <a:srgbClr val="0B6E69"/>
+            <a:srgbClr val="7A003F"/>
           </a:solidFill>
           <a:ln w="12700">
             <a:solidFill>
-              <a:srgbClr val="0B6E69"/>
+              <a:srgbClr val="7A003F"/>
             </a:solidFill>
             <a:prstDash val="solid"/>
           </a:ln>
@@ -6217,9 +6315,9 @@
                 <a:solidFill>
                   <a:srgbClr val="FFFFFF"/>
                 </a:solidFill>
-                <a:latin typeface="Calibri" pitchFamily="34" charset="0"/>
-                <a:ea typeface="Calibri" pitchFamily="34" charset="-122"/>
-                <a:cs typeface="Calibri" pitchFamily="34" charset="-120"/>
+                <a:latin typeface="Lucida Sans" pitchFamily="34" charset="0"/>
+                <a:ea typeface="Lucida Sans" pitchFamily="34" charset="-122"/>
+                <a:cs typeface="Lucida Sans" pitchFamily="34" charset="-120"/>
               </a:rPr>
               <a:t>2</a:t>
             </a:r>
@@ -6254,11 +6352,11 @@
             <a:r>
               <a:rPr lang="en-US" sz="1800" b="1" dirty="0">
                 <a:solidFill>
-                  <a:srgbClr val="0B3C49"/>
-                </a:solidFill>
-                <a:latin typeface="Calibri" pitchFamily="34" charset="0"/>
-                <a:ea typeface="Calibri" pitchFamily="34" charset="-122"/>
-                <a:cs typeface="Calibri" pitchFamily="34" charset="-120"/>
+                  <a:srgbClr val="7A003F"/>
+                </a:solidFill>
+                <a:latin typeface="Lucida Sans" pitchFamily="34" charset="0"/>
+                <a:ea typeface="Lucida Sans" pitchFamily="34" charset="-122"/>
+                <a:cs typeface="Lucida Sans" pitchFamily="34" charset="-120"/>
               </a:rPr>
               <a:t>Sitzung 2</a:t>
             </a:r>
@@ -6297,11 +6395,11 @@
             <a:r>
               <a:rPr lang="en-US" sz="1700" dirty="0">
                 <a:solidFill>
-                  <a:srgbClr val="1F2A30"/>
-                </a:solidFill>
-                <a:latin typeface="Calibri" pitchFamily="34" charset="0"/>
-                <a:ea typeface="Calibri" pitchFamily="34" charset="-122"/>
-                <a:cs typeface="Calibri" pitchFamily="34" charset="-120"/>
+                  <a:srgbClr val="1D1D1B"/>
+                </a:solidFill>
+                <a:latin typeface="Lucida Sans" pitchFamily="34" charset="0"/>
+                <a:ea typeface="Lucida Sans" pitchFamily="34" charset="-122"/>
+                <a:cs typeface="Lucida Sans" pitchFamily="34" charset="-120"/>
               </a:rPr>
               <a:t>Schleifen und Bedingungen</a:t>
             </a:r>
@@ -6318,11 +6416,11 @@
             <a:r>
               <a:rPr lang="en-US" sz="1700" dirty="0">
                 <a:solidFill>
-                  <a:srgbClr val="1F2A30"/>
-                </a:solidFill>
-                <a:latin typeface="Calibri" pitchFamily="34" charset="0"/>
-                <a:ea typeface="Calibri" pitchFamily="34" charset="-122"/>
-                <a:cs typeface="Calibri" pitchFamily="34" charset="-120"/>
+                  <a:srgbClr val="1D1D1B"/>
+                </a:solidFill>
+                <a:latin typeface="Lucida Sans" pitchFamily="34" charset="0"/>
+                <a:ea typeface="Lucida Sans" pitchFamily="34" charset="-122"/>
+                <a:cs typeface="Lucida Sans" pitchFamily="34" charset="-120"/>
               </a:rPr>
               <a:t>Schwellenwerte gemessen</a:t>
             </a:r>
@@ -6339,11 +6437,11 @@
             <a:r>
               <a:rPr lang="en-US" sz="1700" dirty="0">
                 <a:solidFill>
-                  <a:srgbClr val="1F2A30"/>
-                </a:solidFill>
-                <a:latin typeface="Calibri" pitchFamily="34" charset="0"/>
-                <a:ea typeface="Calibri" pitchFamily="34" charset="-122"/>
-                <a:cs typeface="Calibri" pitchFamily="34" charset="-120"/>
+                  <a:srgbClr val="1D1D1B"/>
+                </a:solidFill>
+                <a:latin typeface="Lucida Sans" pitchFamily="34" charset="0"/>
+                <a:ea typeface="Lucida Sans" pitchFamily="34" charset="-122"/>
+                <a:cs typeface="Lucida Sans" pitchFamily="34" charset="-120"/>
               </a:rPr>
               <a:t>Fehler systematisch gesucht</a:t>
             </a:r>
@@ -6368,11 +6466,11 @@
             </a:avLst>
           </a:prstGeom>
           <a:solidFill>
-            <a:srgbClr val="FCEBDD"/>
+            <a:srgbClr val="FDF0E3"/>
           </a:solidFill>
           <a:ln w="12700">
             <a:solidFill>
-              <a:srgbClr val="FCEBDD"/>
+              <a:srgbClr val="FDF0E3"/>
             </a:solidFill>
             <a:prstDash val="solid"/>
           </a:ln>
@@ -6393,11 +6491,11 @@
             <a:avLst/>
           </a:prstGeom>
           <a:solidFill>
-            <a:srgbClr val="E8772E"/>
+            <a:srgbClr val="EF7D00"/>
           </a:solidFill>
           <a:ln w="12700">
             <a:solidFill>
-              <a:srgbClr val="E8772E"/>
+              <a:srgbClr val="EF7D00"/>
             </a:solidFill>
             <a:prstDash val="solid"/>
           </a:ln>
@@ -6430,11 +6528,11 @@
             <a:r>
               <a:rPr lang="en-US" sz="1600" b="1" dirty="0">
                 <a:solidFill>
-                  <a:srgbClr val="FFFFFF"/>
-                </a:solidFill>
-                <a:latin typeface="Calibri" pitchFamily="34" charset="0"/>
-                <a:ea typeface="Calibri" pitchFamily="34" charset="-122"/>
-                <a:cs typeface="Calibri" pitchFamily="34" charset="-120"/>
+                  <a:srgbClr val="1D1D1B"/>
+                </a:solidFill>
+                <a:latin typeface="Lucida Sans" pitchFamily="34" charset="0"/>
+                <a:ea typeface="Lucida Sans" pitchFamily="34" charset="-122"/>
+                <a:cs typeface="Lucida Sans" pitchFamily="34" charset="-120"/>
               </a:rPr>
               <a:t>3</a:t>
             </a:r>
@@ -6469,11 +6567,11 @@
             <a:r>
               <a:rPr lang="en-US" sz="1800" b="1" dirty="0">
                 <a:solidFill>
-                  <a:srgbClr val="0B3C49"/>
-                </a:solidFill>
-                <a:latin typeface="Calibri" pitchFamily="34" charset="0"/>
-                <a:ea typeface="Calibri" pitchFamily="34" charset="-122"/>
-                <a:cs typeface="Calibri" pitchFamily="34" charset="-120"/>
+                  <a:srgbClr val="7A003F"/>
+                </a:solidFill>
+                <a:latin typeface="Lucida Sans" pitchFamily="34" charset="0"/>
+                <a:ea typeface="Lucida Sans" pitchFamily="34" charset="-122"/>
+                <a:cs typeface="Lucida Sans" pitchFamily="34" charset="-120"/>
               </a:rPr>
               <a:t>Heute</a:t>
             </a:r>
@@ -6512,13 +6610,13 @@
             <a:r>
               <a:rPr lang="en-US" sz="1700" dirty="0">
                 <a:solidFill>
-                  <a:srgbClr val="1F2A30"/>
-                </a:solidFill>
-                <a:latin typeface="Calibri" pitchFamily="34" charset="0"/>
-                <a:ea typeface="Calibri" pitchFamily="34" charset="-122"/>
-                <a:cs typeface="Calibri" pitchFamily="34" charset="-120"/>
-              </a:rPr>
-              <a:t>Aufgabe für Klasse 7 erproben</a:t>
+                  <a:srgbClr val="1D1D1B"/>
+                </a:solidFill>
+                <a:latin typeface="Lucida Sans" pitchFamily="34" charset="0"/>
+                <a:ea typeface="Lucida Sans" pitchFamily="34" charset="-122"/>
+                <a:cs typeface="Lucida Sans" pitchFamily="34" charset="-120"/>
+              </a:rPr>
+              <a:t>Jahrgangsstufe festlegen</a:t>
             </a:r>
             <a:endParaRPr lang="en-US" sz="1700" dirty="0"/>
           </a:p>
@@ -6533,13 +6631,13 @@
             <a:r>
               <a:rPr lang="en-US" sz="1700" dirty="0">
                 <a:solidFill>
-                  <a:srgbClr val="1F2A30"/>
-                </a:solidFill>
-                <a:latin typeface="Calibri" pitchFamily="34" charset="0"/>
-                <a:ea typeface="Calibri" pitchFamily="34" charset="-122"/>
-                <a:cs typeface="Calibri" pitchFamily="34" charset="-120"/>
-              </a:rPr>
-              <a:t>Tagesplan entwickeln</a:t>
+                  <a:srgbClr val="1D1D1B"/>
+                </a:solidFill>
+                <a:latin typeface="Lucida Sans" pitchFamily="34" charset="0"/>
+                <a:ea typeface="Lucida Sans" pitchFamily="34" charset="-122"/>
+                <a:cs typeface="Lucida Sans" pitchFamily="34" charset="-120"/>
+              </a:rPr>
+              <a:t>Aufgabe erproben, Tagesplan entwickeln</a:t>
             </a:r>
             <a:endParaRPr lang="en-US" sz="1700" dirty="0"/>
           </a:p>
@@ -6554,11 +6652,11 @@
             <a:r>
               <a:rPr lang="en-US" sz="1700" dirty="0">
                 <a:solidFill>
-                  <a:srgbClr val="1F2A30"/>
-                </a:solidFill>
-                <a:latin typeface="Calibri" pitchFamily="34" charset="0"/>
-                <a:ea typeface="Calibri" pitchFamily="34" charset="-122"/>
-                <a:cs typeface="Calibri" pitchFamily="34" charset="-120"/>
+                  <a:srgbClr val="1D1D1B"/>
+                </a:solidFill>
+                <a:latin typeface="Lucida Sans" pitchFamily="34" charset="0"/>
+                <a:ea typeface="Lucida Sans" pitchFamily="34" charset="-122"/>
+                <a:cs typeface="Lucida Sans" pitchFamily="34" charset="-120"/>
               </a:rPr>
               <a:t>Übergaben abstimmen</a:t>
             </a:r>
@@ -6596,11 +6694,11 @@
             <a:lvl1pPr>
               <a:defRPr sz="1000">
                 <a:solidFill>
-                  <a:srgbClr val="5B6B73"/>
-                </a:solidFill>
-                <a:latin typeface="Calibri"/>
-                <a:ea typeface="Calibri"/>
-                <a:cs typeface="Calibri"/>
+                  <a:srgbClr val="706F6F"/>
+                </a:solidFill>
+                <a:latin typeface="Lucida Sans"/>
+                <a:ea typeface="Lucida Sans"/>
+                <a:cs typeface="Lucida Sans"/>
               </a:defRPr>
             </a:lvl1pPr>
           </a:lstStyle>
@@ -6644,13 +6742,13 @@
           <p:cNvPr id="2" name="Text 1"/>
           <p:cNvSpPr/>
           <p:nvPr>
-            <p:ph idx="101" type="title" hasCustomPrompt="1"/>
+            <p:ph idx="102" type="title" hasCustomPrompt="1"/>
           </p:nvPr>
         </p:nvSpPr>
         <p:spPr>
           <a:xfrm>
-            <a:off x="548640" y="320040"/>
-            <a:ext cx="11094415" cy="777240"/>
+            <a:off x="548640" y="274320"/>
+            <a:ext cx="8351215" cy="896112"/>
           </a:xfrm>
           <a:prstGeom prst="rect">
             <a:avLst/>
@@ -6662,21 +6760,21 @@
           <a:bodyPr wrap="square" lIns="0" tIns="0" rIns="0" bIns="0" rtlCol="0" anchor="ctr"/>
           <a:lstStyle/>
           <a:p>
-            <a:pPr indent="0" marL="0">
+            <a:pPr algn="l" indent="0" marL="0">
               <a:buNone/>
             </a:pPr>
             <a:r>
-              <a:rPr lang="en-US" sz="3200" b="1" dirty="0">
-                <a:solidFill>
-                  <a:srgbClr val="0B3C49"/>
-                </a:solidFill>
-                <a:latin typeface="Cambria" pitchFamily="34" charset="0"/>
-                <a:ea typeface="Cambria" pitchFamily="34" charset="-122"/>
-                <a:cs typeface="Cambria" pitchFamily="34" charset="-120"/>
+              <a:rPr lang="en-US" sz="2600" b="1" dirty="0">
+                <a:solidFill>
+                  <a:srgbClr val="7A003F"/>
+                </a:solidFill>
+                <a:latin typeface="Lucida Sans" pitchFamily="34" charset="0"/>
+                <a:ea typeface="Lucida Sans" pitchFamily="34" charset="-122"/>
+                <a:cs typeface="Lucida Sans" pitchFamily="34" charset="-120"/>
               </a:rPr>
               <a:t>Erst selbst ausprobieren – dann planen</a:t>
             </a:r>
-            <a:endParaRPr lang="en-US" sz="3200" dirty="0"/>
+            <a:endParaRPr lang="en-US" sz="2600" dirty="0"/>
           </a:p>
         </p:txBody>
       </p:sp>
@@ -6697,11 +6795,11 @@
             </a:avLst>
           </a:prstGeom>
           <a:solidFill>
-            <a:srgbClr val="E6F2F1"/>
+            <a:srgbClr val="F2F2F2"/>
           </a:solidFill>
           <a:ln w="12700">
             <a:solidFill>
-              <a:srgbClr val="E6F2F1"/>
+              <a:srgbClr val="F2F2F2"/>
             </a:solidFill>
             <a:prstDash val="solid"/>
           </a:ln>
@@ -6722,11 +6820,11 @@
             <a:avLst/>
           </a:prstGeom>
           <a:solidFill>
-            <a:srgbClr val="0B6E69"/>
+            <a:srgbClr val="7A003F"/>
           </a:solidFill>
           <a:ln w="12700">
             <a:solidFill>
-              <a:srgbClr val="0B6E69"/>
+              <a:srgbClr val="7A003F"/>
             </a:solidFill>
             <a:prstDash val="solid"/>
           </a:ln>
@@ -6761,9 +6859,9 @@
                 <a:solidFill>
                   <a:srgbClr val="FFFFFF"/>
                 </a:solidFill>
-                <a:latin typeface="Calibri" pitchFamily="34" charset="0"/>
-                <a:ea typeface="Calibri" pitchFamily="34" charset="-122"/>
-                <a:cs typeface="Calibri" pitchFamily="34" charset="-120"/>
+                <a:latin typeface="Lucida Sans" pitchFamily="34" charset="0"/>
+                <a:ea typeface="Lucida Sans" pitchFamily="34" charset="-122"/>
+                <a:cs typeface="Lucida Sans" pitchFamily="34" charset="-120"/>
               </a:rPr>
               <a:t>1</a:t>
             </a:r>
@@ -6798,11 +6896,11 @@
             <a:r>
               <a:rPr lang="en-US" sz="1800" b="1" dirty="0">
                 <a:solidFill>
-                  <a:srgbClr val="0B3C49"/>
-                </a:solidFill>
-                <a:latin typeface="Calibri" pitchFamily="34" charset="0"/>
-                <a:ea typeface="Calibri" pitchFamily="34" charset="-122"/>
-                <a:cs typeface="Calibri" pitchFamily="34" charset="-120"/>
+                  <a:srgbClr val="7A003F"/>
+                </a:solidFill>
+                <a:latin typeface="Lucida Sans" pitchFamily="34" charset="0"/>
+                <a:ea typeface="Lucida Sans" pitchFamily="34" charset="-122"/>
+                <a:cs typeface="Lucida Sans" pitchFamily="34" charset="-120"/>
               </a:rPr>
               <a:t>Erleben vor Erklären</a:t>
             </a:r>
@@ -6837,11 +6935,11 @@
             <a:r>
               <a:rPr lang="en-US" sz="1600" dirty="0">
                 <a:solidFill>
-                  <a:srgbClr val="1F2A30"/>
-                </a:solidFill>
-                <a:latin typeface="Calibri" pitchFamily="34" charset="0"/>
-                <a:ea typeface="Calibri" pitchFamily="34" charset="-122"/>
-                <a:cs typeface="Calibri" pitchFamily="34" charset="-120"/>
+                  <a:srgbClr val="1D1D1B"/>
+                </a:solidFill>
+                <a:latin typeface="Lucida Sans" pitchFamily="34" charset="0"/>
+                <a:ea typeface="Lucida Sans" pitchFamily="34" charset="-122"/>
+                <a:cs typeface="Lucida Sans" pitchFamily="34" charset="-120"/>
               </a:rPr>
               <a:t>Sie lösen die Aufgabe, die später Ihre Schülerinnen und Schüler lösen.</a:t>
             </a:r>
@@ -6866,11 +6964,11 @@
             </a:avLst>
           </a:prstGeom>
           <a:solidFill>
-            <a:srgbClr val="E6F2F1"/>
+            <a:srgbClr val="F2F2F2"/>
           </a:solidFill>
           <a:ln w="12700">
             <a:solidFill>
-              <a:srgbClr val="E6F2F1"/>
+              <a:srgbClr val="F2F2F2"/>
             </a:solidFill>
             <a:prstDash val="solid"/>
           </a:ln>
@@ -6891,11 +6989,11 @@
             <a:avLst/>
           </a:prstGeom>
           <a:solidFill>
-            <a:srgbClr val="0B6E69"/>
+            <a:srgbClr val="7A003F"/>
           </a:solidFill>
           <a:ln w="12700">
             <a:solidFill>
-              <a:srgbClr val="0B6E69"/>
+              <a:srgbClr val="7A003F"/>
             </a:solidFill>
             <a:prstDash val="solid"/>
           </a:ln>
@@ -6930,9 +7028,9 @@
                 <a:solidFill>
                   <a:srgbClr val="FFFFFF"/>
                 </a:solidFill>
-                <a:latin typeface="Calibri" pitchFamily="34" charset="0"/>
-                <a:ea typeface="Calibri" pitchFamily="34" charset="-122"/>
-                <a:cs typeface="Calibri" pitchFamily="34" charset="-120"/>
+                <a:latin typeface="Lucida Sans" pitchFamily="34" charset="0"/>
+                <a:ea typeface="Lucida Sans" pitchFamily="34" charset="-122"/>
+                <a:cs typeface="Lucida Sans" pitchFamily="34" charset="-120"/>
               </a:rPr>
               <a:t>2</a:t>
             </a:r>
@@ -6967,11 +7065,11 @@
             <a:r>
               <a:rPr lang="en-US" sz="1800" b="1" dirty="0">
                 <a:solidFill>
-                  <a:srgbClr val="0B3C49"/>
-                </a:solidFill>
-                <a:latin typeface="Calibri" pitchFamily="34" charset="0"/>
-                <a:ea typeface="Calibri" pitchFamily="34" charset="-122"/>
-                <a:cs typeface="Calibri" pitchFamily="34" charset="-120"/>
+                  <a:srgbClr val="7A003F"/>
+                </a:solidFill>
+                <a:latin typeface="Lucida Sans" pitchFamily="34" charset="0"/>
+                <a:ea typeface="Lucida Sans" pitchFamily="34" charset="-122"/>
+                <a:cs typeface="Lucida Sans" pitchFamily="34" charset="-120"/>
               </a:rPr>
               <a:t>Erfahrung → Planung</a:t>
             </a:r>
@@ -7006,11 +7104,11 @@
             <a:r>
               <a:rPr lang="en-US" sz="1600" dirty="0">
                 <a:solidFill>
-                  <a:srgbClr val="1F2A30"/>
-                </a:solidFill>
-                <a:latin typeface="Calibri" pitchFamily="34" charset="0"/>
-                <a:ea typeface="Calibri" pitchFamily="34" charset="-122"/>
-                <a:cs typeface="Calibri" pitchFamily="34" charset="-120"/>
+                  <a:srgbClr val="1D1D1B"/>
+                </a:solidFill>
+                <a:latin typeface="Lucida Sans" pitchFamily="34" charset="0"/>
+                <a:ea typeface="Lucida Sans" pitchFamily="34" charset="-122"/>
+                <a:cs typeface="Lucida Sans" pitchFamily="34" charset="-120"/>
               </a:rPr>
               <a:t>Zeitbedarf, Stolperstellen und Aha-Momente fließen direkt in den Tagesplan.</a:t>
             </a:r>
@@ -7035,11 +7133,11 @@
             </a:avLst>
           </a:prstGeom>
           <a:solidFill>
-            <a:srgbClr val="E6F2F1"/>
+            <a:srgbClr val="F2F2F2"/>
           </a:solidFill>
           <a:ln w="12700">
             <a:solidFill>
-              <a:srgbClr val="E6F2F1"/>
+              <a:srgbClr val="F2F2F2"/>
             </a:solidFill>
             <a:prstDash val="solid"/>
           </a:ln>
@@ -7060,11 +7158,11 @@
             <a:avLst/>
           </a:prstGeom>
           <a:solidFill>
-            <a:srgbClr val="0B6E69"/>
+            <a:srgbClr val="7A003F"/>
           </a:solidFill>
           <a:ln w="12700">
             <a:solidFill>
-              <a:srgbClr val="0B6E69"/>
+              <a:srgbClr val="7A003F"/>
             </a:solidFill>
             <a:prstDash val="solid"/>
           </a:ln>
@@ -7099,9 +7197,9 @@
                 <a:solidFill>
                   <a:srgbClr val="FFFFFF"/>
                 </a:solidFill>
-                <a:latin typeface="Calibri" pitchFamily="34" charset="0"/>
-                <a:ea typeface="Calibri" pitchFamily="34" charset="-122"/>
-                <a:cs typeface="Calibri" pitchFamily="34" charset="-120"/>
+                <a:latin typeface="Lucida Sans" pitchFamily="34" charset="0"/>
+                <a:ea typeface="Lucida Sans" pitchFamily="34" charset="-122"/>
+                <a:cs typeface="Lucida Sans" pitchFamily="34" charset="-120"/>
               </a:rPr>
               <a:t>3</a:t>
             </a:r>
@@ -7136,11 +7234,11 @@
             <a:r>
               <a:rPr lang="en-US" sz="1800" b="1" dirty="0">
                 <a:solidFill>
-                  <a:srgbClr val="0B3C49"/>
-                </a:solidFill>
-                <a:latin typeface="Calibri" pitchFamily="34" charset="0"/>
-                <a:ea typeface="Calibri" pitchFamily="34" charset="-122"/>
-                <a:cs typeface="Calibri" pitchFamily="34" charset="-120"/>
+                  <a:srgbClr val="7A003F"/>
+                </a:solidFill>
+                <a:latin typeface="Lucida Sans" pitchFamily="34" charset="0"/>
+                <a:ea typeface="Lucida Sans" pitchFamily="34" charset="-122"/>
+                <a:cs typeface="Lucida Sans" pitchFamily="34" charset="-120"/>
               </a:rPr>
               <a:t>Realistische Zeiten</a:t>
             </a:r>
@@ -7175,11 +7273,11 @@
             <a:r>
               <a:rPr lang="en-US" sz="1600" dirty="0">
                 <a:solidFill>
-                  <a:srgbClr val="1F2A30"/>
-                </a:solidFill>
-                <a:latin typeface="Calibri" pitchFamily="34" charset="0"/>
-                <a:ea typeface="Calibri" pitchFamily="34" charset="-122"/>
-                <a:cs typeface="Calibri" pitchFamily="34" charset="-120"/>
+                  <a:srgbClr val="1D1D1B"/>
+                </a:solidFill>
+                <a:latin typeface="Lucida Sans" pitchFamily="34" charset="0"/>
+                <a:ea typeface="Lucida Sans" pitchFamily="34" charset="-122"/>
+                <a:cs typeface="Lucida Sans" pitchFamily="34" charset="-120"/>
               </a:rPr>
               <a:t>Wer selbst gemessen und programmiert hat, schätzt den Zeitbedarf genauer.</a:t>
             </a:r>
@@ -7204,11 +7302,11 @@
             </a:avLst>
           </a:prstGeom>
           <a:solidFill>
-            <a:srgbClr val="E6F2F1"/>
+            <a:srgbClr val="F2F2F2"/>
           </a:solidFill>
           <a:ln w="12700">
             <a:solidFill>
-              <a:srgbClr val="E6F2F1"/>
+              <a:srgbClr val="F2F2F2"/>
             </a:solidFill>
             <a:prstDash val="solid"/>
           </a:ln>
@@ -7229,11 +7327,11 @@
             <a:avLst/>
           </a:prstGeom>
           <a:solidFill>
-            <a:srgbClr val="0B6E69"/>
+            <a:srgbClr val="7A003F"/>
           </a:solidFill>
           <a:ln w="12700">
             <a:solidFill>
-              <a:srgbClr val="0B6E69"/>
+              <a:srgbClr val="7A003F"/>
             </a:solidFill>
             <a:prstDash val="solid"/>
           </a:ln>
@@ -7268,9 +7366,9 @@
                 <a:solidFill>
                   <a:srgbClr val="FFFFFF"/>
                 </a:solidFill>
-                <a:latin typeface="Calibri" pitchFamily="34" charset="0"/>
-                <a:ea typeface="Calibri" pitchFamily="34" charset="-122"/>
-                <a:cs typeface="Calibri" pitchFamily="34" charset="-120"/>
+                <a:latin typeface="Lucida Sans" pitchFamily="34" charset="0"/>
+                <a:ea typeface="Lucida Sans" pitchFamily="34" charset="-122"/>
+                <a:cs typeface="Lucida Sans" pitchFamily="34" charset="-120"/>
               </a:rPr>
               <a:t>4</a:t>
             </a:r>
@@ -7305,11 +7403,11 @@
             <a:r>
               <a:rPr lang="en-US" sz="1800" b="1" dirty="0">
                 <a:solidFill>
-                  <a:srgbClr val="0B3C49"/>
-                </a:solidFill>
-                <a:latin typeface="Calibri" pitchFamily="34" charset="0"/>
-                <a:ea typeface="Calibri" pitchFamily="34" charset="-122"/>
-                <a:cs typeface="Calibri" pitchFamily="34" charset="-120"/>
+                  <a:srgbClr val="7A003F"/>
+                </a:solidFill>
+                <a:latin typeface="Lucida Sans" pitchFamily="34" charset="0"/>
+                <a:ea typeface="Lucida Sans" pitchFamily="34" charset="-122"/>
+                <a:cs typeface="Lucida Sans" pitchFamily="34" charset="-120"/>
               </a:rPr>
               <a:t>Ein roter Faden</a:t>
             </a:r>
@@ -7344,11 +7442,11 @@
             <a:r>
               <a:rPr lang="en-US" sz="1600" dirty="0">
                 <a:solidFill>
-                  <a:srgbClr val="1F2A30"/>
-                </a:solidFill>
-                <a:latin typeface="Calibri" pitchFamily="34" charset="0"/>
-                <a:ea typeface="Calibri" pitchFamily="34" charset="-122"/>
-                <a:cs typeface="Calibri" pitchFamily="34" charset="-120"/>
+                  <a:srgbClr val="1D1D1B"/>
+                </a:solidFill>
+                <a:latin typeface="Lucida Sans" pitchFamily="34" charset="0"/>
+                <a:ea typeface="Lucida Sans" pitchFamily="34" charset="-122"/>
+                <a:cs typeface="Lucida Sans" pitchFamily="34" charset="-120"/>
               </a:rPr>
               <a:t>Vier Tage, die aufeinander aufbauen – mit klaren Übergaben.</a:t>
             </a:r>
@@ -7386,11 +7484,11 @@
             <a:lvl1pPr>
               <a:defRPr sz="1000">
                 <a:solidFill>
-                  <a:srgbClr val="5B6B73"/>
-                </a:solidFill>
-                <a:latin typeface="Calibri"/>
-                <a:ea typeface="Calibri"/>
-                <a:cs typeface="Calibri"/>
+                  <a:srgbClr val="706F6F"/>
+                </a:solidFill>
+                <a:latin typeface="Lucida Sans"/>
+                <a:ea typeface="Lucida Sans"/>
+                <a:cs typeface="Lucida Sans"/>
               </a:defRPr>
             </a:lvl1pPr>
           </a:lstStyle>
@@ -7434,13 +7532,13 @@
           <p:cNvPr id="2" name="Text 1"/>
           <p:cNvSpPr/>
           <p:nvPr>
-            <p:ph idx="101" type="title" hasCustomPrompt="1"/>
+            <p:ph idx="102" type="title" hasCustomPrompt="1"/>
           </p:nvPr>
         </p:nvSpPr>
         <p:spPr>
           <a:xfrm>
-            <a:off x="548640" y="320040"/>
-            <a:ext cx="11094415" cy="777240"/>
+            <a:off x="548640" y="274320"/>
+            <a:ext cx="8351215" cy="896112"/>
           </a:xfrm>
           <a:prstGeom prst="rect">
             <a:avLst/>
@@ -7452,21 +7550,21 @@
           <a:bodyPr wrap="square" lIns="0" tIns="0" rIns="0" bIns="0" rtlCol="0" anchor="ctr"/>
           <a:lstStyle/>
           <a:p>
-            <a:pPr indent="0" marL="0">
+            <a:pPr algn="l" indent="0" marL="0">
               <a:buNone/>
             </a:pPr>
             <a:r>
-              <a:rPr lang="en-US" sz="3200" b="1" dirty="0">
-                <a:solidFill>
-                  <a:srgbClr val="0B3C49"/>
-                </a:solidFill>
-                <a:latin typeface="Cambria" pitchFamily="34" charset="0"/>
-                <a:ea typeface="Cambria" pitchFamily="34" charset="-122"/>
-                <a:cs typeface="Cambria" pitchFamily="34" charset="-120"/>
-              </a:rPr>
-              <a:t>Die Projektwoche für Klasse 7</a:t>
-            </a:r>
-            <a:endParaRPr lang="en-US" sz="3200" dirty="0"/>
+              <a:rPr lang="en-US" sz="2600" b="1" dirty="0">
+                <a:solidFill>
+                  <a:srgbClr val="7A003F"/>
+                </a:solidFill>
+                <a:latin typeface="Lucida Sans" pitchFamily="34" charset="0"/>
+                <a:ea typeface="Lucida Sans" pitchFamily="34" charset="-122"/>
+                <a:cs typeface="Lucida Sans" pitchFamily="34" charset="-120"/>
+              </a:rPr>
+              <a:t>Die Projektwoche – Beispiel Klasse 7</a:t>
+            </a:r>
+            <a:endParaRPr lang="en-US" sz="2600" dirty="0"/>
           </a:p>
         </p:txBody>
       </p:sp>
@@ -7512,23 +7610,23 @@
                           <a:solidFill>
                             <a:srgbClr val="FFFFFF"/>
                           </a:solidFill>
-                          <a:latin typeface="Calibri" pitchFamily="34" charset="0"/>
-                          <a:ea typeface="Calibri" pitchFamily="34" charset="-122"/>
-                          <a:cs typeface="Calibri" pitchFamily="34" charset="-120"/>
+                          <a:latin typeface="Lucida Sans" pitchFamily="34" charset="0"/>
+                          <a:ea typeface="Lucida Sans" pitchFamily="34" charset="-122"/>
+                          <a:cs typeface="Lucida Sans" pitchFamily="34" charset="-120"/>
                         </a:rPr>
                         <a:t>Tag</a:t>
                       </a:r>
                       <a:endParaRPr lang="en-US" sz="1600" dirty="0">
-                        <a:latin typeface="Calibri" charset="0"/>
-                        <a:ea typeface="Calibri" charset="0"/>
-                        <a:cs typeface="Calibri" charset="0"/>
+                        <a:latin typeface="Lucida Sans" charset="0"/>
+                        <a:ea typeface="Lucida Sans" charset="0"/>
+                        <a:cs typeface="Lucida Sans" charset="0"/>
                       </a:endParaRPr>
                     </a:p>
                   </a:txBody>
                   <a:tcPr marL="101600" marR="101600" marT="63500" marB="63500" anchor="ctr">
                     <a:lnL w="9525" cap="flat" cmpd="sng" algn="ctr">
                       <a:solidFill>
-                        <a:srgbClr val="C9DAD8"/>
+                        <a:srgbClr val="D9D9D9"/>
                       </a:solidFill>
                       <a:prstDash val="solid"/>
                       <a:round/>
@@ -7537,7 +7635,7 @@
                     </a:lnL>
                     <a:lnR w="9525" cap="flat" cmpd="sng" algn="ctr">
                       <a:solidFill>
-                        <a:srgbClr val="C9DAD8"/>
+                        <a:srgbClr val="D9D9D9"/>
                       </a:solidFill>
                       <a:prstDash val="solid"/>
                       <a:round/>
@@ -7546,7 +7644,7 @@
                     </a:lnR>
                     <a:lnT w="9525" cap="flat" cmpd="sng" algn="ctr">
                       <a:solidFill>
-                        <a:srgbClr val="C9DAD8"/>
+                        <a:srgbClr val="D9D9D9"/>
                       </a:solidFill>
                       <a:prstDash val="solid"/>
                       <a:round/>
@@ -7555,7 +7653,7 @@
                     </a:lnT>
                     <a:lnB w="9525" cap="flat" cmpd="sng" algn="ctr">
                       <a:solidFill>
-                        <a:srgbClr val="C9DAD8"/>
+                        <a:srgbClr val="D9D9D9"/>
                       </a:solidFill>
                       <a:prstDash val="solid"/>
                       <a:round/>
@@ -7563,7 +7661,7 @@
                       <a:tailEnd type="none" w="med" len="med"/>
                     </a:lnB>
                     <a:solidFill>
-                      <a:srgbClr val="0B6E69"/>
+                      <a:srgbClr val="7A003F"/>
                     </a:solidFill>
                   </a:tcPr>
                 </a:tc>
@@ -7580,23 +7678,23 @@
                           <a:solidFill>
                             <a:srgbClr val="FFFFFF"/>
                           </a:solidFill>
-                          <a:latin typeface="Calibri" pitchFamily="34" charset="0"/>
-                          <a:ea typeface="Calibri" pitchFamily="34" charset="-122"/>
-                          <a:cs typeface="Calibri" pitchFamily="34" charset="-120"/>
+                          <a:latin typeface="Lucida Sans" pitchFamily="34" charset="0"/>
+                          <a:ea typeface="Lucida Sans" pitchFamily="34" charset="-122"/>
+                          <a:cs typeface="Lucida Sans" pitchFamily="34" charset="-120"/>
                         </a:rPr>
                         <a:t>Fach</a:t>
                       </a:r>
                       <a:endParaRPr lang="en-US" sz="1600" dirty="0">
-                        <a:latin typeface="Calibri" charset="0"/>
-                        <a:ea typeface="Calibri" charset="0"/>
-                        <a:cs typeface="Calibri" charset="0"/>
+                        <a:latin typeface="Lucida Sans" charset="0"/>
+                        <a:ea typeface="Lucida Sans" charset="0"/>
+                        <a:cs typeface="Lucida Sans" charset="0"/>
                       </a:endParaRPr>
                     </a:p>
                   </a:txBody>
                   <a:tcPr marL="101600" marR="101600" marT="63500" marB="63500" anchor="ctr">
                     <a:lnL w="9525" cap="flat" cmpd="sng" algn="ctr">
                       <a:solidFill>
-                        <a:srgbClr val="C9DAD8"/>
+                        <a:srgbClr val="D9D9D9"/>
                       </a:solidFill>
                       <a:prstDash val="solid"/>
                       <a:round/>
@@ -7605,7 +7703,7 @@
                     </a:lnL>
                     <a:lnR w="9525" cap="flat" cmpd="sng" algn="ctr">
                       <a:solidFill>
-                        <a:srgbClr val="C9DAD8"/>
+                        <a:srgbClr val="D9D9D9"/>
                       </a:solidFill>
                       <a:prstDash val="solid"/>
                       <a:round/>
@@ -7614,7 +7712,7 @@
                     </a:lnR>
                     <a:lnT w="9525" cap="flat" cmpd="sng" algn="ctr">
                       <a:solidFill>
-                        <a:srgbClr val="C9DAD8"/>
+                        <a:srgbClr val="D9D9D9"/>
                       </a:solidFill>
                       <a:prstDash val="solid"/>
                       <a:round/>
@@ -7623,7 +7721,7 @@
                     </a:lnT>
                     <a:lnB w="9525" cap="flat" cmpd="sng" algn="ctr">
                       <a:solidFill>
-                        <a:srgbClr val="C9DAD8"/>
+                        <a:srgbClr val="D9D9D9"/>
                       </a:solidFill>
                       <a:prstDash val="solid"/>
                       <a:round/>
@@ -7631,7 +7729,7 @@
                       <a:tailEnd type="none" w="med" len="med"/>
                     </a:lnB>
                     <a:solidFill>
-                      <a:srgbClr val="0B6E69"/>
+                      <a:srgbClr val="7A003F"/>
                     </a:solidFill>
                   </a:tcPr>
                 </a:tc>
@@ -7648,23 +7746,23 @@
                           <a:solidFill>
                             <a:srgbClr val="FFFFFF"/>
                           </a:solidFill>
-                          <a:latin typeface="Calibri" pitchFamily="34" charset="0"/>
-                          <a:ea typeface="Calibri" pitchFamily="34" charset="-122"/>
-                          <a:cs typeface="Calibri" pitchFamily="34" charset="-120"/>
+                          <a:latin typeface="Lucida Sans" pitchFamily="34" charset="0"/>
+                          <a:ea typeface="Lucida Sans" pitchFamily="34" charset="-122"/>
+                          <a:cs typeface="Lucida Sans" pitchFamily="34" charset="-120"/>
                         </a:rPr>
                         <a:t>Tagesziel der Schülerinnen und Schüler</a:t>
                       </a:r>
                       <a:endParaRPr lang="en-US" sz="1600" dirty="0">
-                        <a:latin typeface="Calibri" charset="0"/>
-                        <a:ea typeface="Calibri" charset="0"/>
-                        <a:cs typeface="Calibri" charset="0"/>
+                        <a:latin typeface="Lucida Sans" charset="0"/>
+                        <a:ea typeface="Lucida Sans" charset="0"/>
+                        <a:cs typeface="Lucida Sans" charset="0"/>
                       </a:endParaRPr>
                     </a:p>
                   </a:txBody>
                   <a:tcPr marL="101600" marR="101600" marT="63500" marB="63500" anchor="ctr">
                     <a:lnL w="9525" cap="flat" cmpd="sng" algn="ctr">
                       <a:solidFill>
-                        <a:srgbClr val="C9DAD8"/>
+                        <a:srgbClr val="D9D9D9"/>
                       </a:solidFill>
                       <a:prstDash val="solid"/>
                       <a:round/>
@@ -7673,7 +7771,7 @@
                     </a:lnL>
                     <a:lnR w="9525" cap="flat" cmpd="sng" algn="ctr">
                       <a:solidFill>
-                        <a:srgbClr val="C9DAD8"/>
+                        <a:srgbClr val="D9D9D9"/>
                       </a:solidFill>
                       <a:prstDash val="solid"/>
                       <a:round/>
@@ -7682,7 +7780,7 @@
                     </a:lnR>
                     <a:lnT w="9525" cap="flat" cmpd="sng" algn="ctr">
                       <a:solidFill>
-                        <a:srgbClr val="C9DAD8"/>
+                        <a:srgbClr val="D9D9D9"/>
                       </a:solidFill>
                       <a:prstDash val="solid"/>
                       <a:round/>
@@ -7691,7 +7789,7 @@
                     </a:lnT>
                     <a:lnB w="9525" cap="flat" cmpd="sng" algn="ctr">
                       <a:solidFill>
-                        <a:srgbClr val="C9DAD8"/>
+                        <a:srgbClr val="D9D9D9"/>
                       </a:solidFill>
                       <a:prstDash val="solid"/>
                       <a:round/>
@@ -7699,7 +7797,7 @@
                       <a:tailEnd type="none" w="med" len="med"/>
                     </a:lnB>
                     <a:solidFill>
-                      <a:srgbClr val="0B6E69"/>
+                      <a:srgbClr val="7A003F"/>
                     </a:solidFill>
                   </a:tcPr>
                 </a:tc>
@@ -7716,23 +7814,23 @@
                           <a:solidFill>
                             <a:srgbClr val="FFFFFF"/>
                           </a:solidFill>
-                          <a:latin typeface="Calibri" pitchFamily="34" charset="0"/>
-                          <a:ea typeface="Calibri" pitchFamily="34" charset="-122"/>
-                          <a:cs typeface="Calibri" pitchFamily="34" charset="-120"/>
+                          <a:latin typeface="Lucida Sans" pitchFamily="34" charset="0"/>
+                          <a:ea typeface="Lucida Sans" pitchFamily="34" charset="-122"/>
+                          <a:cs typeface="Lucida Sans" pitchFamily="34" charset="-120"/>
                         </a:rPr>
                         <a:t>Zeit</a:t>
                       </a:r>
                       <a:endParaRPr lang="en-US" sz="1600" dirty="0">
-                        <a:latin typeface="Calibri" charset="0"/>
-                        <a:ea typeface="Calibri" charset="0"/>
-                        <a:cs typeface="Calibri" charset="0"/>
+                        <a:latin typeface="Lucida Sans" charset="0"/>
+                        <a:ea typeface="Lucida Sans" charset="0"/>
+                        <a:cs typeface="Lucida Sans" charset="0"/>
                       </a:endParaRPr>
                     </a:p>
                   </a:txBody>
                   <a:tcPr marL="101600" marR="101600" marT="63500" marB="63500" anchor="ctr">
                     <a:lnL w="9525" cap="flat" cmpd="sng" algn="ctr">
                       <a:solidFill>
-                        <a:srgbClr val="C9DAD8"/>
+                        <a:srgbClr val="D9D9D9"/>
                       </a:solidFill>
                       <a:prstDash val="solid"/>
                       <a:round/>
@@ -7741,7 +7839,7 @@
                     </a:lnL>
                     <a:lnR w="9525" cap="flat" cmpd="sng" algn="ctr">
                       <a:solidFill>
-                        <a:srgbClr val="C9DAD8"/>
+                        <a:srgbClr val="D9D9D9"/>
                       </a:solidFill>
                       <a:prstDash val="solid"/>
                       <a:round/>
@@ -7750,7 +7848,7 @@
                     </a:lnR>
                     <a:lnT w="9525" cap="flat" cmpd="sng" algn="ctr">
                       <a:solidFill>
-                        <a:srgbClr val="C9DAD8"/>
+                        <a:srgbClr val="D9D9D9"/>
                       </a:solidFill>
                       <a:prstDash val="solid"/>
                       <a:round/>
@@ -7759,7 +7857,7 @@
                     </a:lnT>
                     <a:lnB w="9525" cap="flat" cmpd="sng" algn="ctr">
                       <a:solidFill>
-                        <a:srgbClr val="C9DAD8"/>
+                        <a:srgbClr val="D9D9D9"/>
                       </a:solidFill>
                       <a:prstDash val="solid"/>
                       <a:round/>
@@ -7767,7 +7865,7 @@
                       <a:tailEnd type="none" w="med" len="med"/>
                     </a:lnB>
                     <a:solidFill>
-                      <a:srgbClr val="0B6E69"/>
+                      <a:srgbClr val="7A003F"/>
                     </a:solidFill>
                   </a:tcPr>
                 </a:tc>
@@ -7784,25 +7882,25 @@
                       <a:r>
                         <a:rPr lang="en-US" sz="1600" dirty="0">
                           <a:solidFill>
-                            <a:srgbClr val="1F2A30"/>
+                            <a:srgbClr val="1D1D1B"/>
                           </a:solidFill>
-                          <a:latin typeface="Calibri" pitchFamily="34" charset="0"/>
-                          <a:ea typeface="Calibri" pitchFamily="34" charset="-122"/>
-                          <a:cs typeface="Calibri" pitchFamily="34" charset="-120"/>
+                          <a:latin typeface="Lucida Sans" pitchFamily="34" charset="0"/>
+                          <a:ea typeface="Lucida Sans" pitchFamily="34" charset="-122"/>
+                          <a:cs typeface="Lucida Sans" pitchFamily="34" charset="-120"/>
                         </a:rPr>
                         <a:t>Montag</a:t>
                       </a:r>
                       <a:endParaRPr lang="en-US" sz="1600" dirty="0">
-                        <a:latin typeface="Calibri" charset="0"/>
-                        <a:ea typeface="Calibri" charset="0"/>
-                        <a:cs typeface="Calibri" charset="0"/>
+                        <a:latin typeface="Lucida Sans" charset="0"/>
+                        <a:ea typeface="Lucida Sans" charset="0"/>
+                        <a:cs typeface="Lucida Sans" charset="0"/>
                       </a:endParaRPr>
                     </a:p>
                   </a:txBody>
                   <a:tcPr marL="101600" marR="101600" marT="63500" marB="63500" anchor="ctr">
                     <a:lnL w="9525" cap="flat" cmpd="sng" algn="ctr">
                       <a:solidFill>
-                        <a:srgbClr val="C9DAD8"/>
+                        <a:srgbClr val="D9D9D9"/>
                       </a:solidFill>
                       <a:prstDash val="solid"/>
                       <a:round/>
@@ -7811,7 +7909,7 @@
                     </a:lnL>
                     <a:lnR w="9525" cap="flat" cmpd="sng" algn="ctr">
                       <a:solidFill>
-                        <a:srgbClr val="C9DAD8"/>
+                        <a:srgbClr val="D9D9D9"/>
                       </a:solidFill>
                       <a:prstDash val="solid"/>
                       <a:round/>
@@ -7820,7 +7918,7 @@
                     </a:lnR>
                     <a:lnT w="9525" cap="flat" cmpd="sng" algn="ctr">
                       <a:solidFill>
-                        <a:srgbClr val="C9DAD8"/>
+                        <a:srgbClr val="D9D9D9"/>
                       </a:solidFill>
                       <a:prstDash val="solid"/>
                       <a:round/>
@@ -7829,7 +7927,7 @@
                     </a:lnT>
                     <a:lnB w="9525" cap="flat" cmpd="sng" algn="ctr">
                       <a:solidFill>
-                        <a:srgbClr val="C9DAD8"/>
+                        <a:srgbClr val="D9D9D9"/>
                       </a:solidFill>
                       <a:prstDash val="solid"/>
                       <a:round/>
@@ -7852,25 +7950,25 @@
                       <a:r>
                         <a:rPr lang="en-US" sz="1600" dirty="0">
                           <a:solidFill>
-                            <a:srgbClr val="1F2A30"/>
+                            <a:srgbClr val="1D1D1B"/>
                           </a:solidFill>
-                          <a:latin typeface="Calibri" pitchFamily="34" charset="0"/>
-                          <a:ea typeface="Calibri" pitchFamily="34" charset="-122"/>
-                          <a:cs typeface="Calibri" pitchFamily="34" charset="-120"/>
+                          <a:latin typeface="Lucida Sans" pitchFamily="34" charset="0"/>
+                          <a:ea typeface="Lucida Sans" pitchFamily="34" charset="-122"/>
+                          <a:cs typeface="Lucida Sans" pitchFamily="34" charset="-120"/>
                         </a:rPr>
                         <a:t>Technik</a:t>
                       </a:r>
                       <a:endParaRPr lang="en-US" sz="1600" dirty="0">
-                        <a:latin typeface="Calibri" charset="0"/>
-                        <a:ea typeface="Calibri" charset="0"/>
-                        <a:cs typeface="Calibri" charset="0"/>
+                        <a:latin typeface="Lucida Sans" charset="0"/>
+                        <a:ea typeface="Lucida Sans" charset="0"/>
+                        <a:cs typeface="Lucida Sans" charset="0"/>
                       </a:endParaRPr>
                     </a:p>
                   </a:txBody>
                   <a:tcPr marL="101600" marR="101600" marT="63500" marB="63500" anchor="ctr">
                     <a:lnL w="9525" cap="flat" cmpd="sng" algn="ctr">
                       <a:solidFill>
-                        <a:srgbClr val="C9DAD8"/>
+                        <a:srgbClr val="D9D9D9"/>
                       </a:solidFill>
                       <a:prstDash val="solid"/>
                       <a:round/>
@@ -7879,7 +7977,7 @@
                     </a:lnL>
                     <a:lnR w="9525" cap="flat" cmpd="sng" algn="ctr">
                       <a:solidFill>
-                        <a:srgbClr val="C9DAD8"/>
+                        <a:srgbClr val="D9D9D9"/>
                       </a:solidFill>
                       <a:prstDash val="solid"/>
                       <a:round/>
@@ -7888,7 +7986,7 @@
                     </a:lnR>
                     <a:lnT w="9525" cap="flat" cmpd="sng" algn="ctr">
                       <a:solidFill>
-                        <a:srgbClr val="C9DAD8"/>
+                        <a:srgbClr val="D9D9D9"/>
                       </a:solidFill>
                       <a:prstDash val="solid"/>
                       <a:round/>
@@ -7897,7 +7995,7 @@
                     </a:lnT>
                     <a:lnB w="9525" cap="flat" cmpd="sng" algn="ctr">
                       <a:solidFill>
-                        <a:srgbClr val="C9DAD8"/>
+                        <a:srgbClr val="D9D9D9"/>
                       </a:solidFill>
                       <a:prstDash val="solid"/>
                       <a:round/>
@@ -7920,25 +8018,25 @@
                       <a:r>
                         <a:rPr lang="en-US" sz="1600" dirty="0">
                           <a:solidFill>
-                            <a:srgbClr val="1F2A30"/>
+                            <a:srgbClr val="1D1D1B"/>
                           </a:solidFill>
-                          <a:latin typeface="Calibri" pitchFamily="34" charset="0"/>
-                          <a:ea typeface="Calibri" pitchFamily="34" charset="-122"/>
-                          <a:cs typeface="Calibri" pitchFamily="34" charset="-120"/>
+                          <a:latin typeface="Lucida Sans" pitchFamily="34" charset="0"/>
+                          <a:ea typeface="Lucida Sans" pitchFamily="34" charset="-122"/>
+                          <a:cs typeface="Lucida Sans" pitchFamily="34" charset="-120"/>
                         </a:rPr>
                         <a:t>mBot2 geprüft; Fehler systematisch gefunden, behoben, Kontrolltest</a:t>
                       </a:r>
                       <a:endParaRPr lang="en-US" sz="1600" dirty="0">
-                        <a:latin typeface="Calibri" charset="0"/>
-                        <a:ea typeface="Calibri" charset="0"/>
-                        <a:cs typeface="Calibri" charset="0"/>
+                        <a:latin typeface="Lucida Sans" charset="0"/>
+                        <a:ea typeface="Lucida Sans" charset="0"/>
+                        <a:cs typeface="Lucida Sans" charset="0"/>
                       </a:endParaRPr>
                     </a:p>
                   </a:txBody>
                   <a:tcPr marL="101600" marR="101600" marT="63500" marB="63500" anchor="ctr">
                     <a:lnL w="9525" cap="flat" cmpd="sng" algn="ctr">
                       <a:solidFill>
-                        <a:srgbClr val="C9DAD8"/>
+                        <a:srgbClr val="D9D9D9"/>
                       </a:solidFill>
                       <a:prstDash val="solid"/>
                       <a:round/>
@@ -7947,7 +8045,7 @@
                     </a:lnL>
                     <a:lnR w="9525" cap="flat" cmpd="sng" algn="ctr">
                       <a:solidFill>
-                        <a:srgbClr val="C9DAD8"/>
+                        <a:srgbClr val="D9D9D9"/>
                       </a:solidFill>
                       <a:prstDash val="solid"/>
                       <a:round/>
@@ -7956,7 +8054,7 @@
                     </a:lnR>
                     <a:lnT w="9525" cap="flat" cmpd="sng" algn="ctr">
                       <a:solidFill>
-                        <a:srgbClr val="C9DAD8"/>
+                        <a:srgbClr val="D9D9D9"/>
                       </a:solidFill>
                       <a:prstDash val="solid"/>
                       <a:round/>
@@ -7965,7 +8063,7 @@
                     </a:lnT>
                     <a:lnB w="9525" cap="flat" cmpd="sng" algn="ctr">
                       <a:solidFill>
-                        <a:srgbClr val="C9DAD8"/>
+                        <a:srgbClr val="D9D9D9"/>
                       </a:solidFill>
                       <a:prstDash val="solid"/>
                       <a:round/>
@@ -7988,25 +8086,25 @@
                       <a:r>
                         <a:rPr lang="en-US" sz="1600" dirty="0">
                           <a:solidFill>
-                            <a:srgbClr val="1F2A30"/>
+                            <a:srgbClr val="1D1D1B"/>
                           </a:solidFill>
-                          <a:latin typeface="Calibri" pitchFamily="34" charset="0"/>
-                          <a:ea typeface="Calibri" pitchFamily="34" charset="-122"/>
-                          <a:cs typeface="Calibri" pitchFamily="34" charset="-120"/>
+                          <a:latin typeface="Lucida Sans" pitchFamily="34" charset="0"/>
+                          <a:ea typeface="Lucida Sans" pitchFamily="34" charset="-122"/>
+                          <a:cs typeface="Lucida Sans" pitchFamily="34" charset="-120"/>
                         </a:rPr>
                         <a:t>3–5 Std.</a:t>
                       </a:r>
                       <a:endParaRPr lang="en-US" sz="1600" dirty="0">
-                        <a:latin typeface="Calibri" charset="0"/>
-                        <a:ea typeface="Calibri" charset="0"/>
-                        <a:cs typeface="Calibri" charset="0"/>
+                        <a:latin typeface="Lucida Sans" charset="0"/>
+                        <a:ea typeface="Lucida Sans" charset="0"/>
+                        <a:cs typeface="Lucida Sans" charset="0"/>
                       </a:endParaRPr>
                     </a:p>
                   </a:txBody>
                   <a:tcPr marL="101600" marR="101600" marT="63500" marB="63500" anchor="ctr">
                     <a:lnL w="9525" cap="flat" cmpd="sng" algn="ctr">
                       <a:solidFill>
-                        <a:srgbClr val="C9DAD8"/>
+                        <a:srgbClr val="D9D9D9"/>
                       </a:solidFill>
                       <a:prstDash val="solid"/>
                       <a:round/>
@@ -8015,7 +8113,7 @@
                     </a:lnL>
                     <a:lnR w="9525" cap="flat" cmpd="sng" algn="ctr">
                       <a:solidFill>
-                        <a:srgbClr val="C9DAD8"/>
+                        <a:srgbClr val="D9D9D9"/>
                       </a:solidFill>
                       <a:prstDash val="solid"/>
                       <a:round/>
@@ -8024,7 +8122,7 @@
                     </a:lnR>
                     <a:lnT w="9525" cap="flat" cmpd="sng" algn="ctr">
                       <a:solidFill>
-                        <a:srgbClr val="C9DAD8"/>
+                        <a:srgbClr val="D9D9D9"/>
                       </a:solidFill>
                       <a:prstDash val="solid"/>
                       <a:round/>
@@ -8033,7 +8131,7 @@
                     </a:lnT>
                     <a:lnB w="9525" cap="flat" cmpd="sng" algn="ctr">
                       <a:solidFill>
-                        <a:srgbClr val="C9DAD8"/>
+                        <a:srgbClr val="D9D9D9"/>
                       </a:solidFill>
                       <a:prstDash val="solid"/>
                       <a:round/>
@@ -8058,25 +8156,25 @@
                       <a:r>
                         <a:rPr lang="en-US" sz="1600" dirty="0">
                           <a:solidFill>
-                            <a:srgbClr val="1F2A30"/>
+                            <a:srgbClr val="1D1D1B"/>
                           </a:solidFill>
-                          <a:latin typeface="Calibri" pitchFamily="34" charset="0"/>
-                          <a:ea typeface="Calibri" pitchFamily="34" charset="-122"/>
-                          <a:cs typeface="Calibri" pitchFamily="34" charset="-120"/>
+                          <a:latin typeface="Lucida Sans" pitchFamily="34" charset="0"/>
+                          <a:ea typeface="Lucida Sans" pitchFamily="34" charset="-122"/>
+                          <a:cs typeface="Lucida Sans" pitchFamily="34" charset="-120"/>
                         </a:rPr>
                         <a:t>Dienstag</a:t>
                       </a:r>
                       <a:endParaRPr lang="en-US" sz="1600" dirty="0">
-                        <a:latin typeface="Calibri" charset="0"/>
-                        <a:ea typeface="Calibri" charset="0"/>
-                        <a:cs typeface="Calibri" charset="0"/>
+                        <a:latin typeface="Lucida Sans" charset="0"/>
+                        <a:ea typeface="Lucida Sans" charset="0"/>
+                        <a:cs typeface="Lucida Sans" charset="0"/>
                       </a:endParaRPr>
                     </a:p>
                   </a:txBody>
                   <a:tcPr marL="101600" marR="101600" marT="63500" marB="63500" anchor="ctr">
                     <a:lnL w="9525" cap="flat" cmpd="sng" algn="ctr">
                       <a:solidFill>
-                        <a:srgbClr val="C9DAD8"/>
+                        <a:srgbClr val="D9D9D9"/>
                       </a:solidFill>
                       <a:prstDash val="solid"/>
                       <a:round/>
@@ -8085,7 +8183,7 @@
                     </a:lnL>
                     <a:lnR w="9525" cap="flat" cmpd="sng" algn="ctr">
                       <a:solidFill>
-                        <a:srgbClr val="C9DAD8"/>
+                        <a:srgbClr val="D9D9D9"/>
                       </a:solidFill>
                       <a:prstDash val="solid"/>
                       <a:round/>
@@ -8094,7 +8192,7 @@
                     </a:lnR>
                     <a:lnT w="9525" cap="flat" cmpd="sng" algn="ctr">
                       <a:solidFill>
-                        <a:srgbClr val="C9DAD8"/>
+                        <a:srgbClr val="D9D9D9"/>
                       </a:solidFill>
                       <a:prstDash val="solid"/>
                       <a:round/>
@@ -8103,7 +8201,7 @@
                     </a:lnT>
                     <a:lnB w="9525" cap="flat" cmpd="sng" algn="ctr">
                       <a:solidFill>
-                        <a:srgbClr val="C9DAD8"/>
+                        <a:srgbClr val="D9D9D9"/>
                       </a:solidFill>
                       <a:prstDash val="solid"/>
                       <a:round/>
@@ -8111,7 +8209,7 @@
                       <a:tailEnd type="none" w="med" len="med"/>
                     </a:lnB>
                     <a:solidFill>
-                      <a:srgbClr val="F4F9F8"/>
+                      <a:srgbClr val="F7F7F7"/>
                     </a:solidFill>
                   </a:tcPr>
                 </a:tc>
@@ -8126,25 +8224,25 @@
                       <a:r>
                         <a:rPr lang="en-US" sz="1600" dirty="0">
                           <a:solidFill>
-                            <a:srgbClr val="1F2A30"/>
+                            <a:srgbClr val="1D1D1B"/>
                           </a:solidFill>
-                          <a:latin typeface="Calibri" pitchFamily="34" charset="0"/>
-                          <a:ea typeface="Calibri" pitchFamily="34" charset="-122"/>
-                          <a:cs typeface="Calibri" pitchFamily="34" charset="-120"/>
+                          <a:latin typeface="Lucida Sans" pitchFamily="34" charset="0"/>
+                          <a:ea typeface="Lucida Sans" pitchFamily="34" charset="-122"/>
+                          <a:cs typeface="Lucida Sans" pitchFamily="34" charset="-120"/>
                         </a:rPr>
                         <a:t>Mathematik</a:t>
                       </a:r>
                       <a:endParaRPr lang="en-US" sz="1600" dirty="0">
-                        <a:latin typeface="Calibri" charset="0"/>
-                        <a:ea typeface="Calibri" charset="0"/>
-                        <a:cs typeface="Calibri" charset="0"/>
+                        <a:latin typeface="Lucida Sans" charset="0"/>
+                        <a:ea typeface="Lucida Sans" charset="0"/>
+                        <a:cs typeface="Lucida Sans" charset="0"/>
                       </a:endParaRPr>
                     </a:p>
                   </a:txBody>
                   <a:tcPr marL="101600" marR="101600" marT="63500" marB="63500" anchor="ctr">
                     <a:lnL w="9525" cap="flat" cmpd="sng" algn="ctr">
                       <a:solidFill>
-                        <a:srgbClr val="C9DAD8"/>
+                        <a:srgbClr val="D9D9D9"/>
                       </a:solidFill>
                       <a:prstDash val="solid"/>
                       <a:round/>
@@ -8153,7 +8251,7 @@
                     </a:lnL>
                     <a:lnR w="9525" cap="flat" cmpd="sng" algn="ctr">
                       <a:solidFill>
-                        <a:srgbClr val="C9DAD8"/>
+                        <a:srgbClr val="D9D9D9"/>
                       </a:solidFill>
                       <a:prstDash val="solid"/>
                       <a:round/>
@@ -8162,7 +8260,7 @@
                     </a:lnR>
                     <a:lnT w="9525" cap="flat" cmpd="sng" algn="ctr">
                       <a:solidFill>
-                        <a:srgbClr val="C9DAD8"/>
+                        <a:srgbClr val="D9D9D9"/>
                       </a:solidFill>
                       <a:prstDash val="solid"/>
                       <a:round/>
@@ -8171,7 +8269,7 @@
                     </a:lnT>
                     <a:lnB w="9525" cap="flat" cmpd="sng" algn="ctr">
                       <a:solidFill>
-                        <a:srgbClr val="C9DAD8"/>
+                        <a:srgbClr val="D9D9D9"/>
                       </a:solidFill>
                       <a:prstDash val="solid"/>
                       <a:round/>
@@ -8179,7 +8277,7 @@
                       <a:tailEnd type="none" w="med" len="med"/>
                     </a:lnB>
                     <a:solidFill>
-                      <a:srgbClr val="F4F9F8"/>
+                      <a:srgbClr val="F7F7F7"/>
                     </a:solidFill>
                   </a:tcPr>
                 </a:tc>
@@ -8194,25 +8292,25 @@
                       <a:r>
                         <a:rPr lang="en-US" sz="1600" dirty="0">
                           <a:solidFill>
-                            <a:srgbClr val="1F2A30"/>
+                            <a:srgbClr val="1D1D1B"/>
                           </a:solidFill>
-                          <a:latin typeface="Calibri" pitchFamily="34" charset="0"/>
-                          <a:ea typeface="Calibri" pitchFamily="34" charset="-122"/>
-                          <a:cs typeface="Calibri" pitchFamily="34" charset="-120"/>
+                          <a:latin typeface="Lucida Sans" pitchFamily="34" charset="0"/>
+                          <a:ea typeface="Lucida Sans" pitchFamily="34" charset="-122"/>
+                          <a:cs typeface="Lucida Sans" pitchFamily="34" charset="-120"/>
                         </a:rPr>
                         <a:t>Fahrwege berechnet, verglichen, begründet, mit dem mBot2 überprüft</a:t>
                       </a:r>
                       <a:endParaRPr lang="en-US" sz="1600" dirty="0">
-                        <a:latin typeface="Calibri" charset="0"/>
-                        <a:ea typeface="Calibri" charset="0"/>
-                        <a:cs typeface="Calibri" charset="0"/>
+                        <a:latin typeface="Lucida Sans" charset="0"/>
+                        <a:ea typeface="Lucida Sans" charset="0"/>
+                        <a:cs typeface="Lucida Sans" charset="0"/>
                       </a:endParaRPr>
                     </a:p>
                   </a:txBody>
                   <a:tcPr marL="101600" marR="101600" marT="63500" marB="63500" anchor="ctr">
                     <a:lnL w="9525" cap="flat" cmpd="sng" algn="ctr">
                       <a:solidFill>
-                        <a:srgbClr val="C9DAD8"/>
+                        <a:srgbClr val="D9D9D9"/>
                       </a:solidFill>
                       <a:prstDash val="solid"/>
                       <a:round/>
@@ -8221,7 +8319,7 @@
                     </a:lnL>
                     <a:lnR w="9525" cap="flat" cmpd="sng" algn="ctr">
                       <a:solidFill>
-                        <a:srgbClr val="C9DAD8"/>
+                        <a:srgbClr val="D9D9D9"/>
                       </a:solidFill>
                       <a:prstDash val="solid"/>
                       <a:round/>
@@ -8230,7 +8328,7 @@
                     </a:lnR>
                     <a:lnT w="9525" cap="flat" cmpd="sng" algn="ctr">
                       <a:solidFill>
-                        <a:srgbClr val="C9DAD8"/>
+                        <a:srgbClr val="D9D9D9"/>
                       </a:solidFill>
                       <a:prstDash val="solid"/>
                       <a:round/>
@@ -8239,7 +8337,7 @@
                     </a:lnT>
                     <a:lnB w="9525" cap="flat" cmpd="sng" algn="ctr">
                       <a:solidFill>
-                        <a:srgbClr val="C9DAD8"/>
+                        <a:srgbClr val="D9D9D9"/>
                       </a:solidFill>
                       <a:prstDash val="solid"/>
                       <a:round/>
@@ -8247,7 +8345,7 @@
                       <a:tailEnd type="none" w="med" len="med"/>
                     </a:lnB>
                     <a:solidFill>
-                      <a:srgbClr val="F4F9F8"/>
+                      <a:srgbClr val="F7F7F7"/>
                     </a:solidFill>
                   </a:tcPr>
                 </a:tc>
@@ -8262,25 +8360,25 @@
                       <a:r>
                         <a:rPr lang="en-US" sz="1600" dirty="0">
                           <a:solidFill>
-                            <a:srgbClr val="1F2A30"/>
+                            <a:srgbClr val="1D1D1B"/>
                           </a:solidFill>
-                          <a:latin typeface="Calibri" pitchFamily="34" charset="0"/>
-                          <a:ea typeface="Calibri" pitchFamily="34" charset="-122"/>
-                          <a:cs typeface="Calibri" pitchFamily="34" charset="-120"/>
+                          <a:latin typeface="Lucida Sans" pitchFamily="34" charset="0"/>
+                          <a:ea typeface="Lucida Sans" pitchFamily="34" charset="-122"/>
+                          <a:cs typeface="Lucida Sans" pitchFamily="34" charset="-120"/>
                         </a:rPr>
                         <a:t>4–6 Std.</a:t>
                       </a:r>
                       <a:endParaRPr lang="en-US" sz="1600" dirty="0">
-                        <a:latin typeface="Calibri" charset="0"/>
-                        <a:ea typeface="Calibri" charset="0"/>
-                        <a:cs typeface="Calibri" charset="0"/>
+                        <a:latin typeface="Lucida Sans" charset="0"/>
+                        <a:ea typeface="Lucida Sans" charset="0"/>
+                        <a:cs typeface="Lucida Sans" charset="0"/>
                       </a:endParaRPr>
                     </a:p>
                   </a:txBody>
                   <a:tcPr marL="101600" marR="101600" marT="63500" marB="63500" anchor="ctr">
                     <a:lnL w="9525" cap="flat" cmpd="sng" algn="ctr">
                       <a:solidFill>
-                        <a:srgbClr val="C9DAD8"/>
+                        <a:srgbClr val="D9D9D9"/>
                       </a:solidFill>
                       <a:prstDash val="solid"/>
                       <a:round/>
@@ -8289,7 +8387,7 @@
                     </a:lnL>
                     <a:lnR w="9525" cap="flat" cmpd="sng" algn="ctr">
                       <a:solidFill>
-                        <a:srgbClr val="C9DAD8"/>
+                        <a:srgbClr val="D9D9D9"/>
                       </a:solidFill>
                       <a:prstDash val="solid"/>
                       <a:round/>
@@ -8298,7 +8396,7 @@
                     </a:lnR>
                     <a:lnT w="9525" cap="flat" cmpd="sng" algn="ctr">
                       <a:solidFill>
-                        <a:srgbClr val="C9DAD8"/>
+                        <a:srgbClr val="D9D9D9"/>
                       </a:solidFill>
                       <a:prstDash val="solid"/>
                       <a:round/>
@@ -8307,7 +8405,7 @@
                     </a:lnT>
                     <a:lnB w="9525" cap="flat" cmpd="sng" algn="ctr">
                       <a:solidFill>
-                        <a:srgbClr val="C9DAD8"/>
+                        <a:srgbClr val="D9D9D9"/>
                       </a:solidFill>
                       <a:prstDash val="solid"/>
                       <a:round/>
@@ -8315,7 +8413,7 @@
                       <a:tailEnd type="none" w="med" len="med"/>
                     </a:lnB>
                     <a:solidFill>
-                      <a:srgbClr val="F4F9F8"/>
+                      <a:srgbClr val="F7F7F7"/>
                     </a:solidFill>
                   </a:tcPr>
                 </a:tc>
@@ -8332,25 +8430,25 @@
                       <a:r>
                         <a:rPr lang="en-US" sz="1600" dirty="0">
                           <a:solidFill>
-                            <a:srgbClr val="1F2A30"/>
+                            <a:srgbClr val="1D1D1B"/>
                           </a:solidFill>
-                          <a:latin typeface="Calibri" pitchFamily="34" charset="0"/>
-                          <a:ea typeface="Calibri" pitchFamily="34" charset="-122"/>
-                          <a:cs typeface="Calibri" pitchFamily="34" charset="-120"/>
+                          <a:latin typeface="Lucida Sans" pitchFamily="34" charset="0"/>
+                          <a:ea typeface="Lucida Sans" pitchFamily="34" charset="-122"/>
+                          <a:cs typeface="Lucida Sans" pitchFamily="34" charset="-120"/>
                         </a:rPr>
                         <a:t>Mittwoch</a:t>
                       </a:r>
                       <a:endParaRPr lang="en-US" sz="1600" dirty="0">
-                        <a:latin typeface="Calibri" charset="0"/>
-                        <a:ea typeface="Calibri" charset="0"/>
-                        <a:cs typeface="Calibri" charset="0"/>
+                        <a:latin typeface="Lucida Sans" charset="0"/>
+                        <a:ea typeface="Lucida Sans" charset="0"/>
+                        <a:cs typeface="Lucida Sans" charset="0"/>
                       </a:endParaRPr>
                     </a:p>
                   </a:txBody>
                   <a:tcPr marL="101600" marR="101600" marT="63500" marB="63500" anchor="ctr">
                     <a:lnL w="9525" cap="flat" cmpd="sng" algn="ctr">
                       <a:solidFill>
-                        <a:srgbClr val="C9DAD8"/>
+                        <a:srgbClr val="D9D9D9"/>
                       </a:solidFill>
                       <a:prstDash val="solid"/>
                       <a:round/>
@@ -8359,7 +8457,7 @@
                     </a:lnL>
                     <a:lnR w="9525" cap="flat" cmpd="sng" algn="ctr">
                       <a:solidFill>
-                        <a:srgbClr val="C9DAD8"/>
+                        <a:srgbClr val="D9D9D9"/>
                       </a:solidFill>
                       <a:prstDash val="solid"/>
                       <a:round/>
@@ -8368,7 +8466,7 @@
                     </a:lnR>
                     <a:lnT w="9525" cap="flat" cmpd="sng" algn="ctr">
                       <a:solidFill>
-                        <a:srgbClr val="C9DAD8"/>
+                        <a:srgbClr val="D9D9D9"/>
                       </a:solidFill>
                       <a:prstDash val="solid"/>
                       <a:round/>
@@ -8377,7 +8475,7 @@
                     </a:lnT>
                     <a:lnB w="9525" cap="flat" cmpd="sng" algn="ctr">
                       <a:solidFill>
-                        <a:srgbClr val="C9DAD8"/>
+                        <a:srgbClr val="D9D9D9"/>
                       </a:solidFill>
                       <a:prstDash val="solid"/>
                       <a:round/>
@@ -8400,25 +8498,25 @@
                       <a:r>
                         <a:rPr lang="en-US" sz="1600" dirty="0">
                           <a:solidFill>
-                            <a:srgbClr val="1F2A30"/>
+                            <a:srgbClr val="1D1D1B"/>
                           </a:solidFill>
-                          <a:latin typeface="Calibri" pitchFamily="34" charset="0"/>
-                          <a:ea typeface="Calibri" pitchFamily="34" charset="-122"/>
-                          <a:cs typeface="Calibri" pitchFamily="34" charset="-120"/>
+                          <a:latin typeface="Lucida Sans" pitchFamily="34" charset="0"/>
+                          <a:ea typeface="Lucida Sans" pitchFamily="34" charset="-122"/>
+                          <a:cs typeface="Lucida Sans" pitchFamily="34" charset="-120"/>
                         </a:rPr>
                         <a:t>Physik</a:t>
                       </a:r>
                       <a:endParaRPr lang="en-US" sz="1600" dirty="0">
-                        <a:latin typeface="Calibri" charset="0"/>
-                        <a:ea typeface="Calibri" charset="0"/>
-                        <a:cs typeface="Calibri" charset="0"/>
+                        <a:latin typeface="Lucida Sans" charset="0"/>
+                        <a:ea typeface="Lucida Sans" charset="0"/>
+                        <a:cs typeface="Lucida Sans" charset="0"/>
                       </a:endParaRPr>
                     </a:p>
                   </a:txBody>
                   <a:tcPr marL="101600" marR="101600" marT="63500" marB="63500" anchor="ctr">
                     <a:lnL w="9525" cap="flat" cmpd="sng" algn="ctr">
                       <a:solidFill>
-                        <a:srgbClr val="C9DAD8"/>
+                        <a:srgbClr val="D9D9D9"/>
                       </a:solidFill>
                       <a:prstDash val="solid"/>
                       <a:round/>
@@ -8427,7 +8525,7 @@
                     </a:lnL>
                     <a:lnR w="9525" cap="flat" cmpd="sng" algn="ctr">
                       <a:solidFill>
-                        <a:srgbClr val="C9DAD8"/>
+                        <a:srgbClr val="D9D9D9"/>
                       </a:solidFill>
                       <a:prstDash val="solid"/>
                       <a:round/>
@@ -8436,7 +8534,7 @@
                     </a:lnR>
                     <a:lnT w="9525" cap="flat" cmpd="sng" algn="ctr">
                       <a:solidFill>
-                        <a:srgbClr val="C9DAD8"/>
+                        <a:srgbClr val="D9D9D9"/>
                       </a:solidFill>
                       <a:prstDash val="solid"/>
                       <a:round/>
@@ -8445,7 +8543,7 @@
                     </a:lnT>
                     <a:lnB w="9525" cap="flat" cmpd="sng" algn="ctr">
                       <a:solidFill>
-                        <a:srgbClr val="C9DAD8"/>
+                        <a:srgbClr val="D9D9D9"/>
                       </a:solidFill>
                       <a:prstDash val="solid"/>
                       <a:round/>
@@ -8468,25 +8566,25 @@
                       <a:r>
                         <a:rPr lang="en-US" sz="1600" dirty="0">
                           <a:solidFill>
-                            <a:srgbClr val="1F2A30"/>
+                            <a:srgbClr val="1D1D1B"/>
                           </a:solidFill>
-                          <a:latin typeface="Calibri" pitchFamily="34" charset="0"/>
-                          <a:ea typeface="Calibri" pitchFamily="34" charset="-122"/>
-                          <a:cs typeface="Calibri" pitchFamily="34" charset="-120"/>
+                          <a:latin typeface="Lucida Sans" pitchFamily="34" charset="0"/>
+                          <a:ea typeface="Lucida Sans" pitchFamily="34" charset="-122"/>
+                          <a:cs typeface="Lucida Sans" pitchFamily="34" charset="-120"/>
                         </a:rPr>
                         <a:t>zwei Messungen mit Hypothese durchgeführt und ausgewertet</a:t>
                       </a:r>
                       <a:endParaRPr lang="en-US" sz="1600" dirty="0">
-                        <a:latin typeface="Calibri" charset="0"/>
-                        <a:ea typeface="Calibri" charset="0"/>
-                        <a:cs typeface="Calibri" charset="0"/>
+                        <a:latin typeface="Lucida Sans" charset="0"/>
+                        <a:ea typeface="Lucida Sans" charset="0"/>
+                        <a:cs typeface="Lucida Sans" charset="0"/>
                       </a:endParaRPr>
                     </a:p>
                   </a:txBody>
                   <a:tcPr marL="101600" marR="101600" marT="63500" marB="63500" anchor="ctr">
                     <a:lnL w="9525" cap="flat" cmpd="sng" algn="ctr">
                       <a:solidFill>
-                        <a:srgbClr val="C9DAD8"/>
+                        <a:srgbClr val="D9D9D9"/>
                       </a:solidFill>
                       <a:prstDash val="solid"/>
                       <a:round/>
@@ -8495,7 +8593,7 @@
                     </a:lnL>
                     <a:lnR w="9525" cap="flat" cmpd="sng" algn="ctr">
                       <a:solidFill>
-                        <a:srgbClr val="C9DAD8"/>
+                        <a:srgbClr val="D9D9D9"/>
                       </a:solidFill>
                       <a:prstDash val="solid"/>
                       <a:round/>
@@ -8504,7 +8602,7 @@
                     </a:lnR>
                     <a:lnT w="9525" cap="flat" cmpd="sng" algn="ctr">
                       <a:solidFill>
-                        <a:srgbClr val="C9DAD8"/>
+                        <a:srgbClr val="D9D9D9"/>
                       </a:solidFill>
                       <a:prstDash val="solid"/>
                       <a:round/>
@@ -8513,7 +8611,7 @@
                     </a:lnT>
                     <a:lnB w="9525" cap="flat" cmpd="sng" algn="ctr">
                       <a:solidFill>
-                        <a:srgbClr val="C9DAD8"/>
+                        <a:srgbClr val="D9D9D9"/>
                       </a:solidFill>
                       <a:prstDash val="solid"/>
                       <a:round/>
@@ -8536,25 +8634,25 @@
                       <a:r>
                         <a:rPr lang="en-US" sz="1600" dirty="0">
                           <a:solidFill>
-                            <a:srgbClr val="1F2A30"/>
+                            <a:srgbClr val="1D1D1B"/>
                           </a:solidFill>
-                          <a:latin typeface="Calibri" pitchFamily="34" charset="0"/>
-                          <a:ea typeface="Calibri" pitchFamily="34" charset="-122"/>
-                          <a:cs typeface="Calibri" pitchFamily="34" charset="-120"/>
+                          <a:latin typeface="Lucida Sans" pitchFamily="34" charset="0"/>
+                          <a:ea typeface="Lucida Sans" pitchFamily="34" charset="-122"/>
+                          <a:cs typeface="Lucida Sans" pitchFamily="34" charset="-120"/>
                         </a:rPr>
                         <a:t>4–6 Std.</a:t>
                       </a:r>
                       <a:endParaRPr lang="en-US" sz="1600" dirty="0">
-                        <a:latin typeface="Calibri" charset="0"/>
-                        <a:ea typeface="Calibri" charset="0"/>
-                        <a:cs typeface="Calibri" charset="0"/>
+                        <a:latin typeface="Lucida Sans" charset="0"/>
+                        <a:ea typeface="Lucida Sans" charset="0"/>
+                        <a:cs typeface="Lucida Sans" charset="0"/>
                       </a:endParaRPr>
                     </a:p>
                   </a:txBody>
                   <a:tcPr marL="101600" marR="101600" marT="63500" marB="63500" anchor="ctr">
                     <a:lnL w="9525" cap="flat" cmpd="sng" algn="ctr">
                       <a:solidFill>
-                        <a:srgbClr val="C9DAD8"/>
+                        <a:srgbClr val="D9D9D9"/>
                       </a:solidFill>
                       <a:prstDash val="solid"/>
                       <a:round/>
@@ -8563,7 +8661,7 @@
                     </a:lnL>
                     <a:lnR w="9525" cap="flat" cmpd="sng" algn="ctr">
                       <a:solidFill>
-                        <a:srgbClr val="C9DAD8"/>
+                        <a:srgbClr val="D9D9D9"/>
                       </a:solidFill>
                       <a:prstDash val="solid"/>
                       <a:round/>
@@ -8572,7 +8670,7 @@
                     </a:lnR>
                     <a:lnT w="9525" cap="flat" cmpd="sng" algn="ctr">
                       <a:solidFill>
-                        <a:srgbClr val="C9DAD8"/>
+                        <a:srgbClr val="D9D9D9"/>
                       </a:solidFill>
                       <a:prstDash val="solid"/>
                       <a:round/>
@@ -8581,7 +8679,7 @@
                     </a:lnT>
                     <a:lnB w="9525" cap="flat" cmpd="sng" algn="ctr">
                       <a:solidFill>
-                        <a:srgbClr val="C9DAD8"/>
+                        <a:srgbClr val="D9D9D9"/>
                       </a:solidFill>
                       <a:prstDash val="solid"/>
                       <a:round/>
@@ -8606,25 +8704,25 @@
                       <a:r>
                         <a:rPr lang="en-US" sz="1600" dirty="0">
                           <a:solidFill>
-                            <a:srgbClr val="1F2A30"/>
+                            <a:srgbClr val="1D1D1B"/>
                           </a:solidFill>
-                          <a:latin typeface="Calibri" pitchFamily="34" charset="0"/>
-                          <a:ea typeface="Calibri" pitchFamily="34" charset="-122"/>
-                          <a:cs typeface="Calibri" pitchFamily="34" charset="-120"/>
+                          <a:latin typeface="Lucida Sans" pitchFamily="34" charset="0"/>
+                          <a:ea typeface="Lucida Sans" pitchFamily="34" charset="-122"/>
+                          <a:cs typeface="Lucida Sans" pitchFamily="34" charset="-120"/>
                         </a:rPr>
                         <a:t>Donnerstag</a:t>
                       </a:r>
                       <a:endParaRPr lang="en-US" sz="1600" dirty="0">
-                        <a:latin typeface="Calibri" charset="0"/>
-                        <a:ea typeface="Calibri" charset="0"/>
-                        <a:cs typeface="Calibri" charset="0"/>
+                        <a:latin typeface="Lucida Sans" charset="0"/>
+                        <a:ea typeface="Lucida Sans" charset="0"/>
+                        <a:cs typeface="Lucida Sans" charset="0"/>
                       </a:endParaRPr>
                     </a:p>
                   </a:txBody>
                   <a:tcPr marL="101600" marR="101600" marT="63500" marB="63500" anchor="ctr">
                     <a:lnL w="9525" cap="flat" cmpd="sng" algn="ctr">
                       <a:solidFill>
-                        <a:srgbClr val="C9DAD8"/>
+                        <a:srgbClr val="D9D9D9"/>
                       </a:solidFill>
                       <a:prstDash val="solid"/>
                       <a:round/>
@@ -8633,7 +8731,7 @@
                     </a:lnL>
                     <a:lnR w="9525" cap="flat" cmpd="sng" algn="ctr">
                       <a:solidFill>
-                        <a:srgbClr val="C9DAD8"/>
+                        <a:srgbClr val="D9D9D9"/>
                       </a:solidFill>
                       <a:prstDash val="solid"/>
                       <a:round/>
@@ -8642,7 +8740,7 @@
                     </a:lnR>
                     <a:lnT w="9525" cap="flat" cmpd="sng" algn="ctr">
                       <a:solidFill>
-                        <a:srgbClr val="C9DAD8"/>
+                        <a:srgbClr val="D9D9D9"/>
                       </a:solidFill>
                       <a:prstDash val="solid"/>
                       <a:round/>
@@ -8651,7 +8749,7 @@
                     </a:lnT>
                     <a:lnB w="9525" cap="flat" cmpd="sng" algn="ctr">
                       <a:solidFill>
-                        <a:srgbClr val="C9DAD8"/>
+                        <a:srgbClr val="D9D9D9"/>
                       </a:solidFill>
                       <a:prstDash val="solid"/>
                       <a:round/>
@@ -8659,7 +8757,7 @@
                       <a:tailEnd type="none" w="med" len="med"/>
                     </a:lnB>
                     <a:solidFill>
-                      <a:srgbClr val="F4F9F8"/>
+                      <a:srgbClr val="F7F7F7"/>
                     </a:solidFill>
                   </a:tcPr>
                 </a:tc>
@@ -8674,25 +8772,25 @@
                       <a:r>
                         <a:rPr lang="en-US" sz="1600" dirty="0">
                           <a:solidFill>
-                            <a:srgbClr val="1F2A30"/>
+                            <a:srgbClr val="1D1D1B"/>
                           </a:solidFill>
-                          <a:latin typeface="Calibri" pitchFamily="34" charset="0"/>
-                          <a:ea typeface="Calibri" pitchFamily="34" charset="-122"/>
-                          <a:cs typeface="Calibri" pitchFamily="34" charset="-120"/>
+                          <a:latin typeface="Lucida Sans" pitchFamily="34" charset="0"/>
+                          <a:ea typeface="Lucida Sans" pitchFamily="34" charset="-122"/>
+                          <a:cs typeface="Lucida Sans" pitchFamily="34" charset="-120"/>
                         </a:rPr>
                         <a:t>Informatik</a:t>
                       </a:r>
                       <a:endParaRPr lang="en-US" sz="1600" dirty="0">
-                        <a:latin typeface="Calibri" charset="0"/>
-                        <a:ea typeface="Calibri" charset="0"/>
-                        <a:cs typeface="Calibri" charset="0"/>
+                        <a:latin typeface="Lucida Sans" charset="0"/>
+                        <a:ea typeface="Lucida Sans" charset="0"/>
+                        <a:cs typeface="Lucida Sans" charset="0"/>
                       </a:endParaRPr>
                     </a:p>
                   </a:txBody>
                   <a:tcPr marL="101600" marR="101600" marT="63500" marB="63500" anchor="ctr">
                     <a:lnL w="9525" cap="flat" cmpd="sng" algn="ctr">
                       <a:solidFill>
-                        <a:srgbClr val="C9DAD8"/>
+                        <a:srgbClr val="D9D9D9"/>
                       </a:solidFill>
                       <a:prstDash val="solid"/>
                       <a:round/>
@@ -8701,7 +8799,7 @@
                     </a:lnL>
                     <a:lnR w="9525" cap="flat" cmpd="sng" algn="ctr">
                       <a:solidFill>
-                        <a:srgbClr val="C9DAD8"/>
+                        <a:srgbClr val="D9D9D9"/>
                       </a:solidFill>
                       <a:prstDash val="solid"/>
                       <a:round/>
@@ -8710,7 +8808,7 @@
                     </a:lnR>
                     <a:lnT w="9525" cap="flat" cmpd="sng" algn="ctr">
                       <a:solidFill>
-                        <a:srgbClr val="C9DAD8"/>
+                        <a:srgbClr val="D9D9D9"/>
                       </a:solidFill>
                       <a:prstDash val="solid"/>
                       <a:round/>
@@ -8719,7 +8817,7 @@
                     </a:lnT>
                     <a:lnB w="9525" cap="flat" cmpd="sng" algn="ctr">
                       <a:solidFill>
-                        <a:srgbClr val="C9DAD8"/>
+                        <a:srgbClr val="D9D9D9"/>
                       </a:solidFill>
                       <a:prstDash val="solid"/>
                       <a:round/>
@@ -8727,7 +8825,7 @@
                       <a:tailEnd type="none" w="med" len="med"/>
                     </a:lnB>
                     <a:solidFill>
-                      <a:srgbClr val="F4F9F8"/>
+                      <a:srgbClr val="F7F7F7"/>
                     </a:solidFill>
                   </a:tcPr>
                 </a:tc>
@@ -8742,25 +8840,25 @@
                       <a:r>
                         <a:rPr lang="en-US" sz="1600" dirty="0">
                           <a:solidFill>
-                            <a:srgbClr val="1F2A30"/>
+                            <a:srgbClr val="1D1D1B"/>
                           </a:solidFill>
-                          <a:latin typeface="Calibri" pitchFamily="34" charset="0"/>
-                          <a:ea typeface="Calibri" pitchFamily="34" charset="-122"/>
-                          <a:cs typeface="Calibri" pitchFamily="34" charset="-120"/>
+                          <a:latin typeface="Lucida Sans" pitchFamily="34" charset="0"/>
+                          <a:ea typeface="Lucida Sans" pitchFamily="34" charset="-122"/>
+                          <a:cs typeface="Lucida Sans" pitchFamily="34" charset="-120"/>
                         </a:rPr>
                         <a:t>eigenes Steuerprogramm mit Schleife und Bedingungen</a:t>
                       </a:r>
                       <a:endParaRPr lang="en-US" sz="1600" dirty="0">
-                        <a:latin typeface="Calibri" charset="0"/>
-                        <a:ea typeface="Calibri" charset="0"/>
-                        <a:cs typeface="Calibri" charset="0"/>
+                        <a:latin typeface="Lucida Sans" charset="0"/>
+                        <a:ea typeface="Lucida Sans" charset="0"/>
+                        <a:cs typeface="Lucida Sans" charset="0"/>
                       </a:endParaRPr>
                     </a:p>
                   </a:txBody>
                   <a:tcPr marL="101600" marR="101600" marT="63500" marB="63500" anchor="ctr">
                     <a:lnL w="9525" cap="flat" cmpd="sng" algn="ctr">
                       <a:solidFill>
-                        <a:srgbClr val="C9DAD8"/>
+                        <a:srgbClr val="D9D9D9"/>
                       </a:solidFill>
                       <a:prstDash val="solid"/>
                       <a:round/>
@@ -8769,7 +8867,7 @@
                     </a:lnL>
                     <a:lnR w="9525" cap="flat" cmpd="sng" algn="ctr">
                       <a:solidFill>
-                        <a:srgbClr val="C9DAD8"/>
+                        <a:srgbClr val="D9D9D9"/>
                       </a:solidFill>
                       <a:prstDash val="solid"/>
                       <a:round/>
@@ -8778,7 +8876,7 @@
                     </a:lnR>
                     <a:lnT w="9525" cap="flat" cmpd="sng" algn="ctr">
                       <a:solidFill>
-                        <a:srgbClr val="C9DAD8"/>
+                        <a:srgbClr val="D9D9D9"/>
                       </a:solidFill>
                       <a:prstDash val="solid"/>
                       <a:round/>
@@ -8787,7 +8885,7 @@
                     </a:lnT>
                     <a:lnB w="9525" cap="flat" cmpd="sng" algn="ctr">
                       <a:solidFill>
-                        <a:srgbClr val="C9DAD8"/>
+                        <a:srgbClr val="D9D9D9"/>
                       </a:solidFill>
                       <a:prstDash val="solid"/>
                       <a:round/>
@@ -8795,7 +8893,7 @@
                       <a:tailEnd type="none" w="med" len="med"/>
                     </a:lnB>
                     <a:solidFill>
-                      <a:srgbClr val="F4F9F8"/>
+                      <a:srgbClr val="F7F7F7"/>
                     </a:solidFill>
                   </a:tcPr>
                 </a:tc>
@@ -8810,25 +8908,25 @@
                       <a:r>
                         <a:rPr lang="en-US" sz="1600" dirty="0">
                           <a:solidFill>
-                            <a:srgbClr val="1F2A30"/>
+                            <a:srgbClr val="1D1D1B"/>
                           </a:solidFill>
-                          <a:latin typeface="Calibri" pitchFamily="34" charset="0"/>
-                          <a:ea typeface="Calibri" pitchFamily="34" charset="-122"/>
-                          <a:cs typeface="Calibri" pitchFamily="34" charset="-120"/>
+                          <a:latin typeface="Lucida Sans" pitchFamily="34" charset="0"/>
+                          <a:ea typeface="Lucida Sans" pitchFamily="34" charset="-122"/>
+                          <a:cs typeface="Lucida Sans" pitchFamily="34" charset="-120"/>
                         </a:rPr>
                         <a:t>4–6 Std.</a:t>
                       </a:r>
                       <a:endParaRPr lang="en-US" sz="1600" dirty="0">
-                        <a:latin typeface="Calibri" charset="0"/>
-                        <a:ea typeface="Calibri" charset="0"/>
-                        <a:cs typeface="Calibri" charset="0"/>
+                        <a:latin typeface="Lucida Sans" charset="0"/>
+                        <a:ea typeface="Lucida Sans" charset="0"/>
+                        <a:cs typeface="Lucida Sans" charset="0"/>
                       </a:endParaRPr>
                     </a:p>
                   </a:txBody>
                   <a:tcPr marL="101600" marR="101600" marT="63500" marB="63500" anchor="ctr">
                     <a:lnL w="9525" cap="flat" cmpd="sng" algn="ctr">
                       <a:solidFill>
-                        <a:srgbClr val="C9DAD8"/>
+                        <a:srgbClr val="D9D9D9"/>
                       </a:solidFill>
                       <a:prstDash val="solid"/>
                       <a:round/>
@@ -8837,7 +8935,7 @@
                     </a:lnL>
                     <a:lnR w="9525" cap="flat" cmpd="sng" algn="ctr">
                       <a:solidFill>
-                        <a:srgbClr val="C9DAD8"/>
+                        <a:srgbClr val="D9D9D9"/>
                       </a:solidFill>
                       <a:prstDash val="solid"/>
                       <a:round/>
@@ -8846,7 +8944,7 @@
                     </a:lnR>
                     <a:lnT w="9525" cap="flat" cmpd="sng" algn="ctr">
                       <a:solidFill>
-                        <a:srgbClr val="C9DAD8"/>
+                        <a:srgbClr val="D9D9D9"/>
                       </a:solidFill>
                       <a:prstDash val="solid"/>
                       <a:round/>
@@ -8855,7 +8953,7 @@
                     </a:lnT>
                     <a:lnB w="9525" cap="flat" cmpd="sng" algn="ctr">
                       <a:solidFill>
-                        <a:srgbClr val="C9DAD8"/>
+                        <a:srgbClr val="D9D9D9"/>
                       </a:solidFill>
                       <a:prstDash val="solid"/>
                       <a:round/>
@@ -8863,7 +8961,7 @@
                       <a:tailEnd type="none" w="med" len="med"/>
                     </a:lnB>
                     <a:solidFill>
-                      <a:srgbClr val="F4F9F8"/>
+                      <a:srgbClr val="F7F7F7"/>
                     </a:solidFill>
                   </a:tcPr>
                 </a:tc>
@@ -8880,25 +8978,25 @@
                       <a:r>
                         <a:rPr lang="en-US" sz="1600" dirty="0">
                           <a:solidFill>
-                            <a:srgbClr val="1F2A30"/>
+                            <a:srgbClr val="1D1D1B"/>
                           </a:solidFill>
-                          <a:latin typeface="Calibri" pitchFamily="34" charset="0"/>
-                          <a:ea typeface="Calibri" pitchFamily="34" charset="-122"/>
-                          <a:cs typeface="Calibri" pitchFamily="34" charset="-120"/>
+                          <a:latin typeface="Lucida Sans" pitchFamily="34" charset="0"/>
+                          <a:ea typeface="Lucida Sans" pitchFamily="34" charset="-122"/>
+                          <a:cs typeface="Lucida Sans" pitchFamily="34" charset="-120"/>
                         </a:rPr>
                         <a:t>Freitag</a:t>
                       </a:r>
                       <a:endParaRPr lang="en-US" sz="1600" dirty="0">
-                        <a:latin typeface="Calibri" charset="0"/>
-                        <a:ea typeface="Calibri" charset="0"/>
-                        <a:cs typeface="Calibri" charset="0"/>
+                        <a:latin typeface="Lucida Sans" charset="0"/>
+                        <a:ea typeface="Lucida Sans" charset="0"/>
+                        <a:cs typeface="Lucida Sans" charset="0"/>
                       </a:endParaRPr>
                     </a:p>
                   </a:txBody>
                   <a:tcPr marL="101600" marR="101600" marT="63500" marB="63500" anchor="ctr">
                     <a:lnL w="9525" cap="flat" cmpd="sng" algn="ctr">
                       <a:solidFill>
-                        <a:srgbClr val="C9DAD8"/>
+                        <a:srgbClr val="D9D9D9"/>
                       </a:solidFill>
                       <a:prstDash val="solid"/>
                       <a:round/>
@@ -8907,7 +9005,7 @@
                     </a:lnL>
                     <a:lnR w="9525" cap="flat" cmpd="sng" algn="ctr">
                       <a:solidFill>
-                        <a:srgbClr val="C9DAD8"/>
+                        <a:srgbClr val="D9D9D9"/>
                       </a:solidFill>
                       <a:prstDash val="solid"/>
                       <a:round/>
@@ -8916,7 +9014,7 @@
                     </a:lnR>
                     <a:lnT w="9525" cap="flat" cmpd="sng" algn="ctr">
                       <a:solidFill>
-                        <a:srgbClr val="C9DAD8"/>
+                        <a:srgbClr val="D9D9D9"/>
                       </a:solidFill>
                       <a:prstDash val="solid"/>
                       <a:round/>
@@ -8925,7 +9023,7 @@
                     </a:lnT>
                     <a:lnB w="9525" cap="flat" cmpd="sng" algn="ctr">
                       <a:solidFill>
-                        <a:srgbClr val="C9DAD8"/>
+                        <a:srgbClr val="D9D9D9"/>
                       </a:solidFill>
                       <a:prstDash val="solid"/>
                       <a:round/>
@@ -8948,25 +9046,25 @@
                       <a:r>
                         <a:rPr lang="en-US" sz="1600" dirty="0">
                           <a:solidFill>
-                            <a:srgbClr val="1F2A30"/>
+                            <a:srgbClr val="1D1D1B"/>
                           </a:solidFill>
-                          <a:latin typeface="Calibri" pitchFamily="34" charset="0"/>
-                          <a:ea typeface="Calibri" pitchFamily="34" charset="-122"/>
-                          <a:cs typeface="Calibri" pitchFamily="34" charset="-120"/>
+                          <a:latin typeface="Lucida Sans" pitchFamily="34" charset="0"/>
+                          <a:ea typeface="Lucida Sans" pitchFamily="34" charset="-122"/>
+                          <a:cs typeface="Lucida Sans" pitchFamily="34" charset="-120"/>
                         </a:rPr>
                         <a:t>Präsentation</a:t>
                       </a:r>
                       <a:endParaRPr lang="en-US" sz="1600" dirty="0">
-                        <a:latin typeface="Calibri" charset="0"/>
-                        <a:ea typeface="Calibri" charset="0"/>
-                        <a:cs typeface="Calibri" charset="0"/>
+                        <a:latin typeface="Lucida Sans" charset="0"/>
+                        <a:ea typeface="Lucida Sans" charset="0"/>
+                        <a:cs typeface="Lucida Sans" charset="0"/>
                       </a:endParaRPr>
                     </a:p>
                   </a:txBody>
                   <a:tcPr marL="101600" marR="101600" marT="63500" marB="63500" anchor="ctr">
                     <a:lnL w="9525" cap="flat" cmpd="sng" algn="ctr">
                       <a:solidFill>
-                        <a:srgbClr val="C9DAD8"/>
+                        <a:srgbClr val="D9D9D9"/>
                       </a:solidFill>
                       <a:prstDash val="solid"/>
                       <a:round/>
@@ -8975,7 +9073,7 @@
                     </a:lnL>
                     <a:lnR w="9525" cap="flat" cmpd="sng" algn="ctr">
                       <a:solidFill>
-                        <a:srgbClr val="C9DAD8"/>
+                        <a:srgbClr val="D9D9D9"/>
                       </a:solidFill>
                       <a:prstDash val="solid"/>
                       <a:round/>
@@ -8984,7 +9082,7 @@
                     </a:lnR>
                     <a:lnT w="9525" cap="flat" cmpd="sng" algn="ctr">
                       <a:solidFill>
-                        <a:srgbClr val="C9DAD8"/>
+                        <a:srgbClr val="D9D9D9"/>
                       </a:solidFill>
                       <a:prstDash val="solid"/>
                       <a:round/>
@@ -8993,7 +9091,7 @@
                     </a:lnT>
                     <a:lnB w="9525" cap="flat" cmpd="sng" algn="ctr">
                       <a:solidFill>
-                        <a:srgbClr val="C9DAD8"/>
+                        <a:srgbClr val="D9D9D9"/>
                       </a:solidFill>
                       <a:prstDash val="solid"/>
                       <a:round/>
@@ -9016,25 +9114,25 @@
                       <a:r>
                         <a:rPr lang="en-US" sz="1600" dirty="0">
                           <a:solidFill>
-                            <a:srgbClr val="1F2A30"/>
+                            <a:srgbClr val="1D1D1B"/>
                           </a:solidFill>
-                          <a:latin typeface="Calibri" pitchFamily="34" charset="0"/>
-                          <a:ea typeface="Calibri" pitchFamily="34" charset="-122"/>
-                          <a:cs typeface="Calibri" pitchFamily="34" charset="-120"/>
+                          <a:latin typeface="Lucida Sans" pitchFamily="34" charset="0"/>
+                          <a:ea typeface="Lucida Sans" pitchFamily="34" charset="-122"/>
+                          <a:cs typeface="Lucida Sans" pitchFamily="34" charset="-120"/>
                         </a:rPr>
                         <a:t>Schülerinnen und Schüler präsentieren als Expert:innen (schulindividuell)</a:t>
                       </a:r>
                       <a:endParaRPr lang="en-US" sz="1600" dirty="0">
-                        <a:latin typeface="Calibri" charset="0"/>
-                        <a:ea typeface="Calibri" charset="0"/>
-                        <a:cs typeface="Calibri" charset="0"/>
+                        <a:latin typeface="Lucida Sans" charset="0"/>
+                        <a:ea typeface="Lucida Sans" charset="0"/>
+                        <a:cs typeface="Lucida Sans" charset="0"/>
                       </a:endParaRPr>
                     </a:p>
                   </a:txBody>
                   <a:tcPr marL="101600" marR="101600" marT="63500" marB="63500" anchor="ctr">
                     <a:lnL w="9525" cap="flat" cmpd="sng" algn="ctr">
                       <a:solidFill>
-                        <a:srgbClr val="C9DAD8"/>
+                        <a:srgbClr val="D9D9D9"/>
                       </a:solidFill>
                       <a:prstDash val="solid"/>
                       <a:round/>
@@ -9043,7 +9141,7 @@
                     </a:lnL>
                     <a:lnR w="9525" cap="flat" cmpd="sng" algn="ctr">
                       <a:solidFill>
-                        <a:srgbClr val="C9DAD8"/>
+                        <a:srgbClr val="D9D9D9"/>
                       </a:solidFill>
                       <a:prstDash val="solid"/>
                       <a:round/>
@@ -9052,7 +9150,7 @@
                     </a:lnR>
                     <a:lnT w="9525" cap="flat" cmpd="sng" algn="ctr">
                       <a:solidFill>
-                        <a:srgbClr val="C9DAD8"/>
+                        <a:srgbClr val="D9D9D9"/>
                       </a:solidFill>
                       <a:prstDash val="solid"/>
                       <a:round/>
@@ -9061,7 +9159,7 @@
                     </a:lnT>
                     <a:lnB w="9525" cap="flat" cmpd="sng" algn="ctr">
                       <a:solidFill>
-                        <a:srgbClr val="C9DAD8"/>
+                        <a:srgbClr val="D9D9D9"/>
                       </a:solidFill>
                       <a:prstDash val="solid"/>
                       <a:round/>
@@ -9084,25 +9182,25 @@
                       <a:r>
                         <a:rPr lang="en-US" sz="1600" dirty="0">
                           <a:solidFill>
-                            <a:srgbClr val="1F2A30"/>
+                            <a:srgbClr val="1D1D1B"/>
                           </a:solidFill>
-                          <a:latin typeface="Calibri" pitchFamily="34" charset="0"/>
-                          <a:ea typeface="Calibri" pitchFamily="34" charset="-122"/>
-                          <a:cs typeface="Calibri" pitchFamily="34" charset="-120"/>
+                          <a:latin typeface="Lucida Sans" pitchFamily="34" charset="0"/>
+                          <a:ea typeface="Lucida Sans" pitchFamily="34" charset="-122"/>
+                          <a:cs typeface="Lucida Sans" pitchFamily="34" charset="-120"/>
                         </a:rPr>
                         <a:t>3–4 Std.</a:t>
                       </a:r>
                       <a:endParaRPr lang="en-US" sz="1600" dirty="0">
-                        <a:latin typeface="Calibri" charset="0"/>
-                        <a:ea typeface="Calibri" charset="0"/>
-                        <a:cs typeface="Calibri" charset="0"/>
+                        <a:latin typeface="Lucida Sans" charset="0"/>
+                        <a:ea typeface="Lucida Sans" charset="0"/>
+                        <a:cs typeface="Lucida Sans" charset="0"/>
                       </a:endParaRPr>
                     </a:p>
                   </a:txBody>
                   <a:tcPr marL="101600" marR="101600" marT="63500" marB="63500" anchor="ctr">
                     <a:lnL w="9525" cap="flat" cmpd="sng" algn="ctr">
                       <a:solidFill>
-                        <a:srgbClr val="C9DAD8"/>
+                        <a:srgbClr val="D9D9D9"/>
                       </a:solidFill>
                       <a:prstDash val="solid"/>
                       <a:round/>
@@ -9111,7 +9209,7 @@
                     </a:lnL>
                     <a:lnR w="9525" cap="flat" cmpd="sng" algn="ctr">
                       <a:solidFill>
-                        <a:srgbClr val="C9DAD8"/>
+                        <a:srgbClr val="D9D9D9"/>
                       </a:solidFill>
                       <a:prstDash val="solid"/>
                       <a:round/>
@@ -9120,7 +9218,7 @@
                     </a:lnR>
                     <a:lnT w="9525" cap="flat" cmpd="sng" algn="ctr">
                       <a:solidFill>
-                        <a:srgbClr val="C9DAD8"/>
+                        <a:srgbClr val="D9D9D9"/>
                       </a:solidFill>
                       <a:prstDash val="solid"/>
                       <a:round/>
@@ -9129,7 +9227,7 @@
                     </a:lnT>
                     <a:lnB w="9525" cap="flat" cmpd="sng" algn="ctr">
                       <a:solidFill>
-                        <a:srgbClr val="C9DAD8"/>
+                        <a:srgbClr val="D9D9D9"/>
                       </a:solidFill>
                       <a:prstDash val="solid"/>
                       <a:round/>
@@ -9163,11 +9261,11 @@
             </a:avLst>
           </a:prstGeom>
           <a:solidFill>
-            <a:srgbClr val="FCEBDD"/>
+            <a:srgbClr val="FDF0E3"/>
           </a:solidFill>
           <a:ln w="12700">
             <a:solidFill>
-              <a:srgbClr val="FCEBDD"/>
+              <a:srgbClr val="FDF0E3"/>
             </a:solidFill>
             <a:prstDash val="solid"/>
           </a:ln>
@@ -9188,11 +9286,11 @@
             <a:avLst/>
           </a:prstGeom>
           <a:solidFill>
-            <a:srgbClr val="E8772E"/>
+            <a:srgbClr val="EF7D00"/>
           </a:solidFill>
           <a:ln w="12700">
             <a:solidFill>
-              <a:srgbClr val="E8772E"/>
+              <a:srgbClr val="EF7D00"/>
             </a:solidFill>
             <a:prstDash val="solid"/>
           </a:ln>
@@ -9225,11 +9323,11 @@
             <a:r>
               <a:rPr lang="en-US" sz="2000" b="1" dirty="0">
                 <a:solidFill>
-                  <a:srgbClr val="FFFFFF"/>
-                </a:solidFill>
-                <a:latin typeface="Calibri" pitchFamily="34" charset="0"/>
-                <a:ea typeface="Calibri" pitchFamily="34" charset="-122"/>
-                <a:cs typeface="Calibri" pitchFamily="34" charset="-120"/>
+                  <a:srgbClr val="1D1D1B"/>
+                </a:solidFill>
+                <a:latin typeface="Lucida Sans" pitchFamily="34" charset="0"/>
+                <a:ea typeface="Lucida Sans" pitchFamily="34" charset="-122"/>
+                <a:cs typeface="Lucida Sans" pitchFamily="34" charset="-120"/>
               </a:rPr>
               <a:t>!</a:t>
             </a:r>
@@ -9264,13 +9362,13 @@
             <a:r>
               <a:rPr lang="en-US" sz="1500" dirty="0">
                 <a:solidFill>
-                  <a:srgbClr val="0B3C49"/>
-                </a:solidFill>
-                <a:latin typeface="Calibri" pitchFamily="34" charset="0"/>
-                <a:ea typeface="Calibri" pitchFamily="34" charset="-122"/>
-                <a:cs typeface="Calibri" pitchFamily="34" charset="-120"/>
-              </a:rPr>
-              <a:t>Referenz für alle Gruppen: Klasse 7, Teams zu 3–4, mBot2 montiert. Die Übertragung auf Ihre eigene Lerngruppe folgt im Praxisauftrag.</a:t>
+                  <a:srgbClr val="7A003F"/>
+                </a:solidFill>
+                <a:latin typeface="Lucida Sans" pitchFamily="34" charset="0"/>
+                <a:ea typeface="Lucida Sans" pitchFamily="34" charset="-122"/>
+                <a:cs typeface="Lucida Sans" pitchFamily="34" charset="-120"/>
+              </a:rPr>
+              <a:t>Wir legen jetzt eine gemeinsame Jahrgangsstufe fest (Voreinstellung: Klasse 7). Varianten für Kl. 5/6, 9/10 und Sek II stehen im Anpassungsleitfaden.</a:t>
             </a:r>
             <a:endParaRPr lang="en-US" sz="1500" dirty="0"/>
           </a:p>
@@ -9306,11 +9404,11 @@
             <a:lvl1pPr>
               <a:defRPr sz="1000">
                 <a:solidFill>
-                  <a:srgbClr val="5B6B73"/>
-                </a:solidFill>
-                <a:latin typeface="Calibri"/>
-                <a:ea typeface="Calibri"/>
-                <a:cs typeface="Calibri"/>
+                  <a:srgbClr val="706F6F"/>
+                </a:solidFill>
+                <a:latin typeface="Lucida Sans"/>
+                <a:ea typeface="Lucida Sans"/>
+                <a:cs typeface="Lucida Sans"/>
               </a:defRPr>
             </a:lvl1pPr>
           </a:lstStyle>
@@ -9354,13 +9452,13 @@
           <p:cNvPr id="2" name="Text 1"/>
           <p:cNvSpPr/>
           <p:nvPr>
-            <p:ph idx="101" type="title" hasCustomPrompt="1"/>
+            <p:ph idx="102" type="title" hasCustomPrompt="1"/>
           </p:nvPr>
         </p:nvSpPr>
         <p:spPr>
           <a:xfrm>
-            <a:off x="548640" y="320040"/>
-            <a:ext cx="11094415" cy="777240"/>
+            <a:off x="548640" y="274320"/>
+            <a:ext cx="8351215" cy="896112"/>
           </a:xfrm>
           <a:prstGeom prst="rect">
             <a:avLst/>
@@ -9372,21 +9470,21 @@
           <a:bodyPr wrap="square" lIns="0" tIns="0" rIns="0" bIns="0" rtlCol="0" anchor="ctr"/>
           <a:lstStyle/>
           <a:p>
-            <a:pPr indent="0" marL="0">
+            <a:pPr algn="l" indent="0" marL="0">
               <a:buNone/>
             </a:pPr>
             <a:r>
-              <a:rPr lang="en-US" sz="3200" b="1" dirty="0">
-                <a:solidFill>
-                  <a:srgbClr val="0B3C49"/>
-                </a:solidFill>
-                <a:latin typeface="Cambria" pitchFamily="34" charset="0"/>
-                <a:ea typeface="Cambria" pitchFamily="34" charset="-122"/>
-                <a:cs typeface="Cambria" pitchFamily="34" charset="-120"/>
+              <a:rPr lang="en-US" sz="2600" b="1" dirty="0">
+                <a:solidFill>
+                  <a:srgbClr val="7A003F"/>
+                </a:solidFill>
+                <a:latin typeface="Lucida Sans" pitchFamily="34" charset="0"/>
+                <a:ea typeface="Lucida Sans" pitchFamily="34" charset="-122"/>
+                <a:cs typeface="Lucida Sans" pitchFamily="34" charset="-120"/>
               </a:rPr>
               <a:t>Ablauf heute</a:t>
             </a:r>
-            <a:endParaRPr lang="en-US" sz="3200" dirty="0"/>
+            <a:endParaRPr lang="en-US" sz="2600" dirty="0"/>
           </a:p>
         </p:txBody>
       </p:sp>
@@ -9407,7 +9505,7 @@
           <a:noFill/>
           <a:ln w="25400">
             <a:solidFill>
-              <a:srgbClr val="C9DAD8"/>
+              <a:srgbClr val="D9D9D9"/>
             </a:solidFill>
             <a:prstDash val="solid"/>
           </a:ln>
@@ -9428,11 +9526,11 @@
             <a:avLst/>
           </a:prstGeom>
           <a:solidFill>
-            <a:srgbClr val="0B6E69"/>
+            <a:srgbClr val="7A003F"/>
           </a:solidFill>
           <a:ln w="12700">
             <a:solidFill>
-              <a:srgbClr val="0B6E69"/>
+              <a:srgbClr val="7A003F"/>
             </a:solidFill>
             <a:prstDash val="solid"/>
           </a:ln>
@@ -9467,9 +9565,9 @@
                 <a:solidFill>
                   <a:srgbClr val="FFFFFF"/>
                 </a:solidFill>
-                <a:latin typeface="Calibri" pitchFamily="34" charset="0"/>
-                <a:ea typeface="Calibri" pitchFamily="34" charset="-122"/>
-                <a:cs typeface="Calibri" pitchFamily="34" charset="-120"/>
+                <a:latin typeface="Lucida Sans" pitchFamily="34" charset="0"/>
+                <a:ea typeface="Lucida Sans" pitchFamily="34" charset="-122"/>
+                <a:cs typeface="Lucida Sans" pitchFamily="34" charset="-120"/>
               </a:rPr>
               <a:t>1</a:t>
             </a:r>
@@ -9504,11 +9602,11 @@
             <a:r>
               <a:rPr lang="en-US" sz="1400" b="1" dirty="0">
                 <a:solidFill>
-                  <a:srgbClr val="0B6E69"/>
-                </a:solidFill>
-                <a:latin typeface="Calibri" pitchFamily="34" charset="0"/>
-                <a:ea typeface="Calibri" pitchFamily="34" charset="-122"/>
-                <a:cs typeface="Calibri" pitchFamily="34" charset="-120"/>
+                  <a:srgbClr val="7A003F"/>
+                </a:solidFill>
+                <a:latin typeface="Lucida Sans" pitchFamily="34" charset="0"/>
+                <a:ea typeface="Lucida Sans" pitchFamily="34" charset="-122"/>
+                <a:cs typeface="Lucida Sans" pitchFamily="34" charset="-120"/>
               </a:rPr>
               <a:t>0–10</a:t>
             </a:r>
@@ -9533,11 +9631,11 @@
             </a:avLst>
           </a:prstGeom>
           <a:solidFill>
-            <a:srgbClr val="E6F2F1"/>
+            <a:srgbClr val="F2F2F2"/>
           </a:solidFill>
           <a:ln w="12700">
             <a:solidFill>
-              <a:srgbClr val="E6F2F1"/>
+              <a:srgbClr val="F2F2F2"/>
             </a:solidFill>
             <a:prstDash val="solid"/>
           </a:ln>
@@ -9570,11 +9668,11 @@
             <a:r>
               <a:rPr lang="en-US" sz="1600" b="1" dirty="0">
                 <a:solidFill>
-                  <a:srgbClr val="0B3C49"/>
-                </a:solidFill>
-                <a:latin typeface="Calibri" pitchFamily="34" charset="0"/>
-                <a:ea typeface="Calibri" pitchFamily="34" charset="-122"/>
-                <a:cs typeface="Calibri" pitchFamily="34" charset="-120"/>
+                  <a:srgbClr val="7A003F"/>
+                </a:solidFill>
+                <a:latin typeface="Lucida Sans" pitchFamily="34" charset="0"/>
+                <a:ea typeface="Lucida Sans" pitchFamily="34" charset="-122"/>
+                <a:cs typeface="Lucida Sans" pitchFamily="34" charset="-120"/>
               </a:rPr>
               <a:t>Einstieg</a:t>
             </a:r>
@@ -9607,17 +9705,17 @@
               <a:buNone/>
             </a:pPr>
             <a:r>
-              <a:rPr lang="en-US" sz="1500" dirty="0">
-                <a:solidFill>
-                  <a:srgbClr val="1F2A30"/>
-                </a:solidFill>
-                <a:latin typeface="Calibri" pitchFamily="34" charset="0"/>
-                <a:ea typeface="Calibri" pitchFamily="34" charset="-122"/>
-                <a:cs typeface="Calibri" pitchFamily="34" charset="-120"/>
+              <a:rPr lang="en-US" sz="1250" dirty="0">
+                <a:solidFill>
+                  <a:srgbClr val="1D1D1B"/>
+                </a:solidFill>
+                <a:latin typeface="Lucida Sans" pitchFamily="34" charset="0"/>
+                <a:ea typeface="Lucida Sans" pitchFamily="34" charset="-122"/>
+                <a:cs typeface="Lucida Sans" pitchFamily="34" charset="-120"/>
               </a:rPr>
               <a:t>Rückblick, Wochenstruktur, Rollen, Aufgabenkarten</a:t>
             </a:r>
-            <a:endParaRPr lang="en-US" sz="1500" dirty="0"/>
+            <a:endParaRPr lang="en-US" sz="1250" dirty="0"/>
           </a:p>
         </p:txBody>
       </p:sp>
@@ -9636,11 +9734,11 @@
             <a:avLst/>
           </a:prstGeom>
           <a:solidFill>
-            <a:srgbClr val="E8772E"/>
+            <a:srgbClr val="EF7D00"/>
           </a:solidFill>
           <a:ln w="12700">
             <a:solidFill>
-              <a:srgbClr val="E8772E"/>
+              <a:srgbClr val="EF7D00"/>
             </a:solidFill>
             <a:prstDash val="solid"/>
           </a:ln>
@@ -9673,11 +9771,11 @@
             <a:r>
               <a:rPr lang="en-US" sz="1600" b="1" dirty="0">
                 <a:solidFill>
-                  <a:srgbClr val="FFFFFF"/>
-                </a:solidFill>
-                <a:latin typeface="Calibri" pitchFamily="34" charset="0"/>
-                <a:ea typeface="Calibri" pitchFamily="34" charset="-122"/>
-                <a:cs typeface="Calibri" pitchFamily="34" charset="-120"/>
+                  <a:srgbClr val="1D1D1B"/>
+                </a:solidFill>
+                <a:latin typeface="Lucida Sans" pitchFamily="34" charset="0"/>
+                <a:ea typeface="Lucida Sans" pitchFamily="34" charset="-122"/>
+                <a:cs typeface="Lucida Sans" pitchFamily="34" charset="-120"/>
               </a:rPr>
               <a:t>2</a:t>
             </a:r>
@@ -9712,11 +9810,11 @@
             <a:r>
               <a:rPr lang="en-US" sz="1400" b="1" dirty="0">
                 <a:solidFill>
-                  <a:srgbClr val="0B6E69"/>
-                </a:solidFill>
-                <a:latin typeface="Calibri" pitchFamily="34" charset="0"/>
-                <a:ea typeface="Calibri" pitchFamily="34" charset="-122"/>
-                <a:cs typeface="Calibri" pitchFamily="34" charset="-120"/>
+                  <a:srgbClr val="7A003F"/>
+                </a:solidFill>
+                <a:latin typeface="Lucida Sans" pitchFamily="34" charset="0"/>
+                <a:ea typeface="Lucida Sans" pitchFamily="34" charset="-122"/>
+                <a:cs typeface="Lucida Sans" pitchFamily="34" charset="-120"/>
               </a:rPr>
               <a:t>10–40</a:t>
             </a:r>
@@ -9741,11 +9839,11 @@
             </a:avLst>
           </a:prstGeom>
           <a:solidFill>
-            <a:srgbClr val="FCEBDD"/>
+            <a:srgbClr val="FDF0E3"/>
           </a:solidFill>
           <a:ln w="12700">
             <a:solidFill>
-              <a:srgbClr val="FCEBDD"/>
+              <a:srgbClr val="FDF0E3"/>
             </a:solidFill>
             <a:prstDash val="solid"/>
           </a:ln>
@@ -9778,11 +9876,11 @@
             <a:r>
               <a:rPr lang="en-US" sz="1600" b="1" dirty="0">
                 <a:solidFill>
-                  <a:srgbClr val="0B3C49"/>
-                </a:solidFill>
-                <a:latin typeface="Calibri" pitchFamily="34" charset="0"/>
-                <a:ea typeface="Calibri" pitchFamily="34" charset="-122"/>
-                <a:cs typeface="Calibri" pitchFamily="34" charset="-120"/>
+                  <a:srgbClr val="7A003F"/>
+                </a:solidFill>
+                <a:latin typeface="Lucida Sans" pitchFamily="34" charset="0"/>
+                <a:ea typeface="Lucida Sans" pitchFamily="34" charset="-122"/>
+                <a:cs typeface="Lucida Sans" pitchFamily="34" charset="-120"/>
               </a:rPr>
               <a:t>Erprobung</a:t>
             </a:r>
@@ -9815,17 +9913,17 @@
               <a:buNone/>
             </a:pPr>
             <a:r>
-              <a:rPr lang="en-US" sz="1500" dirty="0">
-                <a:solidFill>
-                  <a:srgbClr val="1F2A30"/>
-                </a:solidFill>
-                <a:latin typeface="Calibri" pitchFamily="34" charset="0"/>
-                <a:ea typeface="Calibri" pitchFamily="34" charset="-122"/>
-                <a:cs typeface="Calibri" pitchFamily="34" charset="-120"/>
+              <a:rPr lang="en-US" sz="1250" dirty="0">
+                <a:solidFill>
+                  <a:srgbClr val="1D1D1B"/>
+                </a:solidFill>
+                <a:latin typeface="Lucida Sans" pitchFamily="34" charset="0"/>
+                <a:ea typeface="Lucida Sans" pitchFamily="34" charset="-122"/>
+                <a:cs typeface="Lucida Sans" pitchFamily="34" charset="-120"/>
               </a:rPr>
               <a:t>Kernauftrag 20 Min., Rollenwechsel, Erweiterung 10 Min.</a:t>
             </a:r>
-            <a:endParaRPr lang="en-US" sz="1500" dirty="0"/>
+            <a:endParaRPr lang="en-US" sz="1250" dirty="0"/>
           </a:p>
         </p:txBody>
       </p:sp>
@@ -9844,11 +9942,11 @@
             <a:avLst/>
           </a:prstGeom>
           <a:solidFill>
-            <a:srgbClr val="0B6E69"/>
+            <a:srgbClr val="7A003F"/>
           </a:solidFill>
           <a:ln w="12700">
             <a:solidFill>
-              <a:srgbClr val="0B6E69"/>
+              <a:srgbClr val="7A003F"/>
             </a:solidFill>
             <a:prstDash val="solid"/>
           </a:ln>
@@ -9883,9 +9981,9 @@
                 <a:solidFill>
                   <a:srgbClr val="FFFFFF"/>
                 </a:solidFill>
-                <a:latin typeface="Calibri" pitchFamily="34" charset="0"/>
-                <a:ea typeface="Calibri" pitchFamily="34" charset="-122"/>
-                <a:cs typeface="Calibri" pitchFamily="34" charset="-120"/>
+                <a:latin typeface="Lucida Sans" pitchFamily="34" charset="0"/>
+                <a:ea typeface="Lucida Sans" pitchFamily="34" charset="-122"/>
+                <a:cs typeface="Lucida Sans" pitchFamily="34" charset="-120"/>
               </a:rPr>
               <a:t>3</a:t>
             </a:r>
@@ -9920,11 +10018,11 @@
             <a:r>
               <a:rPr lang="en-US" sz="1400" b="1" dirty="0">
                 <a:solidFill>
-                  <a:srgbClr val="0B6E69"/>
-                </a:solidFill>
-                <a:latin typeface="Calibri" pitchFamily="34" charset="0"/>
-                <a:ea typeface="Calibri" pitchFamily="34" charset="-122"/>
-                <a:cs typeface="Calibri" pitchFamily="34" charset="-120"/>
+                  <a:srgbClr val="7A003F"/>
+                </a:solidFill>
+                <a:latin typeface="Lucida Sans" pitchFamily="34" charset="0"/>
+                <a:ea typeface="Lucida Sans" pitchFamily="34" charset="-122"/>
+                <a:cs typeface="Lucida Sans" pitchFamily="34" charset="-120"/>
               </a:rPr>
               <a:t>40–60</a:t>
             </a:r>
@@ -9949,11 +10047,11 @@
             </a:avLst>
           </a:prstGeom>
           <a:solidFill>
-            <a:srgbClr val="E6F2F1"/>
+            <a:srgbClr val="F2F2F2"/>
           </a:solidFill>
           <a:ln w="12700">
             <a:solidFill>
-              <a:srgbClr val="E6F2F1"/>
+              <a:srgbClr val="F2F2F2"/>
             </a:solidFill>
             <a:prstDash val="solid"/>
           </a:ln>
@@ -9986,11 +10084,11 @@
             <a:r>
               <a:rPr lang="en-US" sz="1600" b="1" dirty="0">
                 <a:solidFill>
-                  <a:srgbClr val="0B3C49"/>
-                </a:solidFill>
-                <a:latin typeface="Calibri" pitchFamily="34" charset="0"/>
-                <a:ea typeface="Calibri" pitchFamily="34" charset="-122"/>
-                <a:cs typeface="Calibri" pitchFamily="34" charset="-120"/>
+                  <a:srgbClr val="7A003F"/>
+                </a:solidFill>
+                <a:latin typeface="Lucida Sans" pitchFamily="34" charset="0"/>
+                <a:ea typeface="Lucida Sans" pitchFamily="34" charset="-122"/>
+                <a:cs typeface="Lucida Sans" pitchFamily="34" charset="-120"/>
               </a:rPr>
               <a:t>Planung</a:t>
             </a:r>
@@ -10023,17 +10121,17 @@
               <a:buNone/>
             </a:pPr>
             <a:r>
-              <a:rPr lang="en-US" sz="1500" dirty="0">
-                <a:solidFill>
-                  <a:srgbClr val="1F2A30"/>
-                </a:solidFill>
-                <a:latin typeface="Calibri" pitchFamily="34" charset="0"/>
-                <a:ea typeface="Calibri" pitchFamily="34" charset="-122"/>
-                <a:cs typeface="Calibri" pitchFamily="34" charset="-120"/>
+              <a:rPr lang="en-US" sz="1250" dirty="0">
+                <a:solidFill>
+                  <a:srgbClr val="1D1D1B"/>
+                </a:solidFill>
+                <a:latin typeface="Lucida Sans" pitchFamily="34" charset="0"/>
+                <a:ea typeface="Lucida Sans" pitchFamily="34" charset="-122"/>
+                <a:cs typeface="Lucida Sans" pitchFamily="34" charset="-120"/>
               </a:rPr>
               <a:t>Tagesplan mit der Planungsvorlage</a:t>
             </a:r>
-            <a:endParaRPr lang="en-US" sz="1500" dirty="0"/>
+            <a:endParaRPr lang="en-US" sz="1250" dirty="0"/>
           </a:p>
         </p:txBody>
       </p:sp>
@@ -10052,11 +10150,11 @@
             <a:avLst/>
           </a:prstGeom>
           <a:solidFill>
-            <a:srgbClr val="0B6E69"/>
+            <a:srgbClr val="7A003F"/>
           </a:solidFill>
           <a:ln w="12700">
             <a:solidFill>
-              <a:srgbClr val="0B6E69"/>
+              <a:srgbClr val="7A003F"/>
             </a:solidFill>
             <a:prstDash val="solid"/>
           </a:ln>
@@ -10091,9 +10189,9 @@
                 <a:solidFill>
                   <a:srgbClr val="FFFFFF"/>
                 </a:solidFill>
-                <a:latin typeface="Calibri" pitchFamily="34" charset="0"/>
-                <a:ea typeface="Calibri" pitchFamily="34" charset="-122"/>
-                <a:cs typeface="Calibri" pitchFamily="34" charset="-120"/>
+                <a:latin typeface="Lucida Sans" pitchFamily="34" charset="0"/>
+                <a:ea typeface="Lucida Sans" pitchFamily="34" charset="-122"/>
+                <a:cs typeface="Lucida Sans" pitchFamily="34" charset="-120"/>
               </a:rPr>
               <a:t>4</a:t>
             </a:r>
@@ -10128,11 +10226,11 @@
             <a:r>
               <a:rPr lang="en-US" sz="1400" b="1" dirty="0">
                 <a:solidFill>
-                  <a:srgbClr val="0B6E69"/>
-                </a:solidFill>
-                <a:latin typeface="Calibri" pitchFamily="34" charset="0"/>
-                <a:ea typeface="Calibri" pitchFamily="34" charset="-122"/>
-                <a:cs typeface="Calibri" pitchFamily="34" charset="-120"/>
+                  <a:srgbClr val="7A003F"/>
+                </a:solidFill>
+                <a:latin typeface="Lucida Sans" pitchFamily="34" charset="0"/>
+                <a:ea typeface="Lucida Sans" pitchFamily="34" charset="-122"/>
+                <a:cs typeface="Lucida Sans" pitchFamily="34" charset="-120"/>
               </a:rPr>
               <a:t>60–78</a:t>
             </a:r>
@@ -10157,11 +10255,11 @@
             </a:avLst>
           </a:prstGeom>
           <a:solidFill>
-            <a:srgbClr val="E6F2F1"/>
+            <a:srgbClr val="F2F2F2"/>
           </a:solidFill>
           <a:ln w="12700">
             <a:solidFill>
-              <a:srgbClr val="E6F2F1"/>
+              <a:srgbClr val="F2F2F2"/>
             </a:solidFill>
             <a:prstDash val="solid"/>
           </a:ln>
@@ -10194,11 +10292,11 @@
             <a:r>
               <a:rPr lang="en-US" sz="1600" b="1" dirty="0">
                 <a:solidFill>
-                  <a:srgbClr val="0B3C49"/>
-                </a:solidFill>
-                <a:latin typeface="Calibri" pitchFamily="34" charset="0"/>
-                <a:ea typeface="Calibri" pitchFamily="34" charset="-122"/>
-                <a:cs typeface="Calibri" pitchFamily="34" charset="-120"/>
+                  <a:srgbClr val="7A003F"/>
+                </a:solidFill>
+                <a:latin typeface="Lucida Sans" pitchFamily="34" charset="0"/>
+                <a:ea typeface="Lucida Sans" pitchFamily="34" charset="-122"/>
+                <a:cs typeface="Lucida Sans" pitchFamily="34" charset="-120"/>
               </a:rPr>
               <a:t>Präsentation</a:t>
             </a:r>
@@ -10231,17 +10329,17 @@
               <a:buNone/>
             </a:pPr>
             <a:r>
-              <a:rPr lang="en-US" sz="1500" dirty="0">
-                <a:solidFill>
-                  <a:srgbClr val="1F2A30"/>
-                </a:solidFill>
-                <a:latin typeface="Calibri" pitchFamily="34" charset="0"/>
-                <a:ea typeface="Calibri" pitchFamily="34" charset="-122"/>
-                <a:cs typeface="Calibri" pitchFamily="34" charset="-120"/>
+              <a:rPr lang="en-US" sz="1250" dirty="0">
+                <a:solidFill>
+                  <a:srgbClr val="1D1D1B"/>
+                </a:solidFill>
+                <a:latin typeface="Lucida Sans" pitchFamily="34" charset="0"/>
+                <a:ea typeface="Lucida Sans" pitchFamily="34" charset="-122"/>
+                <a:cs typeface="Lucida Sans" pitchFamily="34" charset="-120"/>
               </a:rPr>
               <a:t>1 Min. Demo + 3 Min. Plan, Peer-Feedback</a:t>
             </a:r>
-            <a:endParaRPr lang="en-US" sz="1500" dirty="0"/>
+            <a:endParaRPr lang="en-US" sz="1250" dirty="0"/>
           </a:p>
         </p:txBody>
       </p:sp>
@@ -10260,11 +10358,11 @@
             <a:avLst/>
           </a:prstGeom>
           <a:solidFill>
-            <a:srgbClr val="0B6E69"/>
+            <a:srgbClr val="7A003F"/>
           </a:solidFill>
           <a:ln w="12700">
             <a:solidFill>
-              <a:srgbClr val="0B6E69"/>
+              <a:srgbClr val="7A003F"/>
             </a:solidFill>
             <a:prstDash val="solid"/>
           </a:ln>
@@ -10299,9 +10397,9 @@
                 <a:solidFill>
                   <a:srgbClr val="FFFFFF"/>
                 </a:solidFill>
-                <a:latin typeface="Calibri" pitchFamily="34" charset="0"/>
-                <a:ea typeface="Calibri" pitchFamily="34" charset="-122"/>
-                <a:cs typeface="Calibri" pitchFamily="34" charset="-120"/>
+                <a:latin typeface="Lucida Sans" pitchFamily="34" charset="0"/>
+                <a:ea typeface="Lucida Sans" pitchFamily="34" charset="-122"/>
+                <a:cs typeface="Lucida Sans" pitchFamily="34" charset="-120"/>
               </a:rPr>
               <a:t>5</a:t>
             </a:r>
@@ -10336,11 +10434,11 @@
             <a:r>
               <a:rPr lang="en-US" sz="1400" b="1" dirty="0">
                 <a:solidFill>
-                  <a:srgbClr val="0B6E69"/>
-                </a:solidFill>
-                <a:latin typeface="Calibri" pitchFamily="34" charset="0"/>
-                <a:ea typeface="Calibri" pitchFamily="34" charset="-122"/>
-                <a:cs typeface="Calibri" pitchFamily="34" charset="-120"/>
+                  <a:srgbClr val="7A003F"/>
+                </a:solidFill>
+                <a:latin typeface="Lucida Sans" pitchFamily="34" charset="0"/>
+                <a:ea typeface="Lucida Sans" pitchFamily="34" charset="-122"/>
+                <a:cs typeface="Lucida Sans" pitchFamily="34" charset="-120"/>
               </a:rPr>
               <a:t>78–85</a:t>
             </a:r>
@@ -10365,11 +10463,11 @@
             </a:avLst>
           </a:prstGeom>
           <a:solidFill>
-            <a:srgbClr val="E6F2F1"/>
+            <a:srgbClr val="F2F2F2"/>
           </a:solidFill>
           <a:ln w="12700">
             <a:solidFill>
-              <a:srgbClr val="E6F2F1"/>
+              <a:srgbClr val="F2F2F2"/>
             </a:solidFill>
             <a:prstDash val="solid"/>
           </a:ln>
@@ -10402,11 +10500,11 @@
             <a:r>
               <a:rPr lang="en-US" sz="1600" b="1" dirty="0">
                 <a:solidFill>
-                  <a:srgbClr val="0B3C49"/>
-                </a:solidFill>
-                <a:latin typeface="Calibri" pitchFamily="34" charset="0"/>
-                <a:ea typeface="Calibri" pitchFamily="34" charset="-122"/>
-                <a:cs typeface="Calibri" pitchFamily="34" charset="-120"/>
+                  <a:srgbClr val="7A003F"/>
+                </a:solidFill>
+                <a:latin typeface="Lucida Sans" pitchFamily="34" charset="0"/>
+                <a:ea typeface="Lucida Sans" pitchFamily="34" charset="-122"/>
+                <a:cs typeface="Lucida Sans" pitchFamily="34" charset="-120"/>
               </a:rPr>
               <a:t>Vernetzung</a:t>
             </a:r>
@@ -10439,17 +10537,17 @@
               <a:buNone/>
             </a:pPr>
             <a:r>
-              <a:rPr lang="en-US" sz="1500" dirty="0">
-                <a:solidFill>
-                  <a:srgbClr val="1F2A30"/>
-                </a:solidFill>
-                <a:latin typeface="Calibri" pitchFamily="34" charset="0"/>
-                <a:ea typeface="Calibri" pitchFamily="34" charset="-122"/>
-                <a:cs typeface="Calibri" pitchFamily="34" charset="-120"/>
+              <a:rPr lang="en-US" sz="1250" dirty="0">
+                <a:solidFill>
+                  <a:srgbClr val="1D1D1B"/>
+                </a:solidFill>
+                <a:latin typeface="Lucida Sans" pitchFamily="34" charset="0"/>
+                <a:ea typeface="Lucida Sans" pitchFamily="34" charset="-122"/>
+                <a:cs typeface="Lucida Sans" pitchFamily="34" charset="-120"/>
               </a:rPr>
               <a:t>Übergabe-Matrix, Freitag</a:t>
             </a:r>
-            <a:endParaRPr lang="en-US" sz="1500" dirty="0"/>
+            <a:endParaRPr lang="en-US" sz="1250" dirty="0"/>
           </a:p>
         </p:txBody>
       </p:sp>
@@ -10468,11 +10566,11 @@
             <a:avLst/>
           </a:prstGeom>
           <a:solidFill>
-            <a:srgbClr val="0B6E69"/>
+            <a:srgbClr val="7A003F"/>
           </a:solidFill>
           <a:ln w="12700">
             <a:solidFill>
-              <a:srgbClr val="0B6E69"/>
+              <a:srgbClr val="7A003F"/>
             </a:solidFill>
             <a:prstDash val="solid"/>
           </a:ln>
@@ -10507,9 +10605,9 @@
                 <a:solidFill>
                   <a:srgbClr val="FFFFFF"/>
                 </a:solidFill>
-                <a:latin typeface="Calibri" pitchFamily="34" charset="0"/>
-                <a:ea typeface="Calibri" pitchFamily="34" charset="-122"/>
-                <a:cs typeface="Calibri" pitchFamily="34" charset="-120"/>
+                <a:latin typeface="Lucida Sans" pitchFamily="34" charset="0"/>
+                <a:ea typeface="Lucida Sans" pitchFamily="34" charset="-122"/>
+                <a:cs typeface="Lucida Sans" pitchFamily="34" charset="-120"/>
               </a:rPr>
               <a:t>6</a:t>
             </a:r>
@@ -10544,11 +10642,11 @@
             <a:r>
               <a:rPr lang="en-US" sz="1400" b="1" dirty="0">
                 <a:solidFill>
-                  <a:srgbClr val="0B6E69"/>
-                </a:solidFill>
-                <a:latin typeface="Calibri" pitchFamily="34" charset="0"/>
-                <a:ea typeface="Calibri" pitchFamily="34" charset="-122"/>
-                <a:cs typeface="Calibri" pitchFamily="34" charset="-120"/>
+                  <a:srgbClr val="7A003F"/>
+                </a:solidFill>
+                <a:latin typeface="Lucida Sans" pitchFamily="34" charset="0"/>
+                <a:ea typeface="Lucida Sans" pitchFamily="34" charset="-122"/>
+                <a:cs typeface="Lucida Sans" pitchFamily="34" charset="-120"/>
               </a:rPr>
               <a:t>85–90</a:t>
             </a:r>
@@ -10573,11 +10671,11 @@
             </a:avLst>
           </a:prstGeom>
           <a:solidFill>
-            <a:srgbClr val="E6F2F1"/>
+            <a:srgbClr val="F2F2F2"/>
           </a:solidFill>
           <a:ln w="12700">
             <a:solidFill>
-              <a:srgbClr val="E6F2F1"/>
+              <a:srgbClr val="F2F2F2"/>
             </a:solidFill>
             <a:prstDash val="solid"/>
           </a:ln>
@@ -10610,11 +10708,11 @@
             <a:r>
               <a:rPr lang="en-US" sz="1600" b="1" dirty="0">
                 <a:solidFill>
-                  <a:srgbClr val="0B3C49"/>
-                </a:solidFill>
-                <a:latin typeface="Calibri" pitchFamily="34" charset="0"/>
-                <a:ea typeface="Calibri" pitchFamily="34" charset="-122"/>
-                <a:cs typeface="Calibri" pitchFamily="34" charset="-120"/>
+                  <a:srgbClr val="7A003F"/>
+                </a:solidFill>
+                <a:latin typeface="Lucida Sans" pitchFamily="34" charset="0"/>
+                <a:ea typeface="Lucida Sans" pitchFamily="34" charset="-122"/>
+                <a:cs typeface="Lucida Sans" pitchFamily="34" charset="-120"/>
               </a:rPr>
               <a:t>Abschluss</a:t>
             </a:r>
@@ -10647,17 +10745,17 @@
               <a:buNone/>
             </a:pPr>
             <a:r>
-              <a:rPr lang="en-US" sz="1500" dirty="0">
-                <a:solidFill>
-                  <a:srgbClr val="1F2A30"/>
-                </a:solidFill>
-                <a:latin typeface="Calibri" pitchFamily="34" charset="0"/>
-                <a:ea typeface="Calibri" pitchFamily="34" charset="-122"/>
-                <a:cs typeface="Calibri" pitchFamily="34" charset="-120"/>
+              <a:rPr lang="en-US" sz="1250" dirty="0">
+                <a:solidFill>
+                  <a:srgbClr val="1D1D1B"/>
+                </a:solidFill>
+                <a:latin typeface="Lucida Sans" pitchFamily="34" charset="0"/>
+                <a:ea typeface="Lucida Sans" pitchFamily="34" charset="-122"/>
+                <a:cs typeface="Lucida Sans" pitchFamily="34" charset="-120"/>
               </a:rPr>
               <a:t>Selbstcheck, Praxisauftrag, Evaluation</a:t>
             </a:r>
-            <a:endParaRPr lang="en-US" sz="1500" dirty="0"/>
+            <a:endParaRPr lang="en-US" sz="1250" dirty="0"/>
           </a:p>
         </p:txBody>
       </p:sp>
@@ -10691,11 +10789,11 @@
             <a:lvl1pPr>
               <a:defRPr sz="1000">
                 <a:solidFill>
-                  <a:srgbClr val="5B6B73"/>
-                </a:solidFill>
-                <a:latin typeface="Calibri"/>
-                <a:ea typeface="Calibri"/>
-                <a:cs typeface="Calibri"/>
+                  <a:srgbClr val="706F6F"/>
+                </a:solidFill>
+                <a:latin typeface="Lucida Sans"/>
+                <a:ea typeface="Lucida Sans"/>
+                <a:cs typeface="Lucida Sans"/>
               </a:defRPr>
             </a:lvl1pPr>
           </a:lstStyle>
@@ -10739,13 +10837,52 @@
           <p:cNvPr id="2" name="Text 1"/>
           <p:cNvSpPr/>
           <p:nvPr>
-            <p:ph idx="101" type="title" hasCustomPrompt="1"/>
+            <p:ph idx="102" type="title" hasCustomPrompt="1"/>
           </p:nvPr>
         </p:nvSpPr>
         <p:spPr>
           <a:xfrm>
-            <a:off x="548640" y="320040"/>
-            <a:ext cx="11094415" cy="777240"/>
+            <a:off x="548640" y="274320"/>
+            <a:ext cx="8351215" cy="896112"/>
+          </a:xfrm>
+          <a:prstGeom prst="rect">
+            <a:avLst/>
+          </a:prstGeom>
+          <a:noFill/>
+          <a:ln/>
+        </p:spPr>
+        <p:txBody>
+          <a:bodyPr wrap="square" lIns="0" tIns="0" rIns="0" bIns="0" rtlCol="0" anchor="ctr"/>
+          <a:lstStyle/>
+          <a:p>
+            <a:pPr algn="l" indent="0" marL="0">
+              <a:buNone/>
+            </a:pPr>
+            <a:r>
+              <a:rPr lang="en-US" sz="2600" b="1" dirty="0">
+                <a:solidFill>
+                  <a:srgbClr val="7A003F"/>
+                </a:solidFill>
+                <a:latin typeface="Lucida Sans" pitchFamily="34" charset="0"/>
+                <a:ea typeface="Lucida Sans" pitchFamily="34" charset="-122"/>
+                <a:cs typeface="Lucida Sans" pitchFamily="34" charset="-120"/>
+              </a:rPr>
+              <a:t>Rollen in Ihrer Fachgruppe</a:t>
+            </a:r>
+            <a:endParaRPr lang="en-US" sz="2600" dirty="0"/>
+          </a:p>
+        </p:txBody>
+      </p:sp>
+      <p:sp>
+        <p:nvSpPr>
+          <p:cNvPr id="3" name="Text 1"/>
+          <p:cNvSpPr txBox="1"/>
+          <p:nvPr/>
+        </p:nvSpPr>
+        <p:spPr>
+          <a:xfrm>
+            <a:off x="548640" y="1234440"/>
+            <a:ext cx="11094415" cy="640080"/>
           </a:xfrm>
           <a:prstGeom prst="rect">
             <a:avLst/>
@@ -10761,52 +10898,13 @@
               <a:buNone/>
             </a:pPr>
             <a:r>
-              <a:rPr lang="en-US" sz="3200" b="1" dirty="0">
-                <a:solidFill>
-                  <a:srgbClr val="0B3C49"/>
-                </a:solidFill>
-                <a:latin typeface="Cambria" pitchFamily="34" charset="0"/>
-                <a:ea typeface="Cambria" pitchFamily="34" charset="-122"/>
-                <a:cs typeface="Cambria" pitchFamily="34" charset="-120"/>
-              </a:rPr>
-              <a:t>Rollen in Ihrer Fachgruppe</a:t>
-            </a:r>
-            <a:endParaRPr lang="en-US" sz="3200" dirty="0"/>
-          </a:p>
-        </p:txBody>
-      </p:sp>
-      <p:sp>
-        <p:nvSpPr>
-          <p:cNvPr id="3" name="Text 1"/>
-          <p:cNvSpPr txBox="1"/>
-          <p:nvPr/>
-        </p:nvSpPr>
-        <p:spPr>
-          <a:xfrm>
-            <a:off x="548640" y="1234440"/>
-            <a:ext cx="11094415" cy="640080"/>
-          </a:xfrm>
-          <a:prstGeom prst="rect">
-            <a:avLst/>
-          </a:prstGeom>
-          <a:noFill/>
-          <a:ln/>
-        </p:spPr>
-        <p:txBody>
-          <a:bodyPr wrap="square" lIns="0" tIns="0" rIns="0" bIns="0" rtlCol="0" anchor="ctr"/>
-          <a:lstStyle/>
-          <a:p>
-            <a:pPr indent="0" marL="0">
-              <a:buNone/>
-            </a:pPr>
-            <a:r>
               <a:rPr lang="en-US" sz="1700" dirty="0">
                 <a:solidFill>
-                  <a:srgbClr val="5B6B73"/>
-                </a:solidFill>
-                <a:latin typeface="Calibri" pitchFamily="34" charset="0"/>
-                <a:ea typeface="Calibri" pitchFamily="34" charset="-122"/>
-                <a:cs typeface="Calibri" pitchFamily="34" charset="-120"/>
+                  <a:srgbClr val="706F6F"/>
+                </a:solidFill>
+                <a:latin typeface="Lucida Sans" pitchFamily="34" charset="0"/>
+                <a:ea typeface="Lucida Sans" pitchFamily="34" charset="-122"/>
+                <a:cs typeface="Lucida Sans" pitchFamily="34" charset="-120"/>
               </a:rPr>
               <a:t>Wechsel nach dem Kernauftrag – damit sich alle beteiligen.</a:t>
             </a:r>
@@ -10831,11 +10929,11 @@
             </a:avLst>
           </a:prstGeom>
           <a:solidFill>
-            <a:srgbClr val="E6F2F1"/>
+            <a:srgbClr val="F2F2F2"/>
           </a:solidFill>
           <a:ln w="12700">
             <a:solidFill>
-              <a:srgbClr val="E6F2F1"/>
+              <a:srgbClr val="F2F2F2"/>
             </a:solidFill>
             <a:prstDash val="solid"/>
           </a:ln>
@@ -10856,11 +10954,11 @@
             <a:avLst/>
           </a:prstGeom>
           <a:solidFill>
-            <a:srgbClr val="0B6E69"/>
+            <a:srgbClr val="7A003F"/>
           </a:solidFill>
           <a:ln w="12700">
             <a:solidFill>
-              <a:srgbClr val="0B6E69"/>
+              <a:srgbClr val="7A003F"/>
             </a:solidFill>
             <a:prstDash val="solid"/>
           </a:ln>
@@ -10895,9 +10993,9 @@
                 <a:solidFill>
                   <a:srgbClr val="FFFFFF"/>
                 </a:solidFill>
-                <a:latin typeface="Calibri" pitchFamily="34" charset="0"/>
-                <a:ea typeface="Calibri" pitchFamily="34" charset="-122"/>
-                <a:cs typeface="Calibri" pitchFamily="34" charset="-120"/>
+                <a:latin typeface="Lucida Sans" pitchFamily="34" charset="0"/>
+                <a:ea typeface="Lucida Sans" pitchFamily="34" charset="-122"/>
+                <a:cs typeface="Lucida Sans" pitchFamily="34" charset="-120"/>
               </a:rPr>
               <a:t>1</a:t>
             </a:r>
@@ -10932,11 +11030,11 @@
             <a:r>
               <a:rPr lang="en-US" sz="1800" b="1" dirty="0">
                 <a:solidFill>
-                  <a:srgbClr val="0B3C49"/>
-                </a:solidFill>
-                <a:latin typeface="Calibri" pitchFamily="34" charset="0"/>
-                <a:ea typeface="Calibri" pitchFamily="34" charset="-122"/>
-                <a:cs typeface="Calibri" pitchFamily="34" charset="-120"/>
+                  <a:srgbClr val="7A003F"/>
+                </a:solidFill>
+                <a:latin typeface="Lucida Sans" pitchFamily="34" charset="0"/>
+                <a:ea typeface="Lucida Sans" pitchFamily="34" charset="-122"/>
+                <a:cs typeface="Lucida Sans" pitchFamily="34" charset="-120"/>
               </a:rPr>
               <a:t>Bedienung</a:t>
             </a:r>
@@ -10975,11 +11073,11 @@
             <a:r>
               <a:rPr lang="en-US" sz="1700" dirty="0">
                 <a:solidFill>
-                  <a:srgbClr val="1F2A30"/>
-                </a:solidFill>
-                <a:latin typeface="Calibri" pitchFamily="34" charset="0"/>
-                <a:ea typeface="Calibri" pitchFamily="34" charset="-122"/>
-                <a:cs typeface="Calibri" pitchFamily="34" charset="-120"/>
+                  <a:srgbClr val="1D1D1B"/>
+                </a:solidFill>
+                <a:latin typeface="Lucida Sans" pitchFamily="34" charset="0"/>
+                <a:ea typeface="Lucida Sans" pitchFamily="34" charset="-122"/>
+                <a:cs typeface="Lucida Sans" pitchFamily="34" charset="-120"/>
               </a:rPr>
               <a:t>programmiert und startet den mBot2</a:t>
             </a:r>
@@ -10996,11 +11094,11 @@
             <a:r>
               <a:rPr lang="en-US" sz="1700" dirty="0">
                 <a:solidFill>
-                  <a:srgbClr val="1F2A30"/>
-                </a:solidFill>
-                <a:latin typeface="Calibri" pitchFamily="34" charset="0"/>
-                <a:ea typeface="Calibri" pitchFamily="34" charset="-122"/>
-                <a:cs typeface="Calibri" pitchFamily="34" charset="-120"/>
+                  <a:srgbClr val="1D1D1B"/>
+                </a:solidFill>
+                <a:latin typeface="Lucida Sans" pitchFamily="34" charset="0"/>
+                <a:ea typeface="Lucida Sans" pitchFamily="34" charset="-122"/>
+                <a:cs typeface="Lucida Sans" pitchFamily="34" charset="-120"/>
               </a:rPr>
               <a:t>setzt die Aufgabe praktisch um</a:t>
             </a:r>
@@ -11025,11 +11123,11 @@
             </a:avLst>
           </a:prstGeom>
           <a:solidFill>
-            <a:srgbClr val="FCEBDD"/>
+            <a:srgbClr val="FDF0E3"/>
           </a:solidFill>
           <a:ln w="12700">
             <a:solidFill>
-              <a:srgbClr val="FCEBDD"/>
+              <a:srgbClr val="FDF0E3"/>
             </a:solidFill>
             <a:prstDash val="solid"/>
           </a:ln>
@@ -11050,11 +11148,11 @@
             <a:avLst/>
           </a:prstGeom>
           <a:solidFill>
-            <a:srgbClr val="E8772E"/>
+            <a:srgbClr val="EF7D00"/>
           </a:solidFill>
           <a:ln w="12700">
             <a:solidFill>
-              <a:srgbClr val="E8772E"/>
+              <a:srgbClr val="EF7D00"/>
             </a:solidFill>
             <a:prstDash val="solid"/>
           </a:ln>
@@ -11087,11 +11185,11 @@
             <a:r>
               <a:rPr lang="en-US" sz="1600" b="1" dirty="0">
                 <a:solidFill>
-                  <a:srgbClr val="FFFFFF"/>
-                </a:solidFill>
-                <a:latin typeface="Calibri" pitchFamily="34" charset="0"/>
-                <a:ea typeface="Calibri" pitchFamily="34" charset="-122"/>
-                <a:cs typeface="Calibri" pitchFamily="34" charset="-120"/>
+                  <a:srgbClr val="1D1D1B"/>
+                </a:solidFill>
+                <a:latin typeface="Lucida Sans" pitchFamily="34" charset="0"/>
+                <a:ea typeface="Lucida Sans" pitchFamily="34" charset="-122"/>
+                <a:cs typeface="Lucida Sans" pitchFamily="34" charset="-120"/>
               </a:rPr>
               <a:t>2</a:t>
             </a:r>
@@ -11126,11 +11224,11 @@
             <a:r>
               <a:rPr lang="en-US" sz="1800" b="1" dirty="0">
                 <a:solidFill>
-                  <a:srgbClr val="0B3C49"/>
-                </a:solidFill>
-                <a:latin typeface="Calibri" pitchFamily="34" charset="0"/>
-                <a:ea typeface="Calibri" pitchFamily="34" charset="-122"/>
-                <a:cs typeface="Calibri" pitchFamily="34" charset="-120"/>
+                  <a:srgbClr val="7A003F"/>
+                </a:solidFill>
+                <a:latin typeface="Lucida Sans" pitchFamily="34" charset="0"/>
+                <a:ea typeface="Lucida Sans" pitchFamily="34" charset="-122"/>
+                <a:cs typeface="Lucida Sans" pitchFamily="34" charset="-120"/>
               </a:rPr>
               <a:t>Zeit und Beobachtung</a:t>
             </a:r>
@@ -11169,11 +11267,11 @@
             <a:r>
               <a:rPr lang="en-US" sz="1700" dirty="0">
                 <a:solidFill>
-                  <a:srgbClr val="1F2A30"/>
-                </a:solidFill>
-                <a:latin typeface="Calibri" pitchFamily="34" charset="0"/>
-                <a:ea typeface="Calibri" pitchFamily="34" charset="-122"/>
-                <a:cs typeface="Calibri" pitchFamily="34" charset="-120"/>
+                  <a:srgbClr val="1D1D1B"/>
+                </a:solidFill>
+                <a:latin typeface="Lucida Sans" pitchFamily="34" charset="0"/>
+                <a:ea typeface="Lucida Sans" pitchFamily="34" charset="-122"/>
+                <a:cs typeface="Lucida Sans" pitchFamily="34" charset="-120"/>
               </a:rPr>
               <a:t>stoppt die Dauer jedes Schritts</a:t>
             </a:r>
@@ -11190,11 +11288,11 @@
             <a:r>
               <a:rPr lang="en-US" sz="1700" dirty="0">
                 <a:solidFill>
-                  <a:srgbClr val="1F2A30"/>
-                </a:solidFill>
-                <a:latin typeface="Calibri" pitchFamily="34" charset="0"/>
-                <a:ea typeface="Calibri" pitchFamily="34" charset="-122"/>
-                <a:cs typeface="Calibri" pitchFamily="34" charset="-120"/>
+                  <a:srgbClr val="1D1D1B"/>
+                </a:solidFill>
+                <a:latin typeface="Lucida Sans" pitchFamily="34" charset="0"/>
+                <a:ea typeface="Lucida Sans" pitchFamily="34" charset="-122"/>
+                <a:cs typeface="Lucida Sans" pitchFamily="34" charset="-120"/>
               </a:rPr>
               <a:t>notiert Stolperstellen und Aha-Momente</a:t>
             </a:r>
@@ -11211,11 +11309,11 @@
             <a:r>
               <a:rPr lang="en-US" sz="1700" dirty="0">
                 <a:solidFill>
-                  <a:srgbClr val="1F2A30"/>
-                </a:solidFill>
-                <a:latin typeface="Calibri" pitchFamily="34" charset="0"/>
-                <a:ea typeface="Calibri" pitchFamily="34" charset="-122"/>
-                <a:cs typeface="Calibri" pitchFamily="34" charset="-120"/>
+                  <a:srgbClr val="1D1D1B"/>
+                </a:solidFill>
+                <a:latin typeface="Lucida Sans" pitchFamily="34" charset="0"/>
+                <a:ea typeface="Lucida Sans" pitchFamily="34" charset="-122"/>
+                <a:cs typeface="Lucida Sans" pitchFamily="34" charset="-120"/>
               </a:rPr>
               <a:t>→ Grundlage Ihrer Zeitplanung</a:t>
             </a:r>
@@ -11240,11 +11338,11 @@
             </a:avLst>
           </a:prstGeom>
           <a:solidFill>
-            <a:srgbClr val="E6F2F1"/>
+            <a:srgbClr val="F2F2F2"/>
           </a:solidFill>
           <a:ln w="12700">
             <a:solidFill>
-              <a:srgbClr val="E6F2F1"/>
+              <a:srgbClr val="F2F2F2"/>
             </a:solidFill>
             <a:prstDash val="solid"/>
           </a:ln>
@@ -11265,11 +11363,11 @@
             <a:avLst/>
           </a:prstGeom>
           <a:solidFill>
-            <a:srgbClr val="0B6E69"/>
+            <a:srgbClr val="7A003F"/>
           </a:solidFill>
           <a:ln w="12700">
             <a:solidFill>
-              <a:srgbClr val="0B6E69"/>
+              <a:srgbClr val="7A003F"/>
             </a:solidFill>
             <a:prstDash val="solid"/>
           </a:ln>
@@ -11304,9 +11402,9 @@
                 <a:solidFill>
                   <a:srgbClr val="FFFFFF"/>
                 </a:solidFill>
-                <a:latin typeface="Calibri" pitchFamily="34" charset="0"/>
-                <a:ea typeface="Calibri" pitchFamily="34" charset="-122"/>
-                <a:cs typeface="Calibri" pitchFamily="34" charset="-120"/>
+                <a:latin typeface="Lucida Sans" pitchFamily="34" charset="0"/>
+                <a:ea typeface="Lucida Sans" pitchFamily="34" charset="-122"/>
+                <a:cs typeface="Lucida Sans" pitchFamily="34" charset="-120"/>
               </a:rPr>
               <a:t>3</a:t>
             </a:r>
@@ -11341,11 +11439,11 @@
             <a:r>
               <a:rPr lang="en-US" sz="1800" b="1" dirty="0">
                 <a:solidFill>
-                  <a:srgbClr val="0B3C49"/>
-                </a:solidFill>
-                <a:latin typeface="Calibri" pitchFamily="34" charset="0"/>
-                <a:ea typeface="Calibri" pitchFamily="34" charset="-122"/>
-                <a:cs typeface="Calibri" pitchFamily="34" charset="-120"/>
+                  <a:srgbClr val="7A003F"/>
+                </a:solidFill>
+                <a:latin typeface="Lucida Sans" pitchFamily="34" charset="0"/>
+                <a:ea typeface="Lucida Sans" pitchFamily="34" charset="-122"/>
+                <a:cs typeface="Lucida Sans" pitchFamily="34" charset="-120"/>
               </a:rPr>
               <a:t>Dokumentation</a:t>
             </a:r>
@@ -11384,11 +11482,11 @@
             <a:r>
               <a:rPr lang="en-US" sz="1700" dirty="0">
                 <a:solidFill>
-                  <a:srgbClr val="1F2A30"/>
-                </a:solidFill>
-                <a:latin typeface="Calibri" pitchFamily="34" charset="0"/>
-                <a:ea typeface="Calibri" pitchFamily="34" charset="-122"/>
-                <a:cs typeface="Calibri" pitchFamily="34" charset="-120"/>
+                  <a:srgbClr val="1D1D1B"/>
+                </a:solidFill>
+                <a:latin typeface="Lucida Sans" pitchFamily="34" charset="0"/>
+                <a:ea typeface="Lucida Sans" pitchFamily="34" charset="-122"/>
+                <a:cs typeface="Lucida Sans" pitchFamily="34" charset="-120"/>
               </a:rPr>
               <a:t>hält Ergebnisse, Messwerte, Programme fest</a:t>
             </a:r>
@@ -11405,11 +11503,11 @@
             <a:r>
               <a:rPr lang="en-US" sz="1700" dirty="0">
                 <a:solidFill>
-                  <a:srgbClr val="1F2A30"/>
-                </a:solidFill>
-                <a:latin typeface="Calibri" pitchFamily="34" charset="0"/>
-                <a:ea typeface="Calibri" pitchFamily="34" charset="-122"/>
-                <a:cs typeface="Calibri" pitchFamily="34" charset="-120"/>
+                  <a:srgbClr val="1D1D1B"/>
+                </a:solidFill>
+                <a:latin typeface="Lucida Sans" pitchFamily="34" charset="0"/>
+                <a:ea typeface="Lucida Sans" pitchFamily="34" charset="-122"/>
+                <a:cs typeface="Lucida Sans" pitchFamily="34" charset="-120"/>
               </a:rPr>
               <a:t>bereitet die Präsentation vor</a:t>
             </a:r>
@@ -11434,11 +11532,11 @@
             </a:avLst>
           </a:prstGeom>
           <a:solidFill>
-            <a:srgbClr val="FCEBDD"/>
+            <a:srgbClr val="FDF0E3"/>
           </a:solidFill>
           <a:ln w="12700">
             <a:solidFill>
-              <a:srgbClr val="FCEBDD"/>
+              <a:srgbClr val="FDF0E3"/>
             </a:solidFill>
             <a:prstDash val="solid"/>
           </a:ln>
@@ -11459,11 +11557,11 @@
             <a:avLst/>
           </a:prstGeom>
           <a:solidFill>
-            <a:srgbClr val="E8772E"/>
+            <a:srgbClr val="EF7D00"/>
           </a:solidFill>
           <a:ln w="12700">
             <a:solidFill>
-              <a:srgbClr val="E8772E"/>
+              <a:srgbClr val="EF7D00"/>
             </a:solidFill>
             <a:prstDash val="solid"/>
           </a:ln>
@@ -11496,11 +11594,11 @@
             <a:r>
               <a:rPr lang="en-US" sz="2000" b="1" dirty="0">
                 <a:solidFill>
-                  <a:srgbClr val="FFFFFF"/>
-                </a:solidFill>
-                <a:latin typeface="Calibri" pitchFamily="34" charset="0"/>
-                <a:ea typeface="Calibri" pitchFamily="34" charset="-122"/>
-                <a:cs typeface="Calibri" pitchFamily="34" charset="-120"/>
+                  <a:srgbClr val="1D1D1B"/>
+                </a:solidFill>
+                <a:latin typeface="Lucida Sans" pitchFamily="34" charset="0"/>
+                <a:ea typeface="Lucida Sans" pitchFamily="34" charset="-122"/>
+                <a:cs typeface="Lucida Sans" pitchFamily="34" charset="-120"/>
               </a:rPr>
               <a:t>!</a:t>
             </a:r>
@@ -11535,11 +11633,11 @@
             <a:r>
               <a:rPr lang="en-US" sz="1500" dirty="0">
                 <a:solidFill>
-                  <a:srgbClr val="0B3C49"/>
-                </a:solidFill>
-                <a:latin typeface="Calibri" pitchFamily="34" charset="0"/>
-                <a:ea typeface="Calibri" pitchFamily="34" charset="-122"/>
-                <a:cs typeface="Calibri" pitchFamily="34" charset="-120"/>
+                  <a:srgbClr val="7A003F"/>
+                </a:solidFill>
+                <a:latin typeface="Lucida Sans" pitchFamily="34" charset="0"/>
+                <a:ea typeface="Lucida Sans" pitchFamily="34" charset="-122"/>
+                <a:cs typeface="Lucida Sans" pitchFamily="34" charset="-120"/>
               </a:rPr>
               <a:t>Jede Aufgabenkarte hat einen Kernauftrag (Pflicht, 20 Min.) und eine Erweiterung (optional, 10 Min.).</a:t>
             </a:r>
@@ -11577,11 +11675,11 @@
             <a:lvl1pPr>
               <a:defRPr sz="1000">
                 <a:solidFill>
-                  <a:srgbClr val="5B6B73"/>
-                </a:solidFill>
-                <a:latin typeface="Calibri"/>
-                <a:ea typeface="Calibri"/>
-                <a:cs typeface="Calibri"/>
+                  <a:srgbClr val="706F6F"/>
+                </a:solidFill>
+                <a:latin typeface="Lucida Sans"/>
+                <a:ea typeface="Lucida Sans"/>
+                <a:cs typeface="Lucida Sans"/>
               </a:defRPr>
             </a:lvl1pPr>
           </a:lstStyle>
@@ -11625,13 +11723,13 @@
           <p:cNvPr id="2" name="Text 1"/>
           <p:cNvSpPr/>
           <p:nvPr>
-            <p:ph idx="101" type="title" hasCustomPrompt="1"/>
+            <p:ph idx="102" type="title" hasCustomPrompt="1"/>
           </p:nvPr>
         </p:nvSpPr>
         <p:spPr>
           <a:xfrm>
-            <a:off x="548640" y="320040"/>
-            <a:ext cx="11094415" cy="777240"/>
+            <a:off x="548640" y="274320"/>
+            <a:ext cx="8351215" cy="896112"/>
           </a:xfrm>
           <a:prstGeom prst="rect">
             <a:avLst/>
@@ -11643,21 +11741,21 @@
           <a:bodyPr wrap="square" lIns="0" tIns="0" rIns="0" bIns="0" rtlCol="0" anchor="ctr"/>
           <a:lstStyle/>
           <a:p>
-            <a:pPr indent="0" marL="0">
+            <a:pPr algn="l" indent="0" marL="0">
               <a:buNone/>
             </a:pPr>
             <a:r>
-              <a:rPr lang="en-US" sz="3200" b="1" dirty="0">
-                <a:solidFill>
-                  <a:srgbClr val="0B3C49"/>
-                </a:solidFill>
-                <a:latin typeface="Cambria" pitchFamily="34" charset="0"/>
-                <a:ea typeface="Cambria" pitchFamily="34" charset="-122"/>
-                <a:cs typeface="Cambria" pitchFamily="34" charset="-120"/>
+              <a:rPr lang="en-US" sz="2600" b="1" dirty="0">
+                <a:solidFill>
+                  <a:srgbClr val="7A003F"/>
+                </a:solidFill>
+                <a:latin typeface="Lucida Sans" pitchFamily="34" charset="0"/>
+                <a:ea typeface="Lucida Sans" pitchFamily="34" charset="-122"/>
+                <a:cs typeface="Lucida Sans" pitchFamily="34" charset="-120"/>
               </a:rPr>
               <a:t>Die Erprobungsaufträge</a:t>
             </a:r>
-            <a:endParaRPr lang="en-US" sz="3200" dirty="0"/>
+            <a:endParaRPr lang="en-US" sz="2600" dirty="0"/>
           </a:p>
         </p:txBody>
       </p:sp>
@@ -11701,23 +11799,23 @@
                           <a:solidFill>
                             <a:srgbClr val="FFFFFF"/>
                           </a:solidFill>
-                          <a:latin typeface="Calibri" pitchFamily="34" charset="0"/>
-                          <a:ea typeface="Calibri" pitchFamily="34" charset="-122"/>
-                          <a:cs typeface="Calibri" pitchFamily="34" charset="-120"/>
+                          <a:latin typeface="Lucida Sans" pitchFamily="34" charset="0"/>
+                          <a:ea typeface="Lucida Sans" pitchFamily="34" charset="-122"/>
+                          <a:cs typeface="Lucida Sans" pitchFamily="34" charset="-120"/>
                         </a:rPr>
                         <a:t>Gruppe</a:t>
                       </a:r>
                       <a:endParaRPr lang="en-US" sz="1600" dirty="0">
-                        <a:latin typeface="Calibri" charset="0"/>
-                        <a:ea typeface="Calibri" charset="0"/>
-                        <a:cs typeface="Calibri" charset="0"/>
+                        <a:latin typeface="Lucida Sans" charset="0"/>
+                        <a:ea typeface="Lucida Sans" charset="0"/>
+                        <a:cs typeface="Lucida Sans" charset="0"/>
                       </a:endParaRPr>
                     </a:p>
                   </a:txBody>
                   <a:tcPr marL="101600" marR="101600" marT="63500" marB="63500" anchor="ctr">
                     <a:lnL w="9525" cap="flat" cmpd="sng" algn="ctr">
                       <a:solidFill>
-                        <a:srgbClr val="C9DAD8"/>
+                        <a:srgbClr val="D9D9D9"/>
                       </a:solidFill>
                       <a:prstDash val="solid"/>
                       <a:round/>
@@ -11726,7 +11824,7 @@
                     </a:lnL>
                     <a:lnR w="9525" cap="flat" cmpd="sng" algn="ctr">
                       <a:solidFill>
-                        <a:srgbClr val="C9DAD8"/>
+                        <a:srgbClr val="D9D9D9"/>
                       </a:solidFill>
                       <a:prstDash val="solid"/>
                       <a:round/>
@@ -11735,7 +11833,7 @@
                     </a:lnR>
                     <a:lnT w="9525" cap="flat" cmpd="sng" algn="ctr">
                       <a:solidFill>
-                        <a:srgbClr val="C9DAD8"/>
+                        <a:srgbClr val="D9D9D9"/>
                       </a:solidFill>
                       <a:prstDash val="solid"/>
                       <a:round/>
@@ -11744,7 +11842,7 @@
                     </a:lnT>
                     <a:lnB w="9525" cap="flat" cmpd="sng" algn="ctr">
                       <a:solidFill>
-                        <a:srgbClr val="C9DAD8"/>
+                        <a:srgbClr val="D9D9D9"/>
                       </a:solidFill>
                       <a:prstDash val="solid"/>
                       <a:round/>
@@ -11752,7 +11850,7 @@
                       <a:tailEnd type="none" w="med" len="med"/>
                     </a:lnB>
                     <a:solidFill>
-                      <a:srgbClr val="0B6E69"/>
+                      <a:srgbClr val="7A003F"/>
                     </a:solidFill>
                   </a:tcPr>
                 </a:tc>
@@ -11769,23 +11867,23 @@
                           <a:solidFill>
                             <a:srgbClr val="FFFFFF"/>
                           </a:solidFill>
-                          <a:latin typeface="Calibri" pitchFamily="34" charset="0"/>
-                          <a:ea typeface="Calibri" pitchFamily="34" charset="-122"/>
-                          <a:cs typeface="Calibri" pitchFamily="34" charset="-120"/>
+                          <a:latin typeface="Lucida Sans" pitchFamily="34" charset="0"/>
+                          <a:ea typeface="Lucida Sans" pitchFamily="34" charset="-122"/>
+                          <a:cs typeface="Lucida Sans" pitchFamily="34" charset="-120"/>
                         </a:rPr>
                         <a:t>Kernauftrag (20 Min.)</a:t>
                       </a:r>
                       <a:endParaRPr lang="en-US" sz="1600" dirty="0">
-                        <a:latin typeface="Calibri" charset="0"/>
-                        <a:ea typeface="Calibri" charset="0"/>
-                        <a:cs typeface="Calibri" charset="0"/>
+                        <a:latin typeface="Lucida Sans" charset="0"/>
+                        <a:ea typeface="Lucida Sans" charset="0"/>
+                        <a:cs typeface="Lucida Sans" charset="0"/>
                       </a:endParaRPr>
                     </a:p>
                   </a:txBody>
                   <a:tcPr marL="101600" marR="101600" marT="63500" marB="63500" anchor="ctr">
                     <a:lnL w="9525" cap="flat" cmpd="sng" algn="ctr">
                       <a:solidFill>
-                        <a:srgbClr val="C9DAD8"/>
+                        <a:srgbClr val="D9D9D9"/>
                       </a:solidFill>
                       <a:prstDash val="solid"/>
                       <a:round/>
@@ -11794,7 +11892,7 @@
                     </a:lnL>
                     <a:lnR w="9525" cap="flat" cmpd="sng" algn="ctr">
                       <a:solidFill>
-                        <a:srgbClr val="C9DAD8"/>
+                        <a:srgbClr val="D9D9D9"/>
                       </a:solidFill>
                       <a:prstDash val="solid"/>
                       <a:round/>
@@ -11803,7 +11901,7 @@
                     </a:lnR>
                     <a:lnT w="9525" cap="flat" cmpd="sng" algn="ctr">
                       <a:solidFill>
-                        <a:srgbClr val="C9DAD8"/>
+                        <a:srgbClr val="D9D9D9"/>
                       </a:solidFill>
                       <a:prstDash val="solid"/>
                       <a:round/>
@@ -11812,7 +11910,7 @@
                     </a:lnT>
                     <a:lnB w="9525" cap="flat" cmpd="sng" algn="ctr">
                       <a:solidFill>
-                        <a:srgbClr val="C9DAD8"/>
+                        <a:srgbClr val="D9D9D9"/>
                       </a:solidFill>
                       <a:prstDash val="solid"/>
                       <a:round/>
@@ -11820,7 +11918,7 @@
                       <a:tailEnd type="none" w="med" len="med"/>
                     </a:lnB>
                     <a:solidFill>
-                      <a:srgbClr val="0B6E69"/>
+                      <a:srgbClr val="7A003F"/>
                     </a:solidFill>
                   </a:tcPr>
                 </a:tc>
@@ -11837,25 +11935,25 @@
                       <a:r>
                         <a:rPr lang="en-US" sz="1600" dirty="0">
                           <a:solidFill>
-                            <a:srgbClr val="1F2A30"/>
+                            <a:srgbClr val="1D1D1B"/>
                           </a:solidFill>
-                          <a:latin typeface="Calibri" pitchFamily="34" charset="0"/>
-                          <a:ea typeface="Calibri" pitchFamily="34" charset="-122"/>
-                          <a:cs typeface="Calibri" pitchFamily="34" charset="-120"/>
+                          <a:latin typeface="Lucida Sans" pitchFamily="34" charset="0"/>
+                          <a:ea typeface="Lucida Sans" pitchFamily="34" charset="-122"/>
+                          <a:cs typeface="Lucida Sans" pitchFamily="34" charset="-120"/>
                         </a:rPr>
                         <a:t>Mo · Technik</a:t>
                       </a:r>
                       <a:endParaRPr lang="en-US" sz="1600" dirty="0">
-                        <a:latin typeface="Calibri" charset="0"/>
-                        <a:ea typeface="Calibri" charset="0"/>
-                        <a:cs typeface="Calibri" charset="0"/>
+                        <a:latin typeface="Lucida Sans" charset="0"/>
+                        <a:ea typeface="Lucida Sans" charset="0"/>
+                        <a:cs typeface="Lucida Sans" charset="0"/>
                       </a:endParaRPr>
                     </a:p>
                   </a:txBody>
                   <a:tcPr marL="101600" marR="101600" marT="63500" marB="63500" anchor="ctr">
                     <a:lnL w="9525" cap="flat" cmpd="sng" algn="ctr">
                       <a:solidFill>
-                        <a:srgbClr val="C9DAD8"/>
+                        <a:srgbClr val="D9D9D9"/>
                       </a:solidFill>
                       <a:prstDash val="solid"/>
                       <a:round/>
@@ -11864,7 +11962,7 @@
                     </a:lnL>
                     <a:lnR w="9525" cap="flat" cmpd="sng" algn="ctr">
                       <a:solidFill>
-                        <a:srgbClr val="C9DAD8"/>
+                        <a:srgbClr val="D9D9D9"/>
                       </a:solidFill>
                       <a:prstDash val="solid"/>
                       <a:round/>
@@ -11873,7 +11971,7 @@
                     </a:lnR>
                     <a:lnT w="9525" cap="flat" cmpd="sng" algn="ctr">
                       <a:solidFill>
-                        <a:srgbClr val="C9DAD8"/>
+                        <a:srgbClr val="D9D9D9"/>
                       </a:solidFill>
                       <a:prstDash val="solid"/>
                       <a:round/>
@@ -11882,7 +11980,7 @@
                     </a:lnT>
                     <a:lnB w="9525" cap="flat" cmpd="sng" algn="ctr">
                       <a:solidFill>
-                        <a:srgbClr val="C9DAD8"/>
+                        <a:srgbClr val="D9D9D9"/>
                       </a:solidFill>
                       <a:prstDash val="solid"/>
                       <a:round/>
@@ -11905,25 +12003,25 @@
                       <a:r>
                         <a:rPr lang="en-US" sz="1600" dirty="0">
                           <a:solidFill>
-                            <a:srgbClr val="1F2A30"/>
+                            <a:srgbClr val="1D1D1B"/>
                           </a:solidFill>
-                          <a:latin typeface="Calibri" pitchFamily="34" charset="0"/>
-                          <a:ea typeface="Calibri" pitchFamily="34" charset="-122"/>
-                          <a:cs typeface="Calibri" pitchFamily="34" charset="-120"/>
+                          <a:latin typeface="Lucida Sans" pitchFamily="34" charset="0"/>
+                          <a:ea typeface="Lucida Sans" pitchFamily="34" charset="-122"/>
+                          <a:cs typeface="Lucida Sans" pitchFamily="34" charset="-120"/>
                         </a:rPr>
                         <a:t>Soll-Verhalten programmieren, genau einen reversiblen Fehler einbauen, Diagnoseauftrag schreiben, gegenseitig testen</a:t>
                       </a:r>
                       <a:endParaRPr lang="en-US" sz="1600" dirty="0">
-                        <a:latin typeface="Calibri" charset="0"/>
-                        <a:ea typeface="Calibri" charset="0"/>
-                        <a:cs typeface="Calibri" charset="0"/>
+                        <a:latin typeface="Lucida Sans" charset="0"/>
+                        <a:ea typeface="Lucida Sans" charset="0"/>
+                        <a:cs typeface="Lucida Sans" charset="0"/>
                       </a:endParaRPr>
                     </a:p>
                   </a:txBody>
                   <a:tcPr marL="101600" marR="101600" marT="63500" marB="63500" anchor="ctr">
                     <a:lnL w="9525" cap="flat" cmpd="sng" algn="ctr">
                       <a:solidFill>
-                        <a:srgbClr val="C9DAD8"/>
+                        <a:srgbClr val="D9D9D9"/>
                       </a:solidFill>
                       <a:prstDash val="solid"/>
                       <a:round/>
@@ -11932,7 +12030,7 @@
                     </a:lnL>
                     <a:lnR w="9525" cap="flat" cmpd="sng" algn="ctr">
                       <a:solidFill>
-                        <a:srgbClr val="C9DAD8"/>
+                        <a:srgbClr val="D9D9D9"/>
                       </a:solidFill>
                       <a:prstDash val="solid"/>
                       <a:round/>
@@ -11941,7 +12039,7 @@
                     </a:lnR>
                     <a:lnT w="9525" cap="flat" cmpd="sng" algn="ctr">
                       <a:solidFill>
-                        <a:srgbClr val="C9DAD8"/>
+                        <a:srgbClr val="D9D9D9"/>
                       </a:solidFill>
                       <a:prstDash val="solid"/>
                       <a:round/>
@@ -11950,7 +12048,7 @@
                     </a:lnT>
                     <a:lnB w="9525" cap="flat" cmpd="sng" algn="ctr">
                       <a:solidFill>
-                        <a:srgbClr val="C9DAD8"/>
+                        <a:srgbClr val="D9D9D9"/>
                       </a:solidFill>
                       <a:prstDash val="solid"/>
                       <a:round/>
@@ -11975,25 +12073,25 @@
                       <a:r>
                         <a:rPr lang="en-US" sz="1600" dirty="0">
                           <a:solidFill>
-                            <a:srgbClr val="1F2A30"/>
+                            <a:srgbClr val="1D1D1B"/>
                           </a:solidFill>
-                          <a:latin typeface="Calibri" pitchFamily="34" charset="0"/>
-                          <a:ea typeface="Calibri" pitchFamily="34" charset="-122"/>
-                          <a:cs typeface="Calibri" pitchFamily="34" charset="-120"/>
+                          <a:latin typeface="Lucida Sans" pitchFamily="34" charset="0"/>
+                          <a:ea typeface="Lucida Sans" pitchFamily="34" charset="-122"/>
+                          <a:cs typeface="Lucida Sans" pitchFamily="34" charset="-120"/>
                         </a:rPr>
                         <a:t>Di · Mathematik</a:t>
                       </a:r>
                       <a:endParaRPr lang="en-US" sz="1600" dirty="0">
-                        <a:latin typeface="Calibri" charset="0"/>
-                        <a:ea typeface="Calibri" charset="0"/>
-                        <a:cs typeface="Calibri" charset="0"/>
+                        <a:latin typeface="Lucida Sans" charset="0"/>
+                        <a:ea typeface="Lucida Sans" charset="0"/>
+                        <a:cs typeface="Lucida Sans" charset="0"/>
                       </a:endParaRPr>
                     </a:p>
                   </a:txBody>
                   <a:tcPr marL="101600" marR="101600" marT="63500" marB="63500" anchor="ctr">
                     <a:lnL w="9525" cap="flat" cmpd="sng" algn="ctr">
                       <a:solidFill>
-                        <a:srgbClr val="C9DAD8"/>
+                        <a:srgbClr val="D9D9D9"/>
                       </a:solidFill>
                       <a:prstDash val="solid"/>
                       <a:round/>
@@ -12002,7 +12100,7 @@
                     </a:lnL>
                     <a:lnR w="9525" cap="flat" cmpd="sng" algn="ctr">
                       <a:solidFill>
-                        <a:srgbClr val="C9DAD8"/>
+                        <a:srgbClr val="D9D9D9"/>
                       </a:solidFill>
                       <a:prstDash val="solid"/>
                       <a:round/>
@@ -12011,7 +12109,7 @@
                     </a:lnR>
                     <a:lnT w="9525" cap="flat" cmpd="sng" algn="ctr">
                       <a:solidFill>
-                        <a:srgbClr val="C9DAD8"/>
+                        <a:srgbClr val="D9D9D9"/>
                       </a:solidFill>
                       <a:prstDash val="solid"/>
                       <a:round/>
@@ -12020,7 +12118,7 @@
                     </a:lnT>
                     <a:lnB w="9525" cap="flat" cmpd="sng" algn="ctr">
                       <a:solidFill>
-                        <a:srgbClr val="C9DAD8"/>
+                        <a:srgbClr val="D9D9D9"/>
                       </a:solidFill>
                       <a:prstDash val="solid"/>
                       <a:round/>
@@ -12028,7 +12126,7 @@
                       <a:tailEnd type="none" w="med" len="med"/>
                     </a:lnB>
                     <a:solidFill>
-                      <a:srgbClr val="F4F9F8"/>
+                      <a:srgbClr val="F7F7F7"/>
                     </a:solidFill>
                   </a:tcPr>
                 </a:tc>
@@ -12043,25 +12141,25 @@
                       <a:r>
                         <a:rPr lang="en-US" sz="1600" dirty="0">
                           <a:solidFill>
-                            <a:srgbClr val="1F2A30"/>
+                            <a:srgbClr val="1D1D1B"/>
                           </a:solidFill>
-                          <a:latin typeface="Calibri" pitchFamily="34" charset="0"/>
-                          <a:ea typeface="Calibri" pitchFamily="34" charset="-122"/>
-                          <a:cs typeface="Calibri" pitchFamily="34" charset="-120"/>
+                          <a:latin typeface="Lucida Sans" pitchFamily="34" charset="0"/>
+                          <a:ea typeface="Lucida Sans" pitchFamily="34" charset="-122"/>
+                          <a:cs typeface="Lucida Sans" pitchFamily="34" charset="-120"/>
                         </a:rPr>
                         <a:t>Raster 20 cm: Wege A und B von (0|0) nach (3|2) berechnen, kürzesten begründen, Weg A fahren und messen</a:t>
                       </a:r>
                       <a:endParaRPr lang="en-US" sz="1600" dirty="0">
-                        <a:latin typeface="Calibri" charset="0"/>
-                        <a:ea typeface="Calibri" charset="0"/>
-                        <a:cs typeface="Calibri" charset="0"/>
+                        <a:latin typeface="Lucida Sans" charset="0"/>
+                        <a:ea typeface="Lucida Sans" charset="0"/>
+                        <a:cs typeface="Lucida Sans" charset="0"/>
                       </a:endParaRPr>
                     </a:p>
                   </a:txBody>
                   <a:tcPr marL="101600" marR="101600" marT="63500" marB="63500" anchor="ctr">
                     <a:lnL w="9525" cap="flat" cmpd="sng" algn="ctr">
                       <a:solidFill>
-                        <a:srgbClr val="C9DAD8"/>
+                        <a:srgbClr val="D9D9D9"/>
                       </a:solidFill>
                       <a:prstDash val="solid"/>
                       <a:round/>
@@ -12070,7 +12168,7 @@
                     </a:lnL>
                     <a:lnR w="9525" cap="flat" cmpd="sng" algn="ctr">
                       <a:solidFill>
-                        <a:srgbClr val="C9DAD8"/>
+                        <a:srgbClr val="D9D9D9"/>
                       </a:solidFill>
                       <a:prstDash val="solid"/>
                       <a:round/>
@@ -12079,7 +12177,7 @@
                     </a:lnR>
                     <a:lnT w="9525" cap="flat" cmpd="sng" algn="ctr">
                       <a:solidFill>
-                        <a:srgbClr val="C9DAD8"/>
+                        <a:srgbClr val="D9D9D9"/>
                       </a:solidFill>
                       <a:prstDash val="solid"/>
                       <a:round/>
@@ -12088,7 +12186,7 @@
                     </a:lnT>
                     <a:lnB w="9525" cap="flat" cmpd="sng" algn="ctr">
                       <a:solidFill>
-                        <a:srgbClr val="C9DAD8"/>
+                        <a:srgbClr val="D9D9D9"/>
                       </a:solidFill>
                       <a:prstDash val="solid"/>
                       <a:round/>
@@ -12096,7 +12194,7 @@
                       <a:tailEnd type="none" w="med" len="med"/>
                     </a:lnB>
                     <a:solidFill>
-                      <a:srgbClr val="F4F9F8"/>
+                      <a:srgbClr val="F7F7F7"/>
                     </a:solidFill>
                   </a:tcPr>
                 </a:tc>
@@ -12113,25 +12211,25 @@
                       <a:r>
                         <a:rPr lang="en-US" sz="1600" dirty="0">
                           <a:solidFill>
-                            <a:srgbClr val="1F2A30"/>
+                            <a:srgbClr val="1D1D1B"/>
                           </a:solidFill>
-                          <a:latin typeface="Calibri" pitchFamily="34" charset="0"/>
-                          <a:ea typeface="Calibri" pitchFamily="34" charset="-122"/>
-                          <a:cs typeface="Calibri" pitchFamily="34" charset="-120"/>
+                          <a:latin typeface="Lucida Sans" pitchFamily="34" charset="0"/>
+                          <a:ea typeface="Lucida Sans" pitchFamily="34" charset="-122"/>
+                          <a:cs typeface="Lucida Sans" pitchFamily="34" charset="-120"/>
                         </a:rPr>
                         <a:t>Mi · Physik</a:t>
                       </a:r>
                       <a:endParaRPr lang="en-US" sz="1600" dirty="0">
-                        <a:latin typeface="Calibri" charset="0"/>
-                        <a:ea typeface="Calibri" charset="0"/>
-                        <a:cs typeface="Calibri" charset="0"/>
+                        <a:latin typeface="Lucida Sans" charset="0"/>
+                        <a:ea typeface="Lucida Sans" charset="0"/>
+                        <a:cs typeface="Lucida Sans" charset="0"/>
                       </a:endParaRPr>
                     </a:p>
                   </a:txBody>
                   <a:tcPr marL="101600" marR="101600" marT="63500" marB="63500" anchor="ctr">
                     <a:lnL w="9525" cap="flat" cmpd="sng" algn="ctr">
                       <a:solidFill>
-                        <a:srgbClr val="C9DAD8"/>
+                        <a:srgbClr val="D9D9D9"/>
                       </a:solidFill>
                       <a:prstDash val="solid"/>
                       <a:round/>
@@ -12140,7 +12238,7 @@
                     </a:lnL>
                     <a:lnR w="9525" cap="flat" cmpd="sng" algn="ctr">
                       <a:solidFill>
-                        <a:srgbClr val="C9DAD8"/>
+                        <a:srgbClr val="D9D9D9"/>
                       </a:solidFill>
                       <a:prstDash val="solid"/>
                       <a:round/>
@@ -12149,7 +12247,7 @@
                     </a:lnR>
                     <a:lnT w="9525" cap="flat" cmpd="sng" algn="ctr">
                       <a:solidFill>
-                        <a:srgbClr val="C9DAD8"/>
+                        <a:srgbClr val="D9D9D9"/>
                       </a:solidFill>
                       <a:prstDash val="solid"/>
                       <a:round/>
@@ -12158,7 +12256,7 @@
                     </a:lnT>
                     <a:lnB w="9525" cap="flat" cmpd="sng" algn="ctr">
                       <a:solidFill>
-                        <a:srgbClr val="C9DAD8"/>
+                        <a:srgbClr val="D9D9D9"/>
                       </a:solidFill>
                       <a:prstDash val="solid"/>
                       <a:round/>
@@ -12181,25 +12279,25 @@
                       <a:r>
                         <a:rPr lang="en-US" sz="1600" dirty="0">
                           <a:solidFill>
-                            <a:srgbClr val="1F2A30"/>
+                            <a:srgbClr val="1D1D1B"/>
                           </a:solidFill>
-                          <a:latin typeface="Calibri" pitchFamily="34" charset="0"/>
-                          <a:ea typeface="Calibri" pitchFamily="34" charset="-122"/>
-                          <a:cs typeface="Calibri" pitchFamily="34" charset="-120"/>
+                          <a:latin typeface="Lucida Sans" pitchFamily="34" charset="0"/>
+                          <a:ea typeface="Lucida Sans" pitchFamily="34" charset="-122"/>
+                          <a:cs typeface="Lucida Sans" pitchFamily="34" charset="-120"/>
                         </a:rPr>
                         <a:t>Zwei Versuche mit Hypothese: Ultraschall, Reflexion oder Weg-Zeit (60 U/min, fliegender Start)</a:t>
                       </a:r>
                       <a:endParaRPr lang="en-US" sz="1600" dirty="0">
-                        <a:latin typeface="Calibri" charset="0"/>
-                        <a:ea typeface="Calibri" charset="0"/>
-                        <a:cs typeface="Calibri" charset="0"/>
+                        <a:latin typeface="Lucida Sans" charset="0"/>
+                        <a:ea typeface="Lucida Sans" charset="0"/>
+                        <a:cs typeface="Lucida Sans" charset="0"/>
                       </a:endParaRPr>
                     </a:p>
                   </a:txBody>
                   <a:tcPr marL="101600" marR="101600" marT="63500" marB="63500" anchor="ctr">
                     <a:lnL w="9525" cap="flat" cmpd="sng" algn="ctr">
                       <a:solidFill>
-                        <a:srgbClr val="C9DAD8"/>
+                        <a:srgbClr val="D9D9D9"/>
                       </a:solidFill>
                       <a:prstDash val="solid"/>
                       <a:round/>
@@ -12208,7 +12306,7 @@
                     </a:lnL>
                     <a:lnR w="9525" cap="flat" cmpd="sng" algn="ctr">
                       <a:solidFill>
-                        <a:srgbClr val="C9DAD8"/>
+                        <a:srgbClr val="D9D9D9"/>
                       </a:solidFill>
                       <a:prstDash val="solid"/>
                       <a:round/>
@@ -12217,7 +12315,7 @@
                     </a:lnR>
                     <a:lnT w="9525" cap="flat" cmpd="sng" algn="ctr">
                       <a:solidFill>
-                        <a:srgbClr val="C9DAD8"/>
+                        <a:srgbClr val="D9D9D9"/>
                       </a:solidFill>
                       <a:prstDash val="solid"/>
                       <a:round/>
@@ -12226,7 +12324,7 @@
                     </a:lnT>
                     <a:lnB w="9525" cap="flat" cmpd="sng" algn="ctr">
                       <a:solidFill>
-                        <a:srgbClr val="C9DAD8"/>
+                        <a:srgbClr val="D9D9D9"/>
                       </a:solidFill>
                       <a:prstDash val="solid"/>
                       <a:round/>
@@ -12251,25 +12349,25 @@
                       <a:r>
                         <a:rPr lang="en-US" sz="1600" dirty="0">
                           <a:solidFill>
-                            <a:srgbClr val="1F2A30"/>
+                            <a:srgbClr val="1D1D1B"/>
                           </a:solidFill>
-                          <a:latin typeface="Calibri" pitchFamily="34" charset="0"/>
-                          <a:ea typeface="Calibri" pitchFamily="34" charset="-122"/>
-                          <a:cs typeface="Calibri" pitchFamily="34" charset="-120"/>
+                          <a:latin typeface="Lucida Sans" pitchFamily="34" charset="0"/>
+                          <a:ea typeface="Lucida Sans" pitchFamily="34" charset="-122"/>
+                          <a:cs typeface="Lucida Sans" pitchFamily="34" charset="-120"/>
                         </a:rPr>
                         <a:t>Do · Informatik</a:t>
                       </a:r>
                       <a:endParaRPr lang="en-US" sz="1600" dirty="0">
-                        <a:latin typeface="Calibri" charset="0"/>
-                        <a:ea typeface="Calibri" charset="0"/>
-                        <a:cs typeface="Calibri" charset="0"/>
+                        <a:latin typeface="Lucida Sans" charset="0"/>
+                        <a:ea typeface="Lucida Sans" charset="0"/>
+                        <a:cs typeface="Lucida Sans" charset="0"/>
                       </a:endParaRPr>
                     </a:p>
                   </a:txBody>
                   <a:tcPr marL="101600" marR="101600" marT="63500" marB="63500" anchor="ctr">
                     <a:lnL w="9525" cap="flat" cmpd="sng" algn="ctr">
                       <a:solidFill>
-                        <a:srgbClr val="C9DAD8"/>
+                        <a:srgbClr val="D9D9D9"/>
                       </a:solidFill>
                       <a:prstDash val="solid"/>
                       <a:round/>
@@ -12278,7 +12376,7 @@
                     </a:lnL>
                     <a:lnR w="9525" cap="flat" cmpd="sng" algn="ctr">
                       <a:solidFill>
-                        <a:srgbClr val="C9DAD8"/>
+                        <a:srgbClr val="D9D9D9"/>
                       </a:solidFill>
                       <a:prstDash val="solid"/>
                       <a:round/>
@@ -12287,7 +12385,7 @@
                     </a:lnR>
                     <a:lnT w="9525" cap="flat" cmpd="sng" algn="ctr">
                       <a:solidFill>
-                        <a:srgbClr val="C9DAD8"/>
+                        <a:srgbClr val="D9D9D9"/>
                       </a:solidFill>
                       <a:prstDash val="solid"/>
                       <a:round/>
@@ -12296,7 +12394,7 @@
                     </a:lnT>
                     <a:lnB w="9525" cap="flat" cmpd="sng" algn="ctr">
                       <a:solidFill>
-                        <a:srgbClr val="C9DAD8"/>
+                        <a:srgbClr val="D9D9D9"/>
                       </a:solidFill>
                       <a:prstDash val="solid"/>
                       <a:round/>
@@ -12304,7 +12402,7 @@
                       <a:tailEnd type="none" w="med" len="med"/>
                     </a:lnB>
                     <a:solidFill>
-                      <a:srgbClr val="F4F9F8"/>
+                      <a:srgbClr val="F7F7F7"/>
                     </a:solidFill>
                   </a:tcPr>
                 </a:tc>
@@ -12319,25 +12417,25 @@
                       <a:r>
                         <a:rPr lang="en-US" sz="1600" dirty="0">
                           <a:solidFill>
-                            <a:srgbClr val="1F2A30"/>
+                            <a:srgbClr val="1D1D1B"/>
                           </a:solidFill>
-                          <a:latin typeface="Calibri" pitchFamily="34" charset="0"/>
-                          <a:ea typeface="Calibri" pitchFamily="34" charset="-122"/>
-                          <a:cs typeface="Calibri" pitchFamily="34" charset="-120"/>
+                          <a:latin typeface="Lucida Sans" pitchFamily="34" charset="0"/>
+                          <a:ea typeface="Lucida Sans" pitchFamily="34" charset="-122"/>
+                          <a:cs typeface="Lucida Sans" pitchFamily="34" charset="-120"/>
                         </a:rPr>
                         <a:t>Hindernis-Stopp + Linienfolger kombinieren, Schwellenwert variieren, Ablaufdiagramm</a:t>
                       </a:r>
                       <a:endParaRPr lang="en-US" sz="1600" dirty="0">
-                        <a:latin typeface="Calibri" charset="0"/>
-                        <a:ea typeface="Calibri" charset="0"/>
-                        <a:cs typeface="Calibri" charset="0"/>
+                        <a:latin typeface="Lucida Sans" charset="0"/>
+                        <a:ea typeface="Lucida Sans" charset="0"/>
+                        <a:cs typeface="Lucida Sans" charset="0"/>
                       </a:endParaRPr>
                     </a:p>
                   </a:txBody>
                   <a:tcPr marL="101600" marR="101600" marT="63500" marB="63500" anchor="ctr">
                     <a:lnL w="9525" cap="flat" cmpd="sng" algn="ctr">
                       <a:solidFill>
-                        <a:srgbClr val="C9DAD8"/>
+                        <a:srgbClr val="D9D9D9"/>
                       </a:solidFill>
                       <a:prstDash val="solid"/>
                       <a:round/>
@@ -12346,7 +12444,7 @@
                     </a:lnL>
                     <a:lnR w="9525" cap="flat" cmpd="sng" algn="ctr">
                       <a:solidFill>
-                        <a:srgbClr val="C9DAD8"/>
+                        <a:srgbClr val="D9D9D9"/>
                       </a:solidFill>
                       <a:prstDash val="solid"/>
                       <a:round/>
@@ -12355,7 +12453,7 @@
                     </a:lnR>
                     <a:lnT w="9525" cap="flat" cmpd="sng" algn="ctr">
                       <a:solidFill>
-                        <a:srgbClr val="C9DAD8"/>
+                        <a:srgbClr val="D9D9D9"/>
                       </a:solidFill>
                       <a:prstDash val="solid"/>
                       <a:round/>
@@ -12364,7 +12462,7 @@
                     </a:lnT>
                     <a:lnB w="9525" cap="flat" cmpd="sng" algn="ctr">
                       <a:solidFill>
-                        <a:srgbClr val="C9DAD8"/>
+                        <a:srgbClr val="D9D9D9"/>
                       </a:solidFill>
                       <a:prstDash val="solid"/>
                       <a:round/>
@@ -12372,7 +12470,7 @@
                       <a:tailEnd type="none" w="med" len="med"/>
                     </a:lnB>
                     <a:solidFill>
-                      <a:srgbClr val="F4F9F8"/>
+                      <a:srgbClr val="F7F7F7"/>
                     </a:solidFill>
                   </a:tcPr>
                 </a:tc>
@@ -12389,25 +12487,25 @@
                       <a:r>
                         <a:rPr lang="en-US" sz="1600" dirty="0">
                           <a:solidFill>
-                            <a:srgbClr val="1F2A30"/>
+                            <a:srgbClr val="1D1D1B"/>
                           </a:solidFill>
-                          <a:latin typeface="Calibri" pitchFamily="34" charset="0"/>
-                          <a:ea typeface="Calibri" pitchFamily="34" charset="-122"/>
-                          <a:cs typeface="Calibri" pitchFamily="34" charset="-120"/>
+                          <a:latin typeface="Lucida Sans" pitchFamily="34" charset="0"/>
+                          <a:ea typeface="Lucida Sans" pitchFamily="34" charset="-122"/>
+                          <a:cs typeface="Lucida Sans" pitchFamily="34" charset="-120"/>
                         </a:rPr>
                         <a:t>Offene Gruppe</a:t>
                       </a:r>
                       <a:endParaRPr lang="en-US" sz="1600" dirty="0">
-                        <a:latin typeface="Calibri" charset="0"/>
-                        <a:ea typeface="Calibri" charset="0"/>
-                        <a:cs typeface="Calibri" charset="0"/>
+                        <a:latin typeface="Lucida Sans" charset="0"/>
+                        <a:ea typeface="Lucida Sans" charset="0"/>
+                        <a:cs typeface="Lucida Sans" charset="0"/>
                       </a:endParaRPr>
                     </a:p>
                   </a:txBody>
                   <a:tcPr marL="101600" marR="101600" marT="63500" marB="63500" anchor="ctr">
                     <a:lnL w="9525" cap="flat" cmpd="sng" algn="ctr">
                       <a:solidFill>
-                        <a:srgbClr val="C9DAD8"/>
+                        <a:srgbClr val="D9D9D9"/>
                       </a:solidFill>
                       <a:prstDash val="solid"/>
                       <a:round/>
@@ -12416,7 +12514,7 @@
                     </a:lnL>
                     <a:lnR w="9525" cap="flat" cmpd="sng" algn="ctr">
                       <a:solidFill>
-                        <a:srgbClr val="C9DAD8"/>
+                        <a:srgbClr val="D9D9D9"/>
                       </a:solidFill>
                       <a:prstDash val="solid"/>
                       <a:round/>
@@ -12425,7 +12523,7 @@
                     </a:lnR>
                     <a:lnT w="9525" cap="flat" cmpd="sng" algn="ctr">
                       <a:solidFill>
-                        <a:srgbClr val="C9DAD8"/>
+                        <a:srgbClr val="D9D9D9"/>
                       </a:solidFill>
                       <a:prstDash val="solid"/>
                       <a:round/>
@@ -12434,7 +12532,7 @@
                     </a:lnT>
                     <a:lnB w="9525" cap="flat" cmpd="sng" algn="ctr">
                       <a:solidFill>
-                        <a:srgbClr val="C9DAD8"/>
+                        <a:srgbClr val="D9D9D9"/>
                       </a:solidFill>
                       <a:prstDash val="solid"/>
                       <a:round/>
@@ -12457,25 +12555,25 @@
                       <a:r>
                         <a:rPr lang="en-US" sz="1600" dirty="0">
                           <a:solidFill>
-                            <a:srgbClr val="1F2A30"/>
+                            <a:srgbClr val="1D1D1B"/>
                           </a:solidFill>
-                          <a:latin typeface="Calibri" pitchFamily="34" charset="0"/>
-                          <a:ea typeface="Calibri" pitchFamily="34" charset="-122"/>
-                          <a:cs typeface="Calibri" pitchFamily="34" charset="-120"/>
+                          <a:latin typeface="Lucida Sans" pitchFamily="34" charset="0"/>
+                          <a:ea typeface="Lucida Sans" pitchFamily="34" charset="-122"/>
+                          <a:cs typeface="Lucida Sans" pitchFamily="34" charset="-120"/>
                         </a:rPr>
                         <a:t>z. B. Deutsch: Vorgangsbeschreibung testen · Ethik: Wer entscheidet beim Ausweichen?</a:t>
                       </a:r>
                       <a:endParaRPr lang="en-US" sz="1600" dirty="0">
-                        <a:latin typeface="Calibri" charset="0"/>
-                        <a:ea typeface="Calibri" charset="0"/>
-                        <a:cs typeface="Calibri" charset="0"/>
+                        <a:latin typeface="Lucida Sans" charset="0"/>
+                        <a:ea typeface="Lucida Sans" charset="0"/>
+                        <a:cs typeface="Lucida Sans" charset="0"/>
                       </a:endParaRPr>
                     </a:p>
                   </a:txBody>
                   <a:tcPr marL="101600" marR="101600" marT="63500" marB="63500" anchor="ctr">
                     <a:lnL w="9525" cap="flat" cmpd="sng" algn="ctr">
                       <a:solidFill>
-                        <a:srgbClr val="C9DAD8"/>
+                        <a:srgbClr val="D9D9D9"/>
                       </a:solidFill>
                       <a:prstDash val="solid"/>
                       <a:round/>
@@ -12484,7 +12582,7 @@
                     </a:lnL>
                     <a:lnR w="9525" cap="flat" cmpd="sng" algn="ctr">
                       <a:solidFill>
-                        <a:srgbClr val="C9DAD8"/>
+                        <a:srgbClr val="D9D9D9"/>
                       </a:solidFill>
                       <a:prstDash val="solid"/>
                       <a:round/>
@@ -12493,7 +12591,7 @@
                     </a:lnR>
                     <a:lnT w="9525" cap="flat" cmpd="sng" algn="ctr">
                       <a:solidFill>
-                        <a:srgbClr val="C9DAD8"/>
+                        <a:srgbClr val="D9D9D9"/>
                       </a:solidFill>
                       <a:prstDash val="solid"/>
                       <a:round/>
@@ -12502,7 +12600,7 @@
                     </a:lnT>
                     <a:lnB w="9525" cap="flat" cmpd="sng" algn="ctr">
                       <a:solidFill>
-                        <a:srgbClr val="C9DAD8"/>
+                        <a:srgbClr val="D9D9D9"/>
                       </a:solidFill>
                       <a:prstDash val="solid"/>
                       <a:round/>
@@ -12536,11 +12634,11 @@
             </a:avLst>
           </a:prstGeom>
           <a:solidFill>
-            <a:srgbClr val="FCEBDD"/>
+            <a:srgbClr val="FDF0E3"/>
           </a:solidFill>
           <a:ln w="12700">
             <a:solidFill>
-              <a:srgbClr val="FCEBDD"/>
+              <a:srgbClr val="FDF0E3"/>
             </a:solidFill>
             <a:prstDash val="solid"/>
           </a:ln>
@@ -12561,11 +12659,11 @@
             <a:avLst/>
           </a:prstGeom>
           <a:solidFill>
-            <a:srgbClr val="E8772E"/>
+            <a:srgbClr val="EF7D00"/>
           </a:solidFill>
           <a:ln w="12700">
             <a:solidFill>
-              <a:srgbClr val="E8772E"/>
+              <a:srgbClr val="EF7D00"/>
             </a:solidFill>
             <a:prstDash val="solid"/>
           </a:ln>
@@ -12598,11 +12696,11 @@
             <a:r>
               <a:rPr lang="en-US" sz="2000" b="1" dirty="0">
                 <a:solidFill>
-                  <a:srgbClr val="FFFFFF"/>
-                </a:solidFill>
-                <a:latin typeface="Calibri" pitchFamily="34" charset="0"/>
-                <a:ea typeface="Calibri" pitchFamily="34" charset="-122"/>
-                <a:cs typeface="Calibri" pitchFamily="34" charset="-120"/>
+                  <a:srgbClr val="1D1D1B"/>
+                </a:solidFill>
+                <a:latin typeface="Lucida Sans" pitchFamily="34" charset="0"/>
+                <a:ea typeface="Lucida Sans" pitchFamily="34" charset="-122"/>
+                <a:cs typeface="Lucida Sans" pitchFamily="34" charset="-120"/>
               </a:rPr>
               <a:t>!</a:t>
             </a:r>
@@ -12637,11 +12735,11 @@
             <a:r>
               <a:rPr lang="en-US" sz="1500" dirty="0">
                 <a:solidFill>
-                  <a:srgbClr val="0B3C49"/>
-                </a:solidFill>
-                <a:latin typeface="Calibri" pitchFamily="34" charset="0"/>
-                <a:ea typeface="Calibri" pitchFamily="34" charset="-122"/>
-                <a:cs typeface="Calibri" pitchFamily="34" charset="-120"/>
+                  <a:srgbClr val="7A003F"/>
+                </a:solidFill>
+                <a:latin typeface="Lucida Sans" pitchFamily="34" charset="0"/>
+                <a:ea typeface="Lucida Sans" pitchFamily="34" charset="-122"/>
+                <a:cs typeface="Lucida Sans" pitchFamily="34" charset="-120"/>
               </a:rPr>
               <a:t>Sicherheit: Hardware nur im ausgeschalteten Zustand verändern, keine Eingriffe am Akku, Fahrten am Boden.</a:t>
             </a:r>
@@ -12679,11 +12777,11 @@
             <a:lvl1pPr>
               <a:defRPr sz="1000">
                 <a:solidFill>
-                  <a:srgbClr val="5B6B73"/>
-                </a:solidFill>
-                <a:latin typeface="Calibri"/>
-                <a:ea typeface="Calibri"/>
-                <a:cs typeface="Calibri"/>
+                  <a:srgbClr val="706F6F"/>
+                </a:solidFill>
+                <a:latin typeface="Lucida Sans"/>
+                <a:ea typeface="Lucida Sans"/>
+                <a:cs typeface="Lucida Sans"/>
               </a:defRPr>
             </a:lvl1pPr>
           </a:lstStyle>
@@ -12727,13 +12825,13 @@
           <p:cNvPr id="2" name="Text 1"/>
           <p:cNvSpPr/>
           <p:nvPr>
-            <p:ph idx="101" type="title" hasCustomPrompt="1"/>
+            <p:ph idx="102" type="title" hasCustomPrompt="1"/>
           </p:nvPr>
         </p:nvSpPr>
         <p:spPr>
           <a:xfrm>
-            <a:off x="548640" y="320040"/>
-            <a:ext cx="11094415" cy="777240"/>
+            <a:off x="548640" y="274320"/>
+            <a:ext cx="8351215" cy="896112"/>
           </a:xfrm>
           <a:prstGeom prst="rect">
             <a:avLst/>
@@ -12745,21 +12843,21 @@
           <a:bodyPr wrap="square" lIns="0" tIns="0" rIns="0" bIns="0" rtlCol="0" anchor="ctr"/>
           <a:lstStyle/>
           <a:p>
-            <a:pPr indent="0" marL="0">
+            <a:pPr algn="l" indent="0" marL="0">
               <a:buNone/>
             </a:pPr>
             <a:r>
-              <a:rPr lang="en-US" sz="3200" b="1" dirty="0">
-                <a:solidFill>
-                  <a:srgbClr val="0B3C49"/>
-                </a:solidFill>
-                <a:latin typeface="Cambria" pitchFamily="34" charset="0"/>
-                <a:ea typeface="Cambria" pitchFamily="34" charset="-122"/>
-                <a:cs typeface="Cambria" pitchFamily="34" charset="-120"/>
+              <a:rPr lang="en-US" sz="2600" b="1" dirty="0">
+                <a:solidFill>
+                  <a:srgbClr val="7A003F"/>
+                </a:solidFill>
+                <a:latin typeface="Lucida Sans" pitchFamily="34" charset="0"/>
+                <a:ea typeface="Lucida Sans" pitchFamily="34" charset="-122"/>
+                <a:cs typeface="Lucida Sans" pitchFamily="34" charset="-120"/>
               </a:rPr>
               <a:t>Impulsfragen während der Erprobung</a:t>
             </a:r>
-            <a:endParaRPr lang="en-US" sz="3200" dirty="0"/>
+            <a:endParaRPr lang="en-US" sz="2600" dirty="0"/>
           </a:p>
         </p:txBody>
       </p:sp>
@@ -12780,11 +12878,11 @@
             </a:avLst>
           </a:prstGeom>
           <a:solidFill>
-            <a:srgbClr val="E6F2F1"/>
+            <a:srgbClr val="F2F2F2"/>
           </a:solidFill>
           <a:ln w="12700">
             <a:solidFill>
-              <a:srgbClr val="E6F2F1"/>
+              <a:srgbClr val="F2F2F2"/>
             </a:solidFill>
             <a:prstDash val="solid"/>
           </a:ln>
@@ -12805,11 +12903,11 @@
             <a:avLst/>
           </a:prstGeom>
           <a:solidFill>
-            <a:srgbClr val="0B6E69"/>
+            <a:srgbClr val="7A003F"/>
           </a:solidFill>
           <a:ln w="12700">
             <a:solidFill>
-              <a:srgbClr val="0B6E69"/>
+              <a:srgbClr val="7A003F"/>
             </a:solidFill>
             <a:prstDash val="solid"/>
           </a:ln>
@@ -12844,9 +12942,9 @@
                 <a:solidFill>
                   <a:srgbClr val="FFFFFF"/>
                 </a:solidFill>
-                <a:latin typeface="Calibri" pitchFamily="34" charset="0"/>
-                <a:ea typeface="Calibri" pitchFamily="34" charset="-122"/>
-                <a:cs typeface="Calibri" pitchFamily="34" charset="-120"/>
+                <a:latin typeface="Lucida Sans" pitchFamily="34" charset="0"/>
+                <a:ea typeface="Lucida Sans" pitchFamily="34" charset="-122"/>
+                <a:cs typeface="Lucida Sans" pitchFamily="34" charset="-120"/>
               </a:rPr>
               <a:t>1</a:t>
             </a:r>
@@ -12881,11 +12979,11 @@
             <a:r>
               <a:rPr lang="en-US" sz="1800" b="1" dirty="0">
                 <a:solidFill>
-                  <a:srgbClr val="0B3C49"/>
-                </a:solidFill>
-                <a:latin typeface="Calibri" pitchFamily="34" charset="0"/>
-                <a:ea typeface="Calibri" pitchFamily="34" charset="-122"/>
-                <a:cs typeface="Calibri" pitchFamily="34" charset="-120"/>
+                  <a:srgbClr val="7A003F"/>
+                </a:solidFill>
+                <a:latin typeface="Lucida Sans" pitchFamily="34" charset="0"/>
+                <a:ea typeface="Lucida Sans" pitchFamily="34" charset="-122"/>
+                <a:cs typeface="Lucida Sans" pitchFamily="34" charset="-120"/>
               </a:rPr>
               <a:t>Zeit</a:t>
             </a:r>
@@ -12920,11 +13018,11 @@
             <a:r>
               <a:rPr lang="en-US" sz="1700" dirty="0">
                 <a:solidFill>
-                  <a:srgbClr val="1F2A30"/>
-                </a:solidFill>
-                <a:latin typeface="Calibri" pitchFamily="34" charset="0"/>
-                <a:ea typeface="Calibri" pitchFamily="34" charset="-122"/>
-                <a:cs typeface="Calibri" pitchFamily="34" charset="-120"/>
+                  <a:srgbClr val="1D1D1B"/>
+                </a:solidFill>
+                <a:latin typeface="Lucida Sans" pitchFamily="34" charset="0"/>
+                <a:ea typeface="Lucida Sans" pitchFamily="34" charset="-122"/>
+                <a:cs typeface="Lucida Sans" pitchFamily="34" charset="-120"/>
               </a:rPr>
               <a:t>Welcher Schritt hat am längsten gedauert? Wie lange bräuchte Ihre Klasse?</a:t>
             </a:r>
@@ -12949,11 +13047,11 @@
             </a:avLst>
           </a:prstGeom>
           <a:solidFill>
-            <a:srgbClr val="E6F2F1"/>
+            <a:srgbClr val="F2F2F2"/>
           </a:solidFill>
           <a:ln w="12700">
             <a:solidFill>
-              <a:srgbClr val="E6F2F1"/>
+              <a:srgbClr val="F2F2F2"/>
             </a:solidFill>
             <a:prstDash val="solid"/>
           </a:ln>
@@ -12974,11 +13072,11 @@
             <a:avLst/>
           </a:prstGeom>
           <a:solidFill>
-            <a:srgbClr val="0B6E69"/>
+            <a:srgbClr val="7A003F"/>
           </a:solidFill>
           <a:ln w="12700">
             <a:solidFill>
-              <a:srgbClr val="0B6E69"/>
+              <a:srgbClr val="7A003F"/>
             </a:solidFill>
             <a:prstDash val="solid"/>
           </a:ln>
@@ -13013,9 +13111,9 @@
                 <a:solidFill>
                   <a:srgbClr val="FFFFFF"/>
                 </a:solidFill>
-                <a:latin typeface="Calibri" pitchFamily="34" charset="0"/>
-                <a:ea typeface="Calibri" pitchFamily="34" charset="-122"/>
-                <a:cs typeface="Calibri" pitchFamily="34" charset="-120"/>
+                <a:latin typeface="Lucida Sans" pitchFamily="34" charset="0"/>
+                <a:ea typeface="Lucida Sans" pitchFamily="34" charset="-122"/>
+                <a:cs typeface="Lucida Sans" pitchFamily="34" charset="-120"/>
               </a:rPr>
               <a:t>2</a:t>
             </a:r>
@@ -13050,11 +13148,11 @@
             <a:r>
               <a:rPr lang="en-US" sz="1800" b="1" dirty="0">
                 <a:solidFill>
-                  <a:srgbClr val="0B3C49"/>
-                </a:solidFill>
-                <a:latin typeface="Calibri" pitchFamily="34" charset="0"/>
-                <a:ea typeface="Calibri" pitchFamily="34" charset="-122"/>
-                <a:cs typeface="Calibri" pitchFamily="34" charset="-120"/>
+                  <a:srgbClr val="7A003F"/>
+                </a:solidFill>
+                <a:latin typeface="Lucida Sans" pitchFamily="34" charset="0"/>
+                <a:ea typeface="Lucida Sans" pitchFamily="34" charset="-122"/>
+                <a:cs typeface="Lucida Sans" pitchFamily="34" charset="-120"/>
               </a:rPr>
               <a:t>Vorwissen</a:t>
             </a:r>
@@ -13089,11 +13187,11 @@
             <a:r>
               <a:rPr lang="en-US" sz="1700" dirty="0">
                 <a:solidFill>
-                  <a:srgbClr val="1F2A30"/>
-                </a:solidFill>
-                <a:latin typeface="Calibri" pitchFamily="34" charset="0"/>
-                <a:ea typeface="Calibri" pitchFamily="34" charset="-122"/>
-                <a:cs typeface="Calibri" pitchFamily="34" charset="-120"/>
+                  <a:srgbClr val="1D1D1B"/>
+                </a:solidFill>
+                <a:latin typeface="Lucida Sans" pitchFamily="34" charset="0"/>
+                <a:ea typeface="Lucida Sans" pitchFamily="34" charset="-122"/>
+                <a:cs typeface="Lucida Sans" pitchFamily="34" charset="-120"/>
               </a:rPr>
               <a:t>Was müssen die Schülerinnen und Schüler schon können? Woher kommt das in der Woche?</a:t>
             </a:r>
@@ -13118,11 +13216,11 @@
             </a:avLst>
           </a:prstGeom>
           <a:solidFill>
-            <a:srgbClr val="E6F2F1"/>
+            <a:srgbClr val="F2F2F2"/>
           </a:solidFill>
           <a:ln w="12700">
             <a:solidFill>
-              <a:srgbClr val="E6F2F1"/>
+              <a:srgbClr val="F2F2F2"/>
             </a:solidFill>
             <a:prstDash val="solid"/>
           </a:ln>
@@ -13143,11 +13241,11 @@
             <a:avLst/>
           </a:prstGeom>
           <a:solidFill>
-            <a:srgbClr val="0B6E69"/>
+            <a:srgbClr val="7A003F"/>
           </a:solidFill>
           <a:ln w="12700">
             <a:solidFill>
-              <a:srgbClr val="0B6E69"/>
+              <a:srgbClr val="7A003F"/>
             </a:solidFill>
             <a:prstDash val="solid"/>
           </a:ln>
@@ -13182,9 +13280,9 @@
                 <a:solidFill>
                   <a:srgbClr val="FFFFFF"/>
                 </a:solidFill>
-                <a:latin typeface="Calibri" pitchFamily="34" charset="0"/>
-                <a:ea typeface="Calibri" pitchFamily="34" charset="-122"/>
-                <a:cs typeface="Calibri" pitchFamily="34" charset="-120"/>
+                <a:latin typeface="Lucida Sans" pitchFamily="34" charset="0"/>
+                <a:ea typeface="Lucida Sans" pitchFamily="34" charset="-122"/>
+                <a:cs typeface="Lucida Sans" pitchFamily="34" charset="-120"/>
               </a:rPr>
               <a:t>3</a:t>
             </a:r>
@@ -13219,11 +13317,11 @@
             <a:r>
               <a:rPr lang="en-US" sz="1800" b="1" dirty="0">
                 <a:solidFill>
-                  <a:srgbClr val="0B3C49"/>
-                </a:solidFill>
-                <a:latin typeface="Calibri" pitchFamily="34" charset="0"/>
-                <a:ea typeface="Calibri" pitchFamily="34" charset="-122"/>
-                <a:cs typeface="Calibri" pitchFamily="34" charset="-120"/>
+                  <a:srgbClr val="7A003F"/>
+                </a:solidFill>
+                <a:latin typeface="Lucida Sans" pitchFamily="34" charset="0"/>
+                <a:ea typeface="Lucida Sans" pitchFamily="34" charset="-122"/>
+                <a:cs typeface="Lucida Sans" pitchFamily="34" charset="-120"/>
               </a:rPr>
               <a:t>Fachliches Ergebnis</a:t>
             </a:r>
@@ -13258,11 +13356,11 @@
             <a:r>
               <a:rPr lang="en-US" sz="1700" dirty="0">
                 <a:solidFill>
-                  <a:srgbClr val="1F2A30"/>
-                </a:solidFill>
-                <a:latin typeface="Calibri" pitchFamily="34" charset="0"/>
-                <a:ea typeface="Calibri" pitchFamily="34" charset="-122"/>
-                <a:cs typeface="Calibri" pitchFamily="34" charset="-120"/>
+                  <a:srgbClr val="1D1D1B"/>
+                </a:solidFill>
+                <a:latin typeface="Lucida Sans" pitchFamily="34" charset="0"/>
+                <a:ea typeface="Lucida Sans" pitchFamily="34" charset="-122"/>
+                <a:cs typeface="Lucida Sans" pitchFamily="34" charset="-120"/>
               </a:rPr>
               <a:t>Was wird hier gelernt – unabhängig davon, dass der Roboter fährt?</a:t>
             </a:r>
@@ -13287,11 +13385,11 @@
             </a:avLst>
           </a:prstGeom>
           <a:solidFill>
-            <a:srgbClr val="E6F2F1"/>
+            <a:srgbClr val="F2F2F2"/>
           </a:solidFill>
           <a:ln w="12700">
             <a:solidFill>
-              <a:srgbClr val="E6F2F1"/>
+              <a:srgbClr val="F2F2F2"/>
             </a:solidFill>
             <a:prstDash val="solid"/>
           </a:ln>
@@ -13312,11 +13410,11 @@
             <a:avLst/>
           </a:prstGeom>
           <a:solidFill>
-            <a:srgbClr val="0B6E69"/>
+            <a:srgbClr val="7A003F"/>
           </a:solidFill>
           <a:ln w="12700">
             <a:solidFill>
-              <a:srgbClr val="0B6E69"/>
+              <a:srgbClr val="7A003F"/>
             </a:solidFill>
             <a:prstDash val="solid"/>
           </a:ln>
@@ -13351,9 +13449,9 @@
                 <a:solidFill>
                   <a:srgbClr val="FFFFFF"/>
                 </a:solidFill>
-                <a:latin typeface="Calibri" pitchFamily="34" charset="0"/>
-                <a:ea typeface="Calibri" pitchFamily="34" charset="-122"/>
-                <a:cs typeface="Calibri" pitchFamily="34" charset="-120"/>
+                <a:latin typeface="Lucida Sans" pitchFamily="34" charset="0"/>
+                <a:ea typeface="Lucida Sans" pitchFamily="34" charset="-122"/>
+                <a:cs typeface="Lucida Sans" pitchFamily="34" charset="-120"/>
               </a:rPr>
               <a:t>4</a:t>
             </a:r>
@@ -13388,11 +13486,11 @@
             <a:r>
               <a:rPr lang="en-US" sz="1800" b="1" dirty="0">
                 <a:solidFill>
-                  <a:srgbClr val="0B3C49"/>
-                </a:solidFill>
-                <a:latin typeface="Calibri" pitchFamily="34" charset="0"/>
-                <a:ea typeface="Calibri" pitchFamily="34" charset="-122"/>
-                <a:cs typeface="Calibri" pitchFamily="34" charset="-120"/>
+                  <a:srgbClr val="7A003F"/>
+                </a:solidFill>
+                <a:latin typeface="Lucida Sans" pitchFamily="34" charset="0"/>
+                <a:ea typeface="Lucida Sans" pitchFamily="34" charset="-122"/>
+                <a:cs typeface="Lucida Sans" pitchFamily="34" charset="-120"/>
               </a:rPr>
               <a:t>Lernhürde</a:t>
             </a:r>
@@ -13427,11 +13525,11 @@
             <a:r>
               <a:rPr lang="en-US" sz="1700" dirty="0">
                 <a:solidFill>
-                  <a:srgbClr val="1F2A30"/>
-                </a:solidFill>
-                <a:latin typeface="Calibri" pitchFamily="34" charset="0"/>
-                <a:ea typeface="Calibri" pitchFamily="34" charset="-122"/>
-                <a:cs typeface="Calibri" pitchFamily="34" charset="-120"/>
+                  <a:srgbClr val="1D1D1B"/>
+                </a:solidFill>
+                <a:latin typeface="Lucida Sans" pitchFamily="34" charset="0"/>
+                <a:ea typeface="Lucida Sans" pitchFamily="34" charset="-122"/>
+                <a:cs typeface="Lucida Sans" pitchFamily="34" charset="-120"/>
               </a:rPr>
               <a:t>Wo würden schwächere Lernende hängen bleiben? Was wäre die passende Hilfe?</a:t>
             </a:r>
@@ -13469,11 +13567,11 @@
             <a:lvl1pPr>
               <a:defRPr sz="1000">
                 <a:solidFill>
-                  <a:srgbClr val="5B6B73"/>
-                </a:solidFill>
-                <a:latin typeface="Calibri"/>
-                <a:ea typeface="Calibri"/>
-                <a:cs typeface="Calibri"/>
+                  <a:srgbClr val="706F6F"/>
+                </a:solidFill>
+                <a:latin typeface="Lucida Sans"/>
+                <a:ea typeface="Lucida Sans"/>
+                <a:cs typeface="Lucida Sans"/>
               </a:defRPr>
             </a:lvl1pPr>
           </a:lstStyle>
@@ -13517,13 +13615,13 @@
           <p:cNvPr id="2" name="Text 1"/>
           <p:cNvSpPr/>
           <p:nvPr>
-            <p:ph idx="101" type="title" hasCustomPrompt="1"/>
+            <p:ph idx="102" type="title" hasCustomPrompt="1"/>
           </p:nvPr>
         </p:nvSpPr>
         <p:spPr>
           <a:xfrm>
-            <a:off x="548640" y="320040"/>
-            <a:ext cx="11094415" cy="777240"/>
+            <a:off x="548640" y="274320"/>
+            <a:ext cx="8351215" cy="896112"/>
           </a:xfrm>
           <a:prstGeom prst="rect">
             <a:avLst/>
@@ -13535,21 +13633,21 @@
           <a:bodyPr wrap="square" lIns="0" tIns="0" rIns="0" bIns="0" rtlCol="0" anchor="ctr"/>
           <a:lstStyle/>
           <a:p>
-            <a:pPr indent="0" marL="0">
+            <a:pPr algn="l" indent="0" marL="0">
               <a:buNone/>
             </a:pPr>
             <a:r>
-              <a:rPr lang="en-US" sz="3200" b="1" dirty="0">
-                <a:solidFill>
-                  <a:srgbClr val="0B3C49"/>
-                </a:solidFill>
-                <a:latin typeface="Cambria" pitchFamily="34" charset="0"/>
-                <a:ea typeface="Cambria" pitchFamily="34" charset="-122"/>
-                <a:cs typeface="Cambria" pitchFamily="34" charset="-120"/>
+              <a:rPr lang="en-US" sz="2600" b="1" dirty="0">
+                <a:solidFill>
+                  <a:srgbClr val="7A003F"/>
+                </a:solidFill>
+                <a:latin typeface="Lucida Sans" pitchFamily="34" charset="0"/>
+                <a:ea typeface="Lucida Sans" pitchFamily="34" charset="-122"/>
+                <a:cs typeface="Lucida Sans" pitchFamily="34" charset="-120"/>
               </a:rPr>
               <a:t>Die Planungsvorlage: sieben Pflichtfelder</a:t>
             </a:r>
-            <a:endParaRPr lang="en-US" sz="3200" dirty="0"/>
+            <a:endParaRPr lang="en-US" sz="2600" dirty="0"/>
           </a:p>
         </p:txBody>
       </p:sp>
@@ -13570,11 +13668,11 @@
             </a:avLst>
           </a:prstGeom>
           <a:solidFill>
-            <a:srgbClr val="E6F2F1"/>
+            <a:srgbClr val="F2F2F2"/>
           </a:solidFill>
           <a:ln w="12700">
             <a:solidFill>
-              <a:srgbClr val="E6F2F1"/>
+              <a:srgbClr val="F2F2F2"/>
             </a:solidFill>
             <a:prstDash val="solid"/>
           </a:ln>
@@ -13595,11 +13693,11 @@
             <a:avLst/>
           </a:prstGeom>
           <a:solidFill>
-            <a:srgbClr val="0B6E69"/>
+            <a:srgbClr val="7A003F"/>
           </a:solidFill>
           <a:ln w="12700">
             <a:solidFill>
-              <a:srgbClr val="0B6E69"/>
+              <a:srgbClr val="7A003F"/>
             </a:solidFill>
             <a:prstDash val="solid"/>
           </a:ln>
@@ -13634,9 +13732,9 @@
                 <a:solidFill>
                   <a:srgbClr val="FFFFFF"/>
                 </a:solidFill>
-                <a:latin typeface="Calibri" pitchFamily="34" charset="0"/>
-                <a:ea typeface="Calibri" pitchFamily="34" charset="-122"/>
-                <a:cs typeface="Calibri" pitchFamily="34" charset="-120"/>
+                <a:latin typeface="Lucida Sans" pitchFamily="34" charset="0"/>
+                <a:ea typeface="Lucida Sans" pitchFamily="34" charset="-122"/>
+                <a:cs typeface="Lucida Sans" pitchFamily="34" charset="-120"/>
               </a:rPr>
               <a:t>1</a:t>
             </a:r>
@@ -13671,11 +13769,11 @@
             <a:r>
               <a:rPr lang="en-US" sz="1500" b="1" dirty="0">
                 <a:solidFill>
-                  <a:srgbClr val="0B3C49"/>
-                </a:solidFill>
-                <a:latin typeface="Calibri" pitchFamily="34" charset="0"/>
-                <a:ea typeface="Calibri" pitchFamily="34" charset="-122"/>
-                <a:cs typeface="Calibri" pitchFamily="34" charset="-120"/>
+                  <a:srgbClr val="7A003F"/>
+                </a:solidFill>
+                <a:latin typeface="Lucida Sans" pitchFamily="34" charset="0"/>
+                <a:ea typeface="Lucida Sans" pitchFamily="34" charset="-122"/>
+                <a:cs typeface="Lucida Sans" pitchFamily="34" charset="-120"/>
               </a:rPr>
               <a:t>Lernziel</a:t>
             </a:r>
@@ -13710,11 +13808,11 @@
             <a:r>
               <a:rPr lang="en-US" sz="1500" dirty="0">
                 <a:solidFill>
-                  <a:srgbClr val="1F2A30"/>
-                </a:solidFill>
-                <a:latin typeface="Calibri" pitchFamily="34" charset="0"/>
-                <a:ea typeface="Calibri" pitchFamily="34" charset="-122"/>
-                <a:cs typeface="Calibri" pitchFamily="34" charset="-120"/>
+                  <a:srgbClr val="1D1D1B"/>
+                </a:solidFill>
+                <a:latin typeface="Lucida Sans" pitchFamily="34" charset="0"/>
+                <a:ea typeface="Lucida Sans" pitchFamily="34" charset="-122"/>
+                <a:cs typeface="Lucida Sans" pitchFamily="34" charset="-120"/>
               </a:rPr>
               <a:t>fachlich und überprüfbar (Operator + Inhalt)</a:t>
             </a:r>
@@ -13739,11 +13837,11 @@
             </a:avLst>
           </a:prstGeom>
           <a:solidFill>
-            <a:srgbClr val="E6F2F1"/>
+            <a:srgbClr val="F2F2F2"/>
           </a:solidFill>
           <a:ln w="12700">
             <a:solidFill>
-              <a:srgbClr val="E6F2F1"/>
+              <a:srgbClr val="F2F2F2"/>
             </a:solidFill>
             <a:prstDash val="solid"/>
           </a:ln>
@@ -13764,11 +13862,11 @@
             <a:avLst/>
           </a:prstGeom>
           <a:solidFill>
-            <a:srgbClr val="0B6E69"/>
+            <a:srgbClr val="7A003F"/>
           </a:solidFill>
           <a:ln w="12700">
             <a:solidFill>
-              <a:srgbClr val="0B6E69"/>
+              <a:srgbClr val="7A003F"/>
             </a:solidFill>
             <a:prstDash val="solid"/>
           </a:ln>
@@ -13803,9 +13901,9 @@
                 <a:solidFill>
                   <a:srgbClr val="FFFFFF"/>
                 </a:solidFill>
-                <a:latin typeface="Calibri" pitchFamily="34" charset="0"/>
-                <a:ea typeface="Calibri" pitchFamily="34" charset="-122"/>
-                <a:cs typeface="Calibri" pitchFamily="34" charset="-120"/>
+                <a:latin typeface="Lucida Sans" pitchFamily="34" charset="0"/>
+                <a:ea typeface="Lucida Sans" pitchFamily="34" charset="-122"/>
+                <a:cs typeface="Lucida Sans" pitchFamily="34" charset="-120"/>
               </a:rPr>
               <a:t>2</a:t>
             </a:r>
@@ -13840,11 +13938,11 @@
             <a:r>
               <a:rPr lang="en-US" sz="1500" b="1" dirty="0">
                 <a:solidFill>
-                  <a:srgbClr val="0B3C49"/>
-                </a:solidFill>
-                <a:latin typeface="Calibri" pitchFamily="34" charset="0"/>
-                <a:ea typeface="Calibri" pitchFamily="34" charset="-122"/>
-                <a:cs typeface="Calibri" pitchFamily="34" charset="-120"/>
+                  <a:srgbClr val="7A003F"/>
+                </a:solidFill>
+                <a:latin typeface="Lucida Sans" pitchFamily="34" charset="0"/>
+                <a:ea typeface="Lucida Sans" pitchFamily="34" charset="-122"/>
+                <a:cs typeface="Lucida Sans" pitchFamily="34" charset="-120"/>
               </a:rPr>
               <a:t>Rolle des mBot2</a:t>
             </a:r>
@@ -13879,11 +13977,11 @@
             <a:r>
               <a:rPr lang="en-US" sz="1500" dirty="0">
                 <a:solidFill>
-                  <a:srgbClr val="1F2A30"/>
-                </a:solidFill>
-                <a:latin typeface="Calibri" pitchFamily="34" charset="0"/>
-                <a:ea typeface="Calibri" pitchFamily="34" charset="-122"/>
-                <a:cs typeface="Calibri" pitchFamily="34" charset="-120"/>
+                  <a:srgbClr val="1D1D1B"/>
+                </a:solidFill>
+                <a:latin typeface="Lucida Sans" pitchFamily="34" charset="0"/>
+                <a:ea typeface="Lucida Sans" pitchFamily="34" charset="-122"/>
+                <a:cs typeface="Lucida Sans" pitchFamily="34" charset="-120"/>
               </a:rPr>
               <a:t>Was wird durch ihn möglich oder besser?</a:t>
             </a:r>
@@ -13908,11 +14006,11 @@
             </a:avLst>
           </a:prstGeom>
           <a:solidFill>
-            <a:srgbClr val="E6F2F1"/>
+            <a:srgbClr val="F2F2F2"/>
           </a:solidFill>
           <a:ln w="12700">
             <a:solidFill>
-              <a:srgbClr val="E6F2F1"/>
+              <a:srgbClr val="F2F2F2"/>
             </a:solidFill>
             <a:prstDash val="solid"/>
           </a:ln>
@@ -13933,11 +14031,11 @@
             <a:avLst/>
           </a:prstGeom>
           <a:solidFill>
-            <a:srgbClr val="0B6E69"/>
+            <a:srgbClr val="7A003F"/>
           </a:solidFill>
           <a:ln w="12700">
             <a:solidFill>
-              <a:srgbClr val="0B6E69"/>
+              <a:srgbClr val="7A003F"/>
             </a:solidFill>
             <a:prstDash val="solid"/>
           </a:ln>
@@ -13972,9 +14070,9 @@
                 <a:solidFill>
                   <a:srgbClr val="FFFFFF"/>
                 </a:solidFill>
-                <a:latin typeface="Calibri" pitchFamily="34" charset="0"/>
-                <a:ea typeface="Calibri" pitchFamily="34" charset="-122"/>
-                <a:cs typeface="Calibri" pitchFamily="34" charset="-120"/>
+                <a:latin typeface="Lucida Sans" pitchFamily="34" charset="0"/>
+                <a:ea typeface="Lucida Sans" pitchFamily="34" charset="-122"/>
+                <a:cs typeface="Lucida Sans" pitchFamily="34" charset="-120"/>
               </a:rPr>
               <a:t>3</a:t>
             </a:r>
@@ -14009,11 +14107,11 @@
             <a:r>
               <a:rPr lang="en-US" sz="1500" b="1" dirty="0">
                 <a:solidFill>
-                  <a:srgbClr val="0B3C49"/>
-                </a:solidFill>
-                <a:latin typeface="Calibri" pitchFamily="34" charset="0"/>
-                <a:ea typeface="Calibri" pitchFamily="34" charset="-122"/>
-                <a:cs typeface="Calibri" pitchFamily="34" charset="-120"/>
+                  <a:srgbClr val="7A003F"/>
+                </a:solidFill>
+                <a:latin typeface="Lucida Sans" pitchFamily="34" charset="0"/>
+                <a:ea typeface="Lucida Sans" pitchFamily="34" charset="-122"/>
+                <a:cs typeface="Lucida Sans" pitchFamily="34" charset="-120"/>
               </a:rPr>
               <a:t>Ablauf</a:t>
             </a:r>
@@ -14048,11 +14146,11 @@
             <a:r>
               <a:rPr lang="en-US" sz="1500" dirty="0">
                 <a:solidFill>
-                  <a:srgbClr val="1F2A30"/>
-                </a:solidFill>
-                <a:latin typeface="Calibri" pitchFamily="34" charset="0"/>
-                <a:ea typeface="Calibri" pitchFamily="34" charset="-122"/>
-                <a:cs typeface="Calibri" pitchFamily="34" charset="-120"/>
+                  <a:srgbClr val="1D1D1B"/>
+                </a:solidFill>
+                <a:latin typeface="Lucida Sans" pitchFamily="34" charset="0"/>
+                <a:ea typeface="Lucida Sans" pitchFamily="34" charset="-122"/>
+                <a:cs typeface="Lucida Sans" pitchFamily="34" charset="-120"/>
               </a:rPr>
               <a:t>Zeiten aus der Erprobung, mindestens 20 % Puffer</a:t>
             </a:r>
@@ -14077,11 +14175,11 @@
             </a:avLst>
           </a:prstGeom>
           <a:solidFill>
-            <a:srgbClr val="E6F2F1"/>
+            <a:srgbClr val="F2F2F2"/>
           </a:solidFill>
           <a:ln w="12700">
             <a:solidFill>
-              <a:srgbClr val="E6F2F1"/>
+              <a:srgbClr val="F2F2F2"/>
             </a:solidFill>
             <a:prstDash val="solid"/>
           </a:ln>
@@ -14102,11 +14200,11 @@
             <a:avLst/>
           </a:prstGeom>
           <a:solidFill>
-            <a:srgbClr val="0B6E69"/>
+            <a:srgbClr val="7A003F"/>
           </a:solidFill>
           <a:ln w="12700">
             <a:solidFill>
-              <a:srgbClr val="0B6E69"/>
+              <a:srgbClr val="7A003F"/>
             </a:solidFill>
             <a:prstDash val="solid"/>
           </a:ln>
@@ -14141,9 +14239,9 @@
                 <a:solidFill>
                   <a:srgbClr val="FFFFFF"/>
                 </a:solidFill>
-                <a:latin typeface="Calibri" pitchFamily="34" charset="0"/>
-                <a:ea typeface="Calibri" pitchFamily="34" charset="-122"/>
-                <a:cs typeface="Calibri" pitchFamily="34" charset="-120"/>
+                <a:latin typeface="Lucida Sans" pitchFamily="34" charset="0"/>
+                <a:ea typeface="Lucida Sans" pitchFamily="34" charset="-122"/>
+                <a:cs typeface="Lucida Sans" pitchFamily="34" charset="-120"/>
               </a:rPr>
               <a:t>4</a:t>
             </a:r>
@@ -14178,11 +14276,11 @@
             <a:r>
               <a:rPr lang="en-US" sz="1500" b="1" dirty="0">
                 <a:solidFill>
-                  <a:srgbClr val="0B3C49"/>
-                </a:solidFill>
-                <a:latin typeface="Calibri" pitchFamily="34" charset="0"/>
-                <a:ea typeface="Calibri" pitchFamily="34" charset="-122"/>
-                <a:cs typeface="Calibri" pitchFamily="34" charset="-120"/>
+                  <a:srgbClr val="7A003F"/>
+                </a:solidFill>
+                <a:latin typeface="Lucida Sans" pitchFamily="34" charset="0"/>
+                <a:ea typeface="Lucida Sans" pitchFamily="34" charset="-122"/>
+                <a:cs typeface="Lucida Sans" pitchFamily="34" charset="-120"/>
               </a:rPr>
               <a:t>Hürde → Hilfe</a:t>
             </a:r>
@@ -14217,11 +14315,11 @@
             <a:r>
               <a:rPr lang="en-US" sz="1500" dirty="0">
                 <a:solidFill>
-                  <a:srgbClr val="1F2A30"/>
-                </a:solidFill>
-                <a:latin typeface="Calibri" pitchFamily="34" charset="0"/>
-                <a:ea typeface="Calibri" pitchFamily="34" charset="-122"/>
-                <a:cs typeface="Calibri" pitchFamily="34" charset="-120"/>
+                  <a:srgbClr val="1D1D1B"/>
+                </a:solidFill>
+                <a:latin typeface="Lucida Sans" pitchFamily="34" charset="0"/>
+                <a:ea typeface="Lucida Sans" pitchFamily="34" charset="-122"/>
+                <a:cs typeface="Lucida Sans" pitchFamily="34" charset="-120"/>
               </a:rPr>
               <a:t>eine konkrete Lernhürde, eine passende Hilfe</a:t>
             </a:r>
@@ -14246,11 +14344,11 @@
             </a:avLst>
           </a:prstGeom>
           <a:solidFill>
-            <a:srgbClr val="E6F2F1"/>
+            <a:srgbClr val="F2F2F2"/>
           </a:solidFill>
           <a:ln w="12700">
             <a:solidFill>
-              <a:srgbClr val="E6F2F1"/>
+              <a:srgbClr val="F2F2F2"/>
             </a:solidFill>
             <a:prstDash val="solid"/>
           </a:ln>
@@ -14271,11 +14369,11 @@
             <a:avLst/>
           </a:prstGeom>
           <a:solidFill>
-            <a:srgbClr val="0B6E69"/>
+            <a:srgbClr val="7A003F"/>
           </a:solidFill>
           <a:ln w="12700">
             <a:solidFill>
-              <a:srgbClr val="0B6E69"/>
+              <a:srgbClr val="7A003F"/>
             </a:solidFill>
             <a:prstDash val="solid"/>
           </a:ln>
@@ -14310,9 +14408,9 @@
                 <a:solidFill>
                   <a:srgbClr val="FFFFFF"/>
                 </a:solidFill>
-                <a:latin typeface="Calibri" pitchFamily="34" charset="0"/>
-                <a:ea typeface="Calibri" pitchFamily="34" charset="-122"/>
-                <a:cs typeface="Calibri" pitchFamily="34" charset="-120"/>
+                <a:latin typeface="Lucida Sans" pitchFamily="34" charset="0"/>
+                <a:ea typeface="Lucida Sans" pitchFamily="34" charset="-122"/>
+                <a:cs typeface="Lucida Sans" pitchFamily="34" charset="-120"/>
               </a:rPr>
               <a:t>5</a:t>
             </a:r>
@@ -14347,11 +14445,11 @@
             <a:r>
               <a:rPr lang="en-US" sz="1500" b="1" dirty="0">
                 <a:solidFill>
-                  <a:srgbClr val="0B3C49"/>
-                </a:solidFill>
-                <a:latin typeface="Calibri" pitchFamily="34" charset="0"/>
-                <a:ea typeface="Calibri" pitchFamily="34" charset="-122"/>
-                <a:cs typeface="Calibri" pitchFamily="34" charset="-120"/>
+                  <a:srgbClr val="7A003F"/>
+                </a:solidFill>
+                <a:latin typeface="Lucida Sans" pitchFamily="34" charset="0"/>
+                <a:ea typeface="Lucida Sans" pitchFamily="34" charset="-122"/>
+                <a:cs typeface="Lucida Sans" pitchFamily="34" charset="-120"/>
               </a:rPr>
               <a:t>Vertiefung</a:t>
             </a:r>
@@ -14386,11 +14484,11 @@
             <a:r>
               <a:rPr lang="en-US" sz="1500" dirty="0">
                 <a:solidFill>
-                  <a:srgbClr val="1F2A30"/>
-                </a:solidFill>
-                <a:latin typeface="Calibri" pitchFamily="34" charset="0"/>
-                <a:ea typeface="Calibri" pitchFamily="34" charset="-122"/>
-                <a:cs typeface="Calibri" pitchFamily="34" charset="-120"/>
+                  <a:srgbClr val="1D1D1B"/>
+                </a:solidFill>
+                <a:latin typeface="Lucida Sans" pitchFamily="34" charset="0"/>
+                <a:ea typeface="Lucida Sans" pitchFamily="34" charset="-122"/>
+                <a:cs typeface="Lucida Sans" pitchFamily="34" charset="-120"/>
               </a:rPr>
               <a:t>für Schnelle – fachlich, nicht „mehr vom Gleichen“</a:t>
             </a:r>
@@ -14415,11 +14513,11 @@
             </a:avLst>
           </a:prstGeom>
           <a:solidFill>
-            <a:srgbClr val="E6F2F1"/>
+            <a:srgbClr val="F2F2F2"/>
           </a:solidFill>
           <a:ln w="12700">
             <a:solidFill>
-              <a:srgbClr val="E6F2F1"/>
+              <a:srgbClr val="F2F2F2"/>
             </a:solidFill>
             <a:prstDash val="solid"/>
           </a:ln>
@@ -14440,11 +14538,11 @@
             <a:avLst/>
           </a:prstGeom>
           <a:solidFill>
-            <a:srgbClr val="0B6E69"/>
+            <a:srgbClr val="7A003F"/>
           </a:solidFill>
           <a:ln w="12700">
             <a:solidFill>
-              <a:srgbClr val="0B6E69"/>
+              <a:srgbClr val="7A003F"/>
             </a:solidFill>
             <a:prstDash val="solid"/>
           </a:ln>
@@ -14479,9 +14577,9 @@
                 <a:solidFill>
                   <a:srgbClr val="FFFFFF"/>
                 </a:solidFill>
-                <a:latin typeface="Calibri" pitchFamily="34" charset="0"/>
-                <a:ea typeface="Calibri" pitchFamily="34" charset="-122"/>
-                <a:cs typeface="Calibri" pitchFamily="34" charset="-120"/>
+                <a:latin typeface="Lucida Sans" pitchFamily="34" charset="0"/>
+                <a:ea typeface="Lucida Sans" pitchFamily="34" charset="-122"/>
+                <a:cs typeface="Lucida Sans" pitchFamily="34" charset="-120"/>
               </a:rPr>
               <a:t>6</a:t>
             </a:r>
@@ -14516,11 +14614,11 @@
             <a:r>
               <a:rPr lang="en-US" sz="1500" b="1" dirty="0">
                 <a:solidFill>
-                  <a:srgbClr val="0B3C49"/>
-                </a:solidFill>
-                <a:latin typeface="Calibri" pitchFamily="34" charset="0"/>
-                <a:ea typeface="Calibri" pitchFamily="34" charset="-122"/>
-                <a:cs typeface="Calibri" pitchFamily="34" charset="-120"/>
+                  <a:srgbClr val="7A003F"/>
+                </a:solidFill>
+                <a:latin typeface="Lucida Sans" pitchFamily="34" charset="0"/>
+                <a:ea typeface="Lucida Sans" pitchFamily="34" charset="-122"/>
+                <a:cs typeface="Lucida Sans" pitchFamily="34" charset="-120"/>
               </a:rPr>
               <a:t>Lernnachweis</a:t>
             </a:r>
@@ -14555,11 +14653,11 @@
             <a:r>
               <a:rPr lang="en-US" sz="1500" dirty="0">
                 <a:solidFill>
-                  <a:srgbClr val="1F2A30"/>
-                </a:solidFill>
-                <a:latin typeface="Calibri" pitchFamily="34" charset="0"/>
-                <a:ea typeface="Calibri" pitchFamily="34" charset="-122"/>
-                <a:cs typeface="Calibri" pitchFamily="34" charset="-120"/>
+                  <a:srgbClr val="1D1D1B"/>
+                </a:solidFill>
+                <a:latin typeface="Lucida Sans" pitchFamily="34" charset="0"/>
+                <a:ea typeface="Lucida Sans" pitchFamily="34" charset="-122"/>
+                <a:cs typeface="Lucida Sans" pitchFamily="34" charset="-120"/>
               </a:rPr>
               <a:t>Woran sieht man den Lernzuwachs?</a:t>
             </a:r>
@@ -14584,11 +14682,11 @@
             </a:avLst>
           </a:prstGeom>
           <a:solidFill>
-            <a:srgbClr val="FCEBDD"/>
+            <a:srgbClr val="FDF0E3"/>
           </a:solidFill>
           <a:ln w="12700">
             <a:solidFill>
-              <a:srgbClr val="FCEBDD"/>
+              <a:srgbClr val="FDF0E3"/>
             </a:solidFill>
             <a:prstDash val="solid"/>
           </a:ln>
@@ -14609,11 +14707,11 @@
             <a:avLst/>
           </a:prstGeom>
           <a:solidFill>
-            <a:srgbClr val="E8772E"/>
+            <a:srgbClr val="EF7D00"/>
           </a:solidFill>
           <a:ln w="12700">
             <a:solidFill>
-              <a:srgbClr val="E8772E"/>
+              <a:srgbClr val="EF7D00"/>
             </a:solidFill>
             <a:prstDash val="solid"/>
           </a:ln>
@@ -14646,11 +14744,11 @@
             <a:r>
               <a:rPr lang="en-US" sz="1400" b="1" dirty="0">
                 <a:solidFill>
-                  <a:srgbClr val="FFFFFF"/>
-                </a:solidFill>
-                <a:latin typeface="Calibri" pitchFamily="34" charset="0"/>
-                <a:ea typeface="Calibri" pitchFamily="34" charset="-122"/>
-                <a:cs typeface="Calibri" pitchFamily="34" charset="-120"/>
+                  <a:srgbClr val="1D1D1B"/>
+                </a:solidFill>
+                <a:latin typeface="Lucida Sans" pitchFamily="34" charset="0"/>
+                <a:ea typeface="Lucida Sans" pitchFamily="34" charset="-122"/>
+                <a:cs typeface="Lucida Sans" pitchFamily="34" charset="-120"/>
               </a:rPr>
               <a:t>7</a:t>
             </a:r>
@@ -14685,11 +14783,11 @@
             <a:r>
               <a:rPr lang="en-US" sz="1500" b="1" dirty="0">
                 <a:solidFill>
-                  <a:srgbClr val="0B3C49"/>
-                </a:solidFill>
-                <a:latin typeface="Calibri" pitchFamily="34" charset="0"/>
-                <a:ea typeface="Calibri" pitchFamily="34" charset="-122"/>
-                <a:cs typeface="Calibri" pitchFamily="34" charset="-120"/>
+                  <a:srgbClr val="7A003F"/>
+                </a:solidFill>
+                <a:latin typeface="Lucida Sans" pitchFamily="34" charset="0"/>
+                <a:ea typeface="Lucida Sans" pitchFamily="34" charset="-122"/>
+                <a:cs typeface="Lucida Sans" pitchFamily="34" charset="-120"/>
               </a:rPr>
               <a:t>Übergabe</a:t>
             </a:r>
@@ -14724,11 +14822,11 @@
             <a:r>
               <a:rPr lang="en-US" sz="1500" dirty="0">
                 <a:solidFill>
-                  <a:srgbClr val="1F2A30"/>
-                </a:solidFill>
-                <a:latin typeface="Calibri" pitchFamily="34" charset="0"/>
-                <a:ea typeface="Calibri" pitchFamily="34" charset="-122"/>
-                <a:cs typeface="Calibri" pitchFamily="34" charset="-120"/>
+                  <a:srgbClr val="1D1D1B"/>
+                </a:solidFill>
+                <a:latin typeface="Lucida Sans" pitchFamily="34" charset="0"/>
+                <a:ea typeface="Lucida Sans" pitchFamily="34" charset="-122"/>
+                <a:cs typeface="Lucida Sans" pitchFamily="34" charset="-120"/>
               </a:rPr>
               <a:t>was wir brauchen, was wir weitergeben</a:t>
             </a:r>
@@ -14753,11 +14851,11 @@
             </a:avLst>
           </a:prstGeom>
           <a:solidFill>
-            <a:srgbClr val="E6F2F1"/>
+            <a:srgbClr val="F2F2F2"/>
           </a:solidFill>
           <a:ln w="12700">
             <a:solidFill>
-              <a:srgbClr val="E6F2F1"/>
+              <a:srgbClr val="F2F2F2"/>
             </a:solidFill>
             <a:prstDash val="solid"/>
           </a:ln>
@@ -14778,11 +14876,11 @@
             <a:avLst/>
           </a:prstGeom>
           <a:solidFill>
-            <a:srgbClr val="0B6E69"/>
+            <a:srgbClr val="7A003F"/>
           </a:solidFill>
           <a:ln w="12700">
             <a:solidFill>
-              <a:srgbClr val="0B6E69"/>
+              <a:srgbClr val="7A003F"/>
             </a:solidFill>
             <a:prstDash val="solid"/>
           </a:ln>
@@ -14817,9 +14915,9 @@
                 <a:solidFill>
                   <a:srgbClr val="FFFFFF"/>
                 </a:solidFill>
-                <a:latin typeface="Calibri" pitchFamily="34" charset="0"/>
-                <a:ea typeface="Calibri" pitchFamily="34" charset="-122"/>
-                <a:cs typeface="Calibri" pitchFamily="34" charset="-120"/>
+                <a:latin typeface="Lucida Sans" pitchFamily="34" charset="0"/>
+                <a:ea typeface="Lucida Sans" pitchFamily="34" charset="-122"/>
+                <a:cs typeface="Lucida Sans" pitchFamily="34" charset="-120"/>
               </a:rPr>
               <a:t>+</a:t>
             </a:r>
@@ -14854,11 +14952,11 @@
             <a:r>
               <a:rPr lang="en-US" sz="1500" b="1" dirty="0">
                 <a:solidFill>
-                  <a:srgbClr val="0B3C49"/>
-                </a:solidFill>
-                <a:latin typeface="Calibri" pitchFamily="34" charset="0"/>
-                <a:ea typeface="Calibri" pitchFamily="34" charset="-122"/>
-                <a:cs typeface="Calibri" pitchFamily="34" charset="-120"/>
+                  <a:srgbClr val="7A003F"/>
+                </a:solidFill>
+                <a:latin typeface="Lucida Sans" pitchFamily="34" charset="0"/>
+                <a:ea typeface="Lucida Sans" pitchFamily="34" charset="-122"/>
+                <a:cs typeface="Lucida Sans" pitchFamily="34" charset="-120"/>
               </a:rPr>
               <a:t>Lehrplanbezug</a:t>
             </a:r>
@@ -14893,11 +14991,11 @@
             <a:r>
               <a:rPr lang="en-US" sz="1500" dirty="0">
                 <a:solidFill>
-                  <a:srgbClr val="1F2A30"/>
-                </a:solidFill>
-                <a:latin typeface="Calibri" pitchFamily="34" charset="0"/>
-                <a:ea typeface="Calibri" pitchFamily="34" charset="-122"/>
-                <a:cs typeface="Calibri" pitchFamily="34" charset="-120"/>
+                  <a:srgbClr val="1D1D1B"/>
+                </a:solidFill>
+                <a:latin typeface="Lucida Sans" pitchFamily="34" charset="0"/>
+                <a:ea typeface="Lucida Sans" pitchFamily="34" charset="-122"/>
+                <a:cs typeface="Lucida Sans" pitchFamily="34" charset="-120"/>
               </a:rPr>
               <a:t>Fundstelle aus dem Fachlehrplan Sachsen-Anhalt</a:t>
             </a:r>
@@ -14935,11 +15033,11 @@
             <a:lvl1pPr>
               <a:defRPr sz="1000">
                 <a:solidFill>
-                  <a:srgbClr val="5B6B73"/>
-                </a:solidFill>
-                <a:latin typeface="Calibri"/>
-                <a:ea typeface="Calibri"/>
-                <a:cs typeface="Calibri"/>
+                  <a:srgbClr val="706F6F"/>
+                </a:solidFill>
+                <a:latin typeface="Lucida Sans"/>
+                <a:ea typeface="Lucida Sans"/>
+                <a:cs typeface="Lucida Sans"/>
               </a:defRPr>
             </a:lvl1pPr>
           </a:lstStyle>
@@ -15004,7 +15102,7 @@
     </a:clrScheme>
     <a:fontScheme name="Office">
       <a:majorFont>
-        <a:latin typeface="Cambria"/>
+        <a:latin typeface="Lucida Sans"/>
         <a:ea typeface=""/>
         <a:cs typeface=""/>
         <a:font script="Jpan" typeface="游ゴシック Light"/>
@@ -15056,7 +15154,7 @@
         <a:font script="Tfng" typeface="Ebrima"/>
       </a:majorFont>
       <a:minorFont>
-        <a:latin typeface="Calibri"/>
+        <a:latin typeface="Lucida Sans"/>
         <a:ea typeface=""/>
         <a:cs typeface=""/>
         <a:font script="Jpan" typeface="游ゴシック"/>
